--- a/assessment/presentation/From Launch to Litter Orbital Overload.pptx
+++ b/assessment/presentation/From Launch to Litter Orbital Overload.pptx
@@ -166,7 +166,7 @@
         <p:txBody>
           <a:bodyPr/>
           <a:p>
-            <a:fld id="{80E77A3C-CDF8-464D-A6C7-AD1B6319927B}" type="slidenum">
+            <a:fld id="{BCA267AE-E5A3-4F2B-919B-273D8FEFFDB2}" type="slidenum">
               <a:t>&lt;#&gt;</a:t>
             </a:fld>
           </a:p>
@@ -249,7 +249,7 @@
         <p:txBody>
           <a:bodyPr/>
           <a:p>
-            <a:fld id="{2D9855C2-0747-46EB-88C0-93083174CA53}" type="slidenum">
+            <a:fld id="{F72AE252-42CC-4696-A42D-9704070ECFC8}" type="slidenum">
               <a:t>&lt;#&gt;</a:t>
             </a:fld>
           </a:p>
@@ -332,7 +332,7 @@
         <p:txBody>
           <a:bodyPr/>
           <a:p>
-            <a:fld id="{9793766F-A097-4D00-B967-8099654B0702}" type="slidenum">
+            <a:fld id="{2B068492-FF6A-410F-A7D6-64FBDFE93790}" type="slidenum">
               <a:t>&lt;#&gt;</a:t>
             </a:fld>
           </a:p>
@@ -415,7 +415,7 @@
         <p:txBody>
           <a:bodyPr/>
           <a:p>
-            <a:fld id="{0CB3A1CD-1F24-4260-A08B-207680AE39DD}" type="slidenum">
+            <a:fld id="{024E5109-4A08-4923-938C-F17FA25AE9EE}" type="slidenum">
               <a:t>&lt;#&gt;</a:t>
             </a:fld>
           </a:p>
@@ -498,7 +498,7 @@
         <p:txBody>
           <a:bodyPr/>
           <a:p>
-            <a:fld id="{96573F55-91C6-4EFB-BACA-EAD6DAE835CC}" type="slidenum">
+            <a:fld id="{A30A0DEC-E8EC-4C81-BCDB-16686FC212D8}" type="slidenum">
               <a:t>&lt;#&gt;</a:t>
             </a:fld>
           </a:p>
@@ -664,7 +664,7 @@
         <p:txBody>
           <a:bodyPr/>
           <a:p>
-            <a:fld id="{6E559702-CD2B-430B-AF02-5ADF1C6CBB74}" type="slidenum">
+            <a:fld id="{39441D2B-C001-4ED0-975B-15C20562FE46}" type="slidenum">
               <a:t>&lt;#&gt;</a:t>
             </a:fld>
           </a:p>
@@ -747,7 +747,7 @@
         <p:txBody>
           <a:bodyPr/>
           <a:p>
-            <a:fld id="{9B69D170-6956-4A65-A6E6-4F7798BC58A5}" type="slidenum">
+            <a:fld id="{5CC43A37-ABA6-4BEF-86A9-8F4E67DF8EE3}" type="slidenum">
               <a:t>&lt;#&gt;</a:t>
             </a:fld>
           </a:p>
@@ -956,7 +956,7 @@
         <p:txBody>
           <a:bodyPr/>
           <a:p>
-            <a:fld id="{AB2B5E0B-3778-4AE6-9DA0-7A2190E0A81F}" type="slidenum">
+            <a:fld id="{3C14854A-2B45-4F07-9DCE-929A3D6FFD5C}" type="slidenum">
               <a:t>&lt;#&gt;</a:t>
             </a:fld>
           </a:p>
@@ -1039,7 +1039,7 @@
         <p:txBody>
           <a:bodyPr/>
           <a:p>
-            <a:fld id="{AEA5CD6C-FAA3-41DC-91F2-3A4E1C456C9C}" type="slidenum">
+            <a:fld id="{C4BDF325-5E79-4BC9-B219-D44F946A8834}" type="slidenum">
               <a:t>&lt;#&gt;</a:t>
             </a:fld>
           </a:p>
@@ -1162,7 +1162,7 @@
         <p:txBody>
           <a:bodyPr/>
           <a:p>
-            <a:fld id="{D48C285D-EECF-4338-981E-1E1DE1A91F2E}" type="slidenum">
+            <a:fld id="{2E68A4FB-89EB-46DC-B858-CA38E59CE082}" type="slidenum">
               <a:t>&lt;#&gt;</a:t>
             </a:fld>
           </a:p>
@@ -1245,7 +1245,7 @@
         <p:txBody>
           <a:bodyPr/>
           <a:p>
-            <a:fld id="{CC39A42D-D1FF-401A-B79D-520979DD44C6}" type="slidenum">
+            <a:fld id="{39EF1F5D-155E-48B4-8C60-7A0338674FB1}" type="slidenum">
               <a:t>&lt;#&gt;</a:t>
             </a:fld>
           </a:p>
@@ -1342,25 +1342,7 @@
                 </a:solidFill>
                 <a:latin typeface="Calibri"/>
               </a:rPr>
-              <a:t>Click to edit </a:t>
-            </a:r>
-            <a:r>
-              <a:rPr b="0" lang="en-US" sz="4400" spc="-1" strike="noStrike">
-                <a:solidFill>
-                  <a:schemeClr val="dk1"/>
-                </a:solidFill>
-                <a:latin typeface="Calibri"/>
-              </a:rPr>
-              <a:t>Master title </a:t>
-            </a:r>
-            <a:r>
-              <a:rPr b="0" lang="en-US" sz="4400" spc="-1" strike="noStrike">
-                <a:solidFill>
-                  <a:schemeClr val="dk1"/>
-                </a:solidFill>
-                <a:latin typeface="Calibri"/>
-              </a:rPr>
-              <a:t>style</a:t>
+              <a:t>Click to edit Master title style</a:t>
             </a:r>
             <a:endParaRPr b="0" lang="en-US" sz="4400" spc="-1" strike="noStrike">
               <a:solidFill>
@@ -1551,7 +1533,7 @@
               </a:lnSpc>
               <a:buNone/>
             </a:pPr>
-            <a:fld id="{59850786-4A77-474B-B571-97A85FF242C2}" type="slidenum">
+            <a:fld id="{42F2DF88-9B2C-4455-9911-78685108DEE6}" type="slidenum">
               <a:rPr b="0" lang="en-US" sz="1200" spc="-1" strike="noStrike">
                 <a:solidFill>
                   <a:schemeClr val="dk1">
@@ -2073,7 +2055,7 @@
               </a:lnSpc>
               <a:buNone/>
             </a:pPr>
-            <a:fld id="{4AA0028F-63F2-407A-B931-EFA047A39C12}" type="slidenum">
+            <a:fld id="{45A54B93-CEC8-4400-94B9-7C13CB892651}" type="slidenum">
               <a:rPr b="0" lang="en-US" sz="1200" spc="-1" strike="noStrike">
                 <a:solidFill>
                   <a:schemeClr val="dk1">
@@ -2641,7 +2623,7 @@
               </a:lnSpc>
               <a:buNone/>
             </a:pPr>
-            <a:fld id="{9B963DD3-22B9-498E-BFE0-C950AB4AB7D8}" type="slidenum">
+            <a:fld id="{19B4D6BF-8E15-486A-B68F-4A4A718FE345}" type="slidenum">
               <a:rPr b="0" lang="en-US" sz="1200" spc="-1" strike="noStrike">
                 <a:solidFill>
                   <a:schemeClr val="dk1">
@@ -2735,7 +2717,25 @@
                 </a:solidFill>
                 <a:latin typeface="Calibri"/>
               </a:rPr>
-              <a:t>Click to edit Master title style</a:t>
+              <a:t>Click to edit </a:t>
+            </a:r>
+            <a:r>
+              <a:rPr b="0" lang="en-US" sz="4400" spc="-1" strike="noStrike">
+                <a:solidFill>
+                  <a:schemeClr val="dk1"/>
+                </a:solidFill>
+                <a:latin typeface="Calibri"/>
+              </a:rPr>
+              <a:t>Master title </a:t>
+            </a:r>
+            <a:r>
+              <a:rPr b="0" lang="en-US" sz="4400" spc="-1" strike="noStrike">
+                <a:solidFill>
+                  <a:schemeClr val="dk1"/>
+                </a:solidFill>
+                <a:latin typeface="Calibri"/>
+              </a:rPr>
+              <a:t>style</a:t>
             </a:r>
             <a:endParaRPr b="0" lang="en-US" sz="4400" spc="-1" strike="noStrike">
               <a:solidFill>
@@ -3105,7 +3105,7 @@
               </a:lnSpc>
               <a:buNone/>
             </a:pPr>
-            <a:fld id="{6D9C3322-2CA0-4844-9E4F-68108CEC0CDA}" type="slidenum">
+            <a:fld id="{F7B54AD1-4B96-499F-B4EC-D114FFEDD387}" type="slidenum">
               <a:rPr b="0" lang="en-US" sz="1200" spc="-1" strike="noStrike">
                 <a:solidFill>
                   <a:schemeClr val="dk1">
@@ -3569,7 +3569,7 @@
               </a:lnSpc>
               <a:buNone/>
             </a:pPr>
-            <a:fld id="{7E793BBA-8702-4318-BD16-9C5720236316}" type="slidenum">
+            <a:fld id="{5B836522-343A-44BA-822A-A67E74FCBC70}" type="slidenum">
               <a:rPr b="0" lang="en-US" sz="1200" spc="-1" strike="noStrike">
                 <a:solidFill>
                   <a:schemeClr val="dk1">
@@ -3663,25 +3663,7 @@
                 </a:solidFill>
                 <a:latin typeface="Calibri"/>
               </a:rPr>
-              <a:t>Click to edit </a:t>
-            </a:r>
-            <a:r>
-              <a:rPr b="0" lang="en-US" sz="4400" spc="-1" strike="noStrike">
-                <a:solidFill>
-                  <a:schemeClr val="dk1"/>
-                </a:solidFill>
-                <a:latin typeface="Calibri"/>
-              </a:rPr>
-              <a:t>Master title </a:t>
-            </a:r>
-            <a:r>
-              <a:rPr b="0" lang="en-US" sz="4400" spc="-1" strike="noStrike">
-                <a:solidFill>
-                  <a:schemeClr val="dk1"/>
-                </a:solidFill>
-                <a:latin typeface="Calibri"/>
-              </a:rPr>
-              <a:t>style</a:t>
+              <a:t>Click to edit Master title style</a:t>
             </a:r>
             <a:endParaRPr b="0" lang="en-US" sz="4400" spc="-1" strike="noStrike">
               <a:solidFill>
@@ -4051,7 +4033,7 @@
               </a:lnSpc>
               <a:buNone/>
             </a:pPr>
-            <a:fld id="{BDCD5C00-5FCA-4C55-B098-1F29FCEE6946}" type="slidenum">
+            <a:fld id="{1127B1A8-EEF2-4ECB-AA95-43EF66F929B7}" type="slidenum">
               <a:rPr b="0" lang="en-US" sz="1200" spc="-1" strike="noStrike">
                 <a:solidFill>
                   <a:schemeClr val="dk1">
@@ -4396,7 +4378,7 @@
               </a:lnSpc>
               <a:buNone/>
             </a:pPr>
-            <a:fld id="{1C8634B3-F578-4D82-97B9-EAFEED8C697F}" type="slidenum">
+            <a:fld id="{D7373975-94C2-4FF6-BE59-EC1A1341FC18}" type="slidenum">
               <a:rPr b="0" lang="en-US" sz="1200" spc="-1" strike="noStrike">
                 <a:solidFill>
                   <a:schemeClr val="dk1">
@@ -5039,7 +5021,7 @@
               </a:lnSpc>
               <a:buNone/>
             </a:pPr>
-            <a:fld id="{21C09D2F-E3E2-42DE-AAF3-E4FCCF64C4E8}" type="slidenum">
+            <a:fld id="{B3A0E49E-FE22-4EC3-9771-DE197B3C40FD}" type="slidenum">
               <a:rPr b="0" lang="en-US" sz="1200" spc="-1" strike="noStrike">
                 <a:solidFill>
                   <a:schemeClr val="dk1">
@@ -5798,7 +5780,7 @@
               </a:lnSpc>
               <a:buNone/>
             </a:pPr>
-            <a:fld id="{5664A273-42E8-41A7-9483-CAF5E2A88BE9}" type="slidenum">
+            <a:fld id="{DA8F9B95-4131-4A1F-B402-776F670E0E01}" type="slidenum">
               <a:rPr b="0" lang="en-US" sz="1200" spc="-1" strike="noStrike">
                 <a:solidFill>
                   <a:schemeClr val="dk1">
@@ -6083,7 +6065,7 @@
               </a:lnSpc>
               <a:buNone/>
             </a:pPr>
-            <a:fld id="{36D84F01-6ACF-451B-BEAE-BD88F8BADA36}" type="slidenum">
+            <a:fld id="{A8CBC18F-4C6D-426B-B530-B54BA1529172}" type="slidenum">
               <a:rPr b="0" lang="en-US" sz="1200" spc="-1" strike="noStrike">
                 <a:solidFill>
                   <a:schemeClr val="dk1">
@@ -6316,7 +6298,7 @@
               </a:lnSpc>
               <a:buNone/>
             </a:pPr>
-            <a:fld id="{718104BA-566A-4E61-A031-54C6124F1396}" type="slidenum">
+            <a:fld id="{4B52C89D-D271-4194-B92C-A9777EF9608B}" type="slidenum">
               <a:rPr b="0" lang="en-US" sz="1200" spc="-1" strike="noStrike">
                 <a:solidFill>
                   <a:schemeClr val="dk1">
@@ -13054,7 +13036,7 @@
         </p:blipFill>
         <p:spPr>
           <a:xfrm>
-            <a:off x="2514600" y="2391120"/>
+            <a:off x="334080" y="2366280"/>
             <a:ext cx="13182120" cy="7689240"/>
           </a:xfrm>
           <a:prstGeom prst="rect">

--- a/assessment/presentation/From Launch to Litter Orbital Overload.pptx
+++ b/assessment/presentation/From Launch to Litter Orbital Overload.pptx
@@ -81,14 +81,14 @@
             <a:noAutofit/>
           </a:bodyPr>
           <a:p>
-            <a:pPr indent="0">
+            <a:pPr indent="0" algn="ctr">
               <a:buNone/>
             </a:pPr>
-            <a:endParaRPr b="0" lang="en-US" sz="1800" spc="-1" strike="noStrike">
-              <a:solidFill>
-                <a:schemeClr val="dk1"/>
-              </a:solidFill>
-              <a:latin typeface="Calibri"/>
+            <a:endParaRPr b="0" lang="en-US" sz="4400" spc="-1" strike="noStrike">
+              <a:solidFill>
+                <a:srgbClr val="000000"/>
+              </a:solidFill>
+              <a:latin typeface="Arial"/>
             </a:endParaRPr>
           </a:p>
         </p:txBody>
@@ -167,7 +167,7 @@
         <p:txBody>
           <a:bodyPr/>
           <a:p>
-            <a:fld id="{D1224DEE-CDF2-456D-9792-3FB817BB5D36}" type="slidenum">
+            <a:fld id="{3FEC978C-BC05-4031-8C8E-5B843554887E}" type="slidenum">
               <a:t>&lt;#&gt;</a:t>
             </a:fld>
           </a:p>
@@ -250,7 +250,7 @@
         <p:txBody>
           <a:bodyPr/>
           <a:p>
-            <a:fld id="{FE4A7883-7C6F-4DDD-B850-78B5894FD888}" type="slidenum">
+            <a:fld id="{2D44D404-1E0F-4B7C-B617-D6FC62A7390C}" type="slidenum">
               <a:t>&lt;#&gt;</a:t>
             </a:fld>
           </a:p>
@@ -333,7 +333,7 @@
         <p:txBody>
           <a:bodyPr/>
           <a:p>
-            <a:fld id="{237FA80C-D385-446B-8882-7CE069587A19}" type="slidenum">
+            <a:fld id="{5A5D7641-5049-4C1B-AEBF-B650FBA2414D}" type="slidenum">
               <a:t>&lt;#&gt;</a:t>
             </a:fld>
           </a:p>
@@ -416,7 +416,7 @@
         <p:txBody>
           <a:bodyPr/>
           <a:p>
-            <a:fld id="{AC5C8DAA-3B55-43E4-9847-739F8B9F45E3}" type="slidenum">
+            <a:fld id="{A1AE1D23-D968-4240-8DDA-D789422E89FE}" type="slidenum">
               <a:t>&lt;#&gt;</a:t>
             </a:fld>
           </a:p>
@@ -499,7 +499,7 @@
         <p:txBody>
           <a:bodyPr/>
           <a:p>
-            <a:fld id="{718B47FE-5FB9-4E58-83B6-8F17C792290D}" type="slidenum">
+            <a:fld id="{E235F30A-489B-42E9-BF7D-DA4543821A64}" type="slidenum">
               <a:t>&lt;#&gt;</a:t>
             </a:fld>
           </a:p>
@@ -576,14 +576,14 @@
             <a:noAutofit/>
           </a:bodyPr>
           <a:p>
-            <a:pPr indent="0">
+            <a:pPr indent="0" algn="ctr">
               <a:buNone/>
             </a:pPr>
-            <a:endParaRPr b="0" lang="en-US" sz="1800" spc="-1" strike="noStrike">
-              <a:solidFill>
-                <a:schemeClr val="dk1"/>
-              </a:solidFill>
-              <a:latin typeface="Calibri"/>
+            <a:endParaRPr b="0" lang="en-US" sz="4400" spc="-1" strike="noStrike">
+              <a:solidFill>
+                <a:srgbClr val="000000"/>
+              </a:solidFill>
+              <a:latin typeface="Arial"/>
             </a:endParaRPr>
           </a:p>
         </p:txBody>
@@ -617,19 +617,16 @@
           </a:bodyPr>
           <a:p>
             <a:pPr indent="0">
-              <a:lnSpc>
-                <a:spcPct val="90000"/>
-              </a:lnSpc>
               <a:spcBef>
                 <a:spcPts val="1417"/>
               </a:spcBef>
               <a:buNone/>
             </a:pPr>
-            <a:endParaRPr b="0" lang="en-US" sz="2800" spc="-1" strike="noStrike">
-              <a:solidFill>
-                <a:schemeClr val="dk1"/>
-              </a:solidFill>
-              <a:latin typeface="Calibri"/>
+            <a:endParaRPr b="0" lang="en-US" sz="3200" spc="-1" strike="noStrike">
+              <a:solidFill>
+                <a:srgbClr val="000000"/>
+              </a:solidFill>
+              <a:latin typeface="Arial"/>
             </a:endParaRPr>
           </a:p>
         </p:txBody>
@@ -668,7 +665,7 @@
         <p:txBody>
           <a:bodyPr/>
           <a:p>
-            <a:fld id="{2A109C99-77F6-4756-B1EE-965F2B7BDD68}" type="slidenum">
+            <a:fld id="{90708870-3FB5-4D6A-9564-8F3BEA3522E8}" type="slidenum">
               <a:t>&lt;#&gt;</a:t>
             </a:fld>
           </a:p>
@@ -751,7 +748,7 @@
         <p:txBody>
           <a:bodyPr/>
           <a:p>
-            <a:fld id="{C3C0760C-16BB-445F-9170-C46F94AD39D2}" type="slidenum">
+            <a:fld id="{3DEC0E41-D046-4105-A5B7-843AA19A9121}" type="slidenum">
               <a:t>&lt;#&gt;</a:t>
             </a:fld>
           </a:p>
@@ -828,14 +825,14 @@
             <a:noAutofit/>
           </a:bodyPr>
           <a:p>
-            <a:pPr indent="0">
+            <a:pPr indent="0" algn="ctr">
               <a:buNone/>
             </a:pPr>
-            <a:endParaRPr b="0" lang="en-US" sz="1800" spc="-1" strike="noStrike">
-              <a:solidFill>
-                <a:schemeClr val="dk1"/>
-              </a:solidFill>
-              <a:latin typeface="Calibri"/>
+            <a:endParaRPr b="0" lang="en-US" sz="4400" spc="-1" strike="noStrike">
+              <a:solidFill>
+                <a:srgbClr val="000000"/>
+              </a:solidFill>
+              <a:latin typeface="Arial"/>
             </a:endParaRPr>
           </a:p>
         </p:txBody>
@@ -869,19 +866,16 @@
           </a:bodyPr>
           <a:p>
             <a:pPr indent="0">
-              <a:lnSpc>
-                <a:spcPct val="90000"/>
-              </a:lnSpc>
               <a:spcBef>
                 <a:spcPts val="1417"/>
               </a:spcBef>
               <a:buNone/>
             </a:pPr>
-            <a:endParaRPr b="0" lang="en-US" sz="2800" spc="-1" strike="noStrike">
-              <a:solidFill>
-                <a:schemeClr val="dk1"/>
-              </a:solidFill>
-              <a:latin typeface="Calibri"/>
+            <a:endParaRPr b="0" lang="en-US" sz="3200" spc="-1" strike="noStrike">
+              <a:solidFill>
+                <a:srgbClr val="000000"/>
+              </a:solidFill>
+              <a:latin typeface="Arial"/>
             </a:endParaRPr>
           </a:p>
         </p:txBody>
@@ -915,19 +909,16 @@
           </a:bodyPr>
           <a:p>
             <a:pPr indent="0">
-              <a:lnSpc>
-                <a:spcPct val="90000"/>
-              </a:lnSpc>
               <a:spcBef>
                 <a:spcPts val="1417"/>
               </a:spcBef>
               <a:buNone/>
             </a:pPr>
-            <a:endParaRPr b="0" lang="en-US" sz="2800" spc="-1" strike="noStrike">
-              <a:solidFill>
-                <a:schemeClr val="dk1"/>
-              </a:solidFill>
-              <a:latin typeface="Calibri"/>
+            <a:endParaRPr b="0" lang="en-US" sz="3200" spc="-1" strike="noStrike">
+              <a:solidFill>
+                <a:srgbClr val="000000"/>
+              </a:solidFill>
+              <a:latin typeface="Arial"/>
             </a:endParaRPr>
           </a:p>
         </p:txBody>
@@ -966,7 +957,7 @@
         <p:txBody>
           <a:bodyPr/>
           <a:p>
-            <a:fld id="{9D316539-DE08-4EA0-9408-590DEAD961EA}" type="slidenum">
+            <a:fld id="{B1568C54-7E3E-4ACF-98CA-6966289A88E9}" type="slidenum">
               <a:t>&lt;#&gt;</a:t>
             </a:fld>
           </a:p>
@@ -1049,7 +1040,7 @@
         <p:txBody>
           <a:bodyPr/>
           <a:p>
-            <a:fld id="{6B2C5E16-9535-4FE6-BB0E-437A73A93702}" type="slidenum">
+            <a:fld id="{7384D0DD-B40B-4642-AEC1-F7AD27A7179F}" type="slidenum">
               <a:t>&lt;#&gt;</a:t>
             </a:fld>
           </a:p>
@@ -1126,14 +1117,14 @@
             <a:noAutofit/>
           </a:bodyPr>
           <a:p>
-            <a:pPr indent="0">
+            <a:pPr indent="0" algn="ctr">
               <a:buNone/>
             </a:pPr>
-            <a:endParaRPr b="0" lang="en-US" sz="1800" spc="-1" strike="noStrike">
-              <a:solidFill>
-                <a:schemeClr val="dk1"/>
-              </a:solidFill>
-              <a:latin typeface="Calibri"/>
+            <a:endParaRPr b="0" lang="en-US" sz="4400" spc="-1" strike="noStrike">
+              <a:solidFill>
+                <a:srgbClr val="000000"/>
+              </a:solidFill>
+              <a:latin typeface="Arial"/>
             </a:endParaRPr>
           </a:p>
         </p:txBody>
@@ -1172,7 +1163,7 @@
         <p:txBody>
           <a:bodyPr/>
           <a:p>
-            <a:fld id="{F0BC09E8-F6C4-4027-BD13-3D275A27416B}" type="slidenum">
+            <a:fld id="{0D33A0C0-FA1E-48C0-A5EB-63AFFD4809F0}" type="slidenum">
               <a:t>&lt;#&gt;</a:t>
             </a:fld>
           </a:p>
@@ -1255,7 +1246,7 @@
         <p:txBody>
           <a:bodyPr/>
           <a:p>
-            <a:fld id="{681CF22B-C940-4009-BD56-E57DCB2223AB}" type="slidenum">
+            <a:fld id="{DC6B6ECF-7A83-442A-A81A-FC8677827384}" type="slidenum">
               <a:t>&lt;#&gt;</a:t>
             </a:fld>
           </a:p>
@@ -1343,37 +1334,19 @@
               <a:buNone/>
             </a:pPr>
             <a:r>
-              <a:rPr b="0" lang="en-US" sz="4400" spc="-1" strike="noStrike">
-                <a:solidFill>
-                  <a:schemeClr val="dk1"/>
-                </a:solidFill>
-                <a:latin typeface="Calibri"/>
-              </a:rPr>
-              <a:t>Click to edit </a:t>
-            </a:r>
-            <a:r>
-              <a:rPr b="0" lang="en-US" sz="4400" spc="-1" strike="noStrike">
-                <a:solidFill>
-                  <a:schemeClr val="dk1"/>
-                </a:solidFill>
-                <a:latin typeface="Calibri"/>
-              </a:rPr>
-              <a:t>the title text </a:t>
-            </a:r>
-            <a:r>
-              <a:rPr b="0" lang="en-US" sz="4400" spc="-1" strike="noStrike">
-                <a:solidFill>
-                  <a:schemeClr val="dk1"/>
-                </a:solidFill>
-                <a:latin typeface="Calibri"/>
-              </a:rPr>
-              <a:t>format</a:t>
-            </a:r>
-            <a:endParaRPr b="0" lang="en-US" sz="4400" spc="-1" strike="noStrike">
-              <a:solidFill>
-                <a:schemeClr val="dk1"/>
-              </a:solidFill>
-              <a:latin typeface="Calibri"/>
+              <a:rPr b="0" lang="en-US" sz="1800" spc="-1" strike="noStrike">
+                <a:solidFill>
+                  <a:srgbClr val="000000"/>
+                </a:solidFill>
+                <a:latin typeface="Arial"/>
+              </a:rPr>
+              <a:t>Click to edit the title text format</a:t>
+            </a:r>
+            <a:endParaRPr b="0" lang="en-US" sz="1800" spc="-1" strike="noStrike">
+              <a:solidFill>
+                <a:srgbClr val="000000"/>
+              </a:solidFill>
+              <a:latin typeface="Arial"/>
             </a:endParaRPr>
           </a:p>
         </p:txBody>
@@ -1391,7 +1364,7 @@
         <p:spPr>
           <a:xfrm>
             <a:off x="3124080" y="6356520"/>
-            <a:ext cx="2894040" cy="363600"/>
+            <a:ext cx="2893680" cy="363240"/>
           </a:xfrm>
           <a:prstGeom prst="rect">
             <a:avLst/>
@@ -1463,7 +1436,7 @@
         <p:spPr>
           <a:xfrm>
             <a:off x="6553080" y="6356520"/>
-            <a:ext cx="2132280" cy="363600"/>
+            <a:ext cx="2131920" cy="363240"/>
           </a:xfrm>
           <a:prstGeom prst="rect">
             <a:avLst/>
@@ -1506,7 +1479,7 @@
                 <a:tab algn="l" pos="0"/>
               </a:tabLst>
             </a:pPr>
-            <a:fld id="{2542CE35-741E-4A51-A637-F6378AE60892}" type="slidenum">
+            <a:fld id="{6BDC22EF-76C9-4B66-9E81-F834A15288A1}" type="slidenum">
               <a:rPr b="0" lang="en-US" sz="1200" spc="-1" strike="noStrike">
                 <a:solidFill>
                   <a:schemeClr val="dk1">
@@ -1539,7 +1512,7 @@
         <p:spPr>
           <a:xfrm>
             <a:off x="457200" y="6356520"/>
-            <a:ext cx="2132280" cy="363600"/>
+            <a:ext cx="2131920" cy="363240"/>
           </a:xfrm>
           <a:prstGeom prst="rect">
             <a:avLst/>
@@ -1632,7 +1605,7 @@
         <p:spPr>
           <a:xfrm>
             <a:off x="3124080" y="6356520"/>
-            <a:ext cx="2894040" cy="363600"/>
+            <a:ext cx="2893680" cy="363240"/>
           </a:xfrm>
           <a:prstGeom prst="rect">
             <a:avLst/>
@@ -1704,7 +1677,7 @@
         <p:spPr>
           <a:xfrm>
             <a:off x="6553080" y="6356520"/>
-            <a:ext cx="2132280" cy="363600"/>
+            <a:ext cx="2131920" cy="363240"/>
           </a:xfrm>
           <a:prstGeom prst="rect">
             <a:avLst/>
@@ -1747,7 +1720,7 @@
                 <a:tab algn="l" pos="0"/>
               </a:tabLst>
             </a:pPr>
-            <a:fld id="{26808DC4-307D-43B7-B416-3A0704833C9D}" type="slidenum">
+            <a:fld id="{CE81FC3C-0D77-4A19-934D-1653A2CA6D8C}" type="slidenum">
               <a:rPr b="0" lang="en-US" sz="1200" spc="-1" strike="noStrike">
                 <a:solidFill>
                   <a:schemeClr val="dk1">
@@ -1780,7 +1753,7 @@
         <p:spPr>
           <a:xfrm>
             <a:off x="457200" y="6356520"/>
-            <a:ext cx="2132280" cy="363600"/>
+            <a:ext cx="2131920" cy="363240"/>
           </a:xfrm>
           <a:prstGeom prst="rect">
             <a:avLst/>
@@ -1873,7 +1846,7 @@
         <p:spPr>
           <a:xfrm>
             <a:off x="3124080" y="6356520"/>
-            <a:ext cx="2894040" cy="363600"/>
+            <a:ext cx="2893680" cy="363240"/>
           </a:xfrm>
           <a:prstGeom prst="rect">
             <a:avLst/>
@@ -1945,7 +1918,7 @@
         <p:spPr>
           <a:xfrm>
             <a:off x="6553080" y="6356520"/>
-            <a:ext cx="2132280" cy="363600"/>
+            <a:ext cx="2131920" cy="363240"/>
           </a:xfrm>
           <a:prstGeom prst="rect">
             <a:avLst/>
@@ -1988,7 +1961,7 @@
                 <a:tab algn="l" pos="0"/>
               </a:tabLst>
             </a:pPr>
-            <a:fld id="{B6BC15E8-31DA-49F1-9967-25B8C4F2DFB1}" type="slidenum">
+            <a:fld id="{524C68A3-AA9E-4E33-8B8E-02670655E4FA}" type="slidenum">
               <a:rPr b="0" lang="en-US" sz="1200" spc="-1" strike="noStrike">
                 <a:solidFill>
                   <a:schemeClr val="dk1">
@@ -2021,7 +1994,7 @@
         <p:spPr>
           <a:xfrm>
             <a:off x="457200" y="6356520"/>
-            <a:ext cx="2132280" cy="363600"/>
+            <a:ext cx="2131920" cy="363240"/>
           </a:xfrm>
           <a:prstGeom prst="rect">
             <a:avLst/>
@@ -2114,7 +2087,7 @@
         <p:spPr>
           <a:xfrm>
             <a:off x="3124080" y="6356520"/>
-            <a:ext cx="2894040" cy="363600"/>
+            <a:ext cx="2893680" cy="363240"/>
           </a:xfrm>
           <a:prstGeom prst="rect">
             <a:avLst/>
@@ -2186,7 +2159,7 @@
         <p:spPr>
           <a:xfrm>
             <a:off x="6553080" y="6356520"/>
-            <a:ext cx="2132280" cy="363600"/>
+            <a:ext cx="2131920" cy="363240"/>
           </a:xfrm>
           <a:prstGeom prst="rect">
             <a:avLst/>
@@ -2229,7 +2202,7 @@
                 <a:tab algn="l" pos="0"/>
               </a:tabLst>
             </a:pPr>
-            <a:fld id="{0CF1C22C-BD45-4DDE-B2F1-F5246A3CCE67}" type="slidenum">
+            <a:fld id="{004BD7A1-FD6F-440A-8498-88320F656A8D}" type="slidenum">
               <a:rPr b="0" lang="en-US" sz="1200" spc="-1" strike="noStrike">
                 <a:solidFill>
                   <a:schemeClr val="dk1">
@@ -2262,7 +2235,7 @@
         <p:spPr>
           <a:xfrm>
             <a:off x="457200" y="6356520"/>
-            <a:ext cx="2132280" cy="363600"/>
+            <a:ext cx="2131920" cy="363240"/>
           </a:xfrm>
           <a:prstGeom prst="rect">
             <a:avLst/>
@@ -2355,7 +2328,7 @@
         <p:spPr>
           <a:xfrm>
             <a:off x="3124080" y="6356520"/>
-            <a:ext cx="2894040" cy="363600"/>
+            <a:ext cx="2893680" cy="363240"/>
           </a:xfrm>
           <a:prstGeom prst="rect">
             <a:avLst/>
@@ -2427,7 +2400,7 @@
         <p:spPr>
           <a:xfrm>
             <a:off x="6553080" y="6356520"/>
-            <a:ext cx="2132280" cy="363600"/>
+            <a:ext cx="2131920" cy="363240"/>
           </a:xfrm>
           <a:prstGeom prst="rect">
             <a:avLst/>
@@ -2470,7 +2443,7 @@
                 <a:tab algn="l" pos="0"/>
               </a:tabLst>
             </a:pPr>
-            <a:fld id="{8DEC9A46-D252-4376-B749-F4ABB24DBFE9}" type="slidenum">
+            <a:fld id="{BE4CFAF5-3315-4E54-A8D3-ED11B6136839}" type="slidenum">
               <a:rPr b="0" lang="en-US" sz="1200" spc="-1" strike="noStrike">
                 <a:solidFill>
                   <a:schemeClr val="dk1">
@@ -2503,7 +2476,7 @@
         <p:spPr>
           <a:xfrm>
             <a:off x="457200" y="6356520"/>
-            <a:ext cx="2132280" cy="363600"/>
+            <a:ext cx="2131920" cy="363240"/>
           </a:xfrm>
           <a:prstGeom prst="rect">
             <a:avLst/>
@@ -2615,19 +2588,19 @@
               <a:buNone/>
             </a:pPr>
             <a:r>
-              <a:rPr b="0" lang="en-US" sz="4400" spc="-1" strike="noStrike">
-                <a:solidFill>
-                  <a:schemeClr val="dk1"/>
-                </a:solidFill>
-                <a:latin typeface="Calibri"/>
+              <a:rPr b="0" lang="en-US" sz="1800" spc="-1" strike="noStrike">
+                <a:solidFill>
+                  <a:srgbClr val="000000"/>
+                </a:solidFill>
+                <a:latin typeface="Arial"/>
               </a:rPr>
               <a:t>Click to edit the title text format</a:t>
             </a:r>
-            <a:endParaRPr b="0" lang="en-US" sz="4400" spc="-1" strike="noStrike">
-              <a:solidFill>
-                <a:schemeClr val="dk1"/>
-              </a:solidFill>
-              <a:latin typeface="Calibri"/>
+            <a:endParaRPr b="0" lang="en-US" sz="1800" spc="-1" strike="noStrike">
+              <a:solidFill>
+                <a:srgbClr val="000000"/>
+              </a:solidFill>
+              <a:latin typeface="Arial"/>
             </a:endParaRPr>
           </a:p>
         </p:txBody>
@@ -2661,9 +2634,6 @@
           </a:bodyPr>
           <a:p>
             <a:pPr marL="432000" indent="-324000">
-              <a:lnSpc>
-                <a:spcPct val="90000"/>
-              </a:lnSpc>
               <a:spcBef>
                 <a:spcPts val="1417"/>
               </a:spcBef>
@@ -2677,24 +2647,21 @@
             <a:r>
               <a:rPr b="0" lang="en-US" sz="1800" spc="-1" strike="noStrike">
                 <a:solidFill>
-                  <a:schemeClr val="dk1"/>
-                </a:solidFill>
-                <a:latin typeface="Calibri"/>
+                  <a:srgbClr val="000000"/>
+                </a:solidFill>
+                <a:latin typeface="Arial"/>
               </a:rPr>
               <a:t>Click to edit the outline text format</a:t>
             </a:r>
             <a:endParaRPr b="0" lang="en-US" sz="1800" spc="-1" strike="noStrike">
               <a:solidFill>
-                <a:schemeClr val="dk1"/>
-              </a:solidFill>
-              <a:latin typeface="Calibri"/>
+                <a:srgbClr val="000000"/>
+              </a:solidFill>
+              <a:latin typeface="Arial"/>
             </a:endParaRPr>
           </a:p>
           <a:p>
             <a:pPr lvl="1" marL="864000" indent="-324000">
-              <a:lnSpc>
-                <a:spcPct val="90000"/>
-              </a:lnSpc>
               <a:spcBef>
                 <a:spcPts val="1134"/>
               </a:spcBef>
@@ -2708,24 +2675,21 @@
             <a:r>
               <a:rPr b="0" lang="en-US" sz="1800" spc="-1" strike="noStrike">
                 <a:solidFill>
-                  <a:schemeClr val="dk1"/>
-                </a:solidFill>
-                <a:latin typeface="Calibri"/>
+                  <a:srgbClr val="000000"/>
+                </a:solidFill>
+                <a:latin typeface="Arial"/>
               </a:rPr>
               <a:t>Second Outline Level</a:t>
             </a:r>
             <a:endParaRPr b="0" lang="en-US" sz="1800" spc="-1" strike="noStrike">
               <a:solidFill>
-                <a:schemeClr val="dk1"/>
-              </a:solidFill>
-              <a:latin typeface="Calibri"/>
+                <a:srgbClr val="000000"/>
+              </a:solidFill>
+              <a:latin typeface="Arial"/>
             </a:endParaRPr>
           </a:p>
           <a:p>
             <a:pPr lvl="2" marL="1296000" indent="-288000">
-              <a:lnSpc>
-                <a:spcPct val="90000"/>
-              </a:lnSpc>
               <a:spcBef>
                 <a:spcPts val="850"/>
               </a:spcBef>
@@ -2739,24 +2703,21 @@
             <a:r>
               <a:rPr b="0" lang="en-US" sz="1800" spc="-1" strike="noStrike">
                 <a:solidFill>
-                  <a:schemeClr val="dk1"/>
-                </a:solidFill>
-                <a:latin typeface="Calibri"/>
+                  <a:srgbClr val="000000"/>
+                </a:solidFill>
+                <a:latin typeface="Arial"/>
               </a:rPr>
               <a:t>Third Outline Level</a:t>
             </a:r>
             <a:endParaRPr b="0" lang="en-US" sz="1800" spc="-1" strike="noStrike">
               <a:solidFill>
-                <a:schemeClr val="dk1"/>
-              </a:solidFill>
-              <a:latin typeface="Calibri"/>
+                <a:srgbClr val="000000"/>
+              </a:solidFill>
+              <a:latin typeface="Arial"/>
             </a:endParaRPr>
           </a:p>
           <a:p>
             <a:pPr lvl="3" marL="1728000" indent="-216000">
-              <a:lnSpc>
-                <a:spcPct val="90000"/>
-              </a:lnSpc>
               <a:spcBef>
                 <a:spcPts val="567"/>
               </a:spcBef>
@@ -2770,24 +2731,21 @@
             <a:r>
               <a:rPr b="0" lang="en-US" sz="1800" spc="-1" strike="noStrike">
                 <a:solidFill>
-                  <a:schemeClr val="dk1"/>
-                </a:solidFill>
-                <a:latin typeface="Calibri"/>
+                  <a:srgbClr val="000000"/>
+                </a:solidFill>
+                <a:latin typeface="Arial"/>
               </a:rPr>
               <a:t>Fourth Outline Level</a:t>
             </a:r>
             <a:endParaRPr b="0" lang="en-US" sz="1800" spc="-1" strike="noStrike">
               <a:solidFill>
-                <a:schemeClr val="dk1"/>
-              </a:solidFill>
-              <a:latin typeface="Calibri"/>
+                <a:srgbClr val="000000"/>
+              </a:solidFill>
+              <a:latin typeface="Arial"/>
             </a:endParaRPr>
           </a:p>
           <a:p>
             <a:pPr lvl="4" marL="2160000" indent="-216000">
-              <a:lnSpc>
-                <a:spcPct val="90000"/>
-              </a:lnSpc>
               <a:spcBef>
                 <a:spcPts val="283"/>
               </a:spcBef>
@@ -2801,24 +2759,21 @@
             <a:r>
               <a:rPr b="0" lang="en-US" sz="1800" spc="-1" strike="noStrike">
                 <a:solidFill>
-                  <a:schemeClr val="dk1"/>
-                </a:solidFill>
-                <a:latin typeface="Calibri"/>
+                  <a:srgbClr val="000000"/>
+                </a:solidFill>
+                <a:latin typeface="Arial"/>
               </a:rPr>
               <a:t>Fifth Outline Level</a:t>
             </a:r>
             <a:endParaRPr b="0" lang="en-US" sz="1800" spc="-1" strike="noStrike">
               <a:solidFill>
-                <a:schemeClr val="dk1"/>
-              </a:solidFill>
-              <a:latin typeface="Calibri"/>
+                <a:srgbClr val="000000"/>
+              </a:solidFill>
+              <a:latin typeface="Arial"/>
             </a:endParaRPr>
           </a:p>
           <a:p>
             <a:pPr lvl="5" marL="2592000" indent="-216000">
-              <a:lnSpc>
-                <a:spcPct val="90000"/>
-              </a:lnSpc>
               <a:spcBef>
                 <a:spcPts val="283"/>
               </a:spcBef>
@@ -2832,24 +2787,21 @@
             <a:r>
               <a:rPr b="0" lang="en-US" sz="1800" spc="-1" strike="noStrike">
                 <a:solidFill>
-                  <a:schemeClr val="dk1"/>
-                </a:solidFill>
-                <a:latin typeface="Calibri"/>
+                  <a:srgbClr val="000000"/>
+                </a:solidFill>
+                <a:latin typeface="Arial"/>
               </a:rPr>
               <a:t>Sixth Outline Level</a:t>
             </a:r>
             <a:endParaRPr b="0" lang="en-US" sz="1800" spc="-1" strike="noStrike">
               <a:solidFill>
-                <a:schemeClr val="dk1"/>
-              </a:solidFill>
-              <a:latin typeface="Calibri"/>
+                <a:srgbClr val="000000"/>
+              </a:solidFill>
+              <a:latin typeface="Arial"/>
             </a:endParaRPr>
           </a:p>
           <a:p>
             <a:pPr lvl="6" marL="3024000" indent="-216000">
-              <a:lnSpc>
-                <a:spcPct val="90000"/>
-              </a:lnSpc>
               <a:spcBef>
                 <a:spcPts val="283"/>
               </a:spcBef>
@@ -2863,17 +2815,17 @@
             <a:r>
               <a:rPr b="0" lang="en-US" sz="1800" spc="-1" strike="noStrike">
                 <a:solidFill>
-                  <a:schemeClr val="dk1"/>
-                </a:solidFill>
-                <a:latin typeface="Calibri"/>
+                  <a:srgbClr val="000000"/>
+                </a:solidFill>
+                <a:latin typeface="Arial"/>
               </a:rPr>
               <a:t>Seventh Outline Level</a:t>
             </a:r>
             <a:endParaRPr b="0" lang="en-US" sz="1800" spc="-1" strike="noStrike">
               <a:solidFill>
-                <a:schemeClr val="dk1"/>
-              </a:solidFill>
-              <a:latin typeface="Calibri"/>
+                <a:srgbClr val="000000"/>
+              </a:solidFill>
+              <a:latin typeface="Arial"/>
             </a:endParaRPr>
           </a:p>
         </p:txBody>
@@ -2891,7 +2843,7 @@
         <p:spPr>
           <a:xfrm>
             <a:off x="3124080" y="6356520"/>
-            <a:ext cx="2894040" cy="363600"/>
+            <a:ext cx="2893680" cy="363240"/>
           </a:xfrm>
           <a:prstGeom prst="rect">
             <a:avLst/>
@@ -2963,7 +2915,7 @@
         <p:spPr>
           <a:xfrm>
             <a:off x="6553080" y="6356520"/>
-            <a:ext cx="2132280" cy="363600"/>
+            <a:ext cx="2131920" cy="363240"/>
           </a:xfrm>
           <a:prstGeom prst="rect">
             <a:avLst/>
@@ -3006,7 +2958,7 @@
                 <a:tab algn="l" pos="0"/>
               </a:tabLst>
             </a:pPr>
-            <a:fld id="{C65DCC89-FE73-42B9-B841-CE08330AE360}" type="slidenum">
+            <a:fld id="{A594DDDC-1009-4EF4-BA4A-499AC5CD4F05}" type="slidenum">
               <a:rPr b="0" lang="en-US" sz="1200" spc="-1" strike="noStrike">
                 <a:solidFill>
                   <a:schemeClr val="dk1">
@@ -3039,7 +2991,7 @@
         <p:spPr>
           <a:xfrm>
             <a:off x="457200" y="6356520"/>
-            <a:ext cx="2132280" cy="363600"/>
+            <a:ext cx="2131920" cy="363240"/>
           </a:xfrm>
           <a:prstGeom prst="rect">
             <a:avLst/>
@@ -3132,7 +3084,7 @@
         <p:spPr>
           <a:xfrm>
             <a:off x="3124080" y="6356520"/>
-            <a:ext cx="2894040" cy="363600"/>
+            <a:ext cx="2893680" cy="363240"/>
           </a:xfrm>
           <a:prstGeom prst="rect">
             <a:avLst/>
@@ -3204,7 +3156,7 @@
         <p:spPr>
           <a:xfrm>
             <a:off x="6553080" y="6356520"/>
-            <a:ext cx="2132280" cy="363600"/>
+            <a:ext cx="2131920" cy="363240"/>
           </a:xfrm>
           <a:prstGeom prst="rect">
             <a:avLst/>
@@ -3247,7 +3199,7 @@
                 <a:tab algn="l" pos="0"/>
               </a:tabLst>
             </a:pPr>
-            <a:fld id="{E73B288B-ACDC-4385-8569-F57BF2E67FFB}" type="slidenum">
+            <a:fld id="{BBC10478-B92B-44C9-BFFA-4B43819B0A74}" type="slidenum">
               <a:rPr b="0" lang="en-US" sz="1200" spc="-1" strike="noStrike">
                 <a:solidFill>
                   <a:schemeClr val="dk1">
@@ -3280,7 +3232,7 @@
         <p:spPr>
           <a:xfrm>
             <a:off x="457200" y="6356520"/>
-            <a:ext cx="2132280" cy="363600"/>
+            <a:ext cx="2131920" cy="363240"/>
           </a:xfrm>
           <a:prstGeom prst="rect">
             <a:avLst/>
@@ -3392,19 +3344,19 @@
               <a:buNone/>
             </a:pPr>
             <a:r>
-              <a:rPr b="0" lang="en-US" sz="4400" spc="-1" strike="noStrike">
-                <a:solidFill>
-                  <a:schemeClr val="dk1"/>
-                </a:solidFill>
-                <a:latin typeface="Calibri"/>
+              <a:rPr b="0" lang="en-US" sz="1800" spc="-1" strike="noStrike">
+                <a:solidFill>
+                  <a:srgbClr val="000000"/>
+                </a:solidFill>
+                <a:latin typeface="Arial"/>
               </a:rPr>
               <a:t>Click to edit the title text format</a:t>
             </a:r>
-            <a:endParaRPr b="0" lang="en-US" sz="4400" spc="-1" strike="noStrike">
-              <a:solidFill>
-                <a:schemeClr val="dk1"/>
-              </a:solidFill>
-              <a:latin typeface="Calibri"/>
+            <a:endParaRPr b="0" lang="en-US" sz="1800" spc="-1" strike="noStrike">
+              <a:solidFill>
+                <a:srgbClr val="000000"/>
+              </a:solidFill>
+              <a:latin typeface="Arial"/>
             </a:endParaRPr>
           </a:p>
         </p:txBody>
@@ -3438,9 +3390,6 @@
           </a:bodyPr>
           <a:p>
             <a:pPr marL="432000" indent="-324000">
-              <a:lnSpc>
-                <a:spcPct val="90000"/>
-              </a:lnSpc>
               <a:spcBef>
                 <a:spcPts val="1417"/>
               </a:spcBef>
@@ -3454,24 +3403,21 @@
             <a:r>
               <a:rPr b="0" lang="en-US" sz="1800" spc="-1" strike="noStrike">
                 <a:solidFill>
-                  <a:schemeClr val="dk1"/>
-                </a:solidFill>
-                <a:latin typeface="Calibri"/>
+                  <a:srgbClr val="000000"/>
+                </a:solidFill>
+                <a:latin typeface="Arial"/>
               </a:rPr>
               <a:t>Click to edit the outline text format</a:t>
             </a:r>
             <a:endParaRPr b="0" lang="en-US" sz="1800" spc="-1" strike="noStrike">
               <a:solidFill>
-                <a:schemeClr val="dk1"/>
-              </a:solidFill>
-              <a:latin typeface="Calibri"/>
+                <a:srgbClr val="000000"/>
+              </a:solidFill>
+              <a:latin typeface="Arial"/>
             </a:endParaRPr>
           </a:p>
           <a:p>
             <a:pPr lvl="1" marL="864000" indent="-324000">
-              <a:lnSpc>
-                <a:spcPct val="90000"/>
-              </a:lnSpc>
               <a:spcBef>
                 <a:spcPts val="1134"/>
               </a:spcBef>
@@ -3485,24 +3431,21 @@
             <a:r>
               <a:rPr b="0" lang="en-US" sz="1800" spc="-1" strike="noStrike">
                 <a:solidFill>
-                  <a:schemeClr val="dk1"/>
-                </a:solidFill>
-                <a:latin typeface="Calibri"/>
+                  <a:srgbClr val="000000"/>
+                </a:solidFill>
+                <a:latin typeface="Arial"/>
               </a:rPr>
               <a:t>Second Outline Level</a:t>
             </a:r>
             <a:endParaRPr b="0" lang="en-US" sz="1800" spc="-1" strike="noStrike">
               <a:solidFill>
-                <a:schemeClr val="dk1"/>
-              </a:solidFill>
-              <a:latin typeface="Calibri"/>
+                <a:srgbClr val="000000"/>
+              </a:solidFill>
+              <a:latin typeface="Arial"/>
             </a:endParaRPr>
           </a:p>
           <a:p>
             <a:pPr lvl="2" marL="1296000" indent="-288000">
-              <a:lnSpc>
-                <a:spcPct val="90000"/>
-              </a:lnSpc>
               <a:spcBef>
                 <a:spcPts val="850"/>
               </a:spcBef>
@@ -3516,24 +3459,21 @@
             <a:r>
               <a:rPr b="0" lang="en-US" sz="1800" spc="-1" strike="noStrike">
                 <a:solidFill>
-                  <a:schemeClr val="dk1"/>
-                </a:solidFill>
-                <a:latin typeface="Calibri"/>
+                  <a:srgbClr val="000000"/>
+                </a:solidFill>
+                <a:latin typeface="Arial"/>
               </a:rPr>
               <a:t>Third Outline Level</a:t>
             </a:r>
             <a:endParaRPr b="0" lang="en-US" sz="1800" spc="-1" strike="noStrike">
               <a:solidFill>
-                <a:schemeClr val="dk1"/>
-              </a:solidFill>
-              <a:latin typeface="Calibri"/>
+                <a:srgbClr val="000000"/>
+              </a:solidFill>
+              <a:latin typeface="Arial"/>
             </a:endParaRPr>
           </a:p>
           <a:p>
             <a:pPr lvl="3" marL="1728000" indent="-216000">
-              <a:lnSpc>
-                <a:spcPct val="90000"/>
-              </a:lnSpc>
               <a:spcBef>
                 <a:spcPts val="567"/>
               </a:spcBef>
@@ -3547,24 +3487,21 @@
             <a:r>
               <a:rPr b="0" lang="en-US" sz="1800" spc="-1" strike="noStrike">
                 <a:solidFill>
-                  <a:schemeClr val="dk1"/>
-                </a:solidFill>
-                <a:latin typeface="Calibri"/>
+                  <a:srgbClr val="000000"/>
+                </a:solidFill>
+                <a:latin typeface="Arial"/>
               </a:rPr>
               <a:t>Fourth Outline Level</a:t>
             </a:r>
             <a:endParaRPr b="0" lang="en-US" sz="1800" spc="-1" strike="noStrike">
               <a:solidFill>
-                <a:schemeClr val="dk1"/>
-              </a:solidFill>
-              <a:latin typeface="Calibri"/>
+                <a:srgbClr val="000000"/>
+              </a:solidFill>
+              <a:latin typeface="Arial"/>
             </a:endParaRPr>
           </a:p>
           <a:p>
             <a:pPr lvl="4" marL="2160000" indent="-216000">
-              <a:lnSpc>
-                <a:spcPct val="90000"/>
-              </a:lnSpc>
               <a:spcBef>
                 <a:spcPts val="283"/>
               </a:spcBef>
@@ -3578,24 +3515,21 @@
             <a:r>
               <a:rPr b="0" lang="en-US" sz="1800" spc="-1" strike="noStrike">
                 <a:solidFill>
-                  <a:schemeClr val="dk1"/>
-                </a:solidFill>
-                <a:latin typeface="Calibri"/>
+                  <a:srgbClr val="000000"/>
+                </a:solidFill>
+                <a:latin typeface="Arial"/>
               </a:rPr>
               <a:t>Fifth Outline Level</a:t>
             </a:r>
             <a:endParaRPr b="0" lang="en-US" sz="1800" spc="-1" strike="noStrike">
               <a:solidFill>
-                <a:schemeClr val="dk1"/>
-              </a:solidFill>
-              <a:latin typeface="Calibri"/>
+                <a:srgbClr val="000000"/>
+              </a:solidFill>
+              <a:latin typeface="Arial"/>
             </a:endParaRPr>
           </a:p>
           <a:p>
             <a:pPr lvl="5" marL="2592000" indent="-216000">
-              <a:lnSpc>
-                <a:spcPct val="90000"/>
-              </a:lnSpc>
               <a:spcBef>
                 <a:spcPts val="283"/>
               </a:spcBef>
@@ -3609,24 +3543,21 @@
             <a:r>
               <a:rPr b="0" lang="en-US" sz="1800" spc="-1" strike="noStrike">
                 <a:solidFill>
-                  <a:schemeClr val="dk1"/>
-                </a:solidFill>
-                <a:latin typeface="Calibri"/>
+                  <a:srgbClr val="000000"/>
+                </a:solidFill>
+                <a:latin typeface="Arial"/>
               </a:rPr>
               <a:t>Sixth Outline Level</a:t>
             </a:r>
             <a:endParaRPr b="0" lang="en-US" sz="1800" spc="-1" strike="noStrike">
               <a:solidFill>
-                <a:schemeClr val="dk1"/>
-              </a:solidFill>
-              <a:latin typeface="Calibri"/>
+                <a:srgbClr val="000000"/>
+              </a:solidFill>
+              <a:latin typeface="Arial"/>
             </a:endParaRPr>
           </a:p>
           <a:p>
             <a:pPr lvl="6" marL="3024000" indent="-216000">
-              <a:lnSpc>
-                <a:spcPct val="90000"/>
-              </a:lnSpc>
               <a:spcBef>
                 <a:spcPts val="283"/>
               </a:spcBef>
@@ -3640,17 +3571,17 @@
             <a:r>
               <a:rPr b="0" lang="en-US" sz="1800" spc="-1" strike="noStrike">
                 <a:solidFill>
-                  <a:schemeClr val="dk1"/>
-                </a:solidFill>
-                <a:latin typeface="Calibri"/>
+                  <a:srgbClr val="000000"/>
+                </a:solidFill>
+                <a:latin typeface="Arial"/>
               </a:rPr>
               <a:t>Seventh Outline Level</a:t>
             </a:r>
             <a:endParaRPr b="0" lang="en-US" sz="1800" spc="-1" strike="noStrike">
               <a:solidFill>
-                <a:schemeClr val="dk1"/>
-              </a:solidFill>
-              <a:latin typeface="Calibri"/>
+                <a:srgbClr val="000000"/>
+              </a:solidFill>
+              <a:latin typeface="Arial"/>
             </a:endParaRPr>
           </a:p>
         </p:txBody>
@@ -3684,9 +3615,6 @@
           </a:bodyPr>
           <a:p>
             <a:pPr marL="432000" indent="-324000">
-              <a:lnSpc>
-                <a:spcPct val="90000"/>
-              </a:lnSpc>
               <a:spcBef>
                 <a:spcPts val="1417"/>
               </a:spcBef>
@@ -3700,24 +3628,21 @@
             <a:r>
               <a:rPr b="0" lang="en-US" sz="1800" spc="-1" strike="noStrike">
                 <a:solidFill>
-                  <a:schemeClr val="dk1"/>
-                </a:solidFill>
-                <a:latin typeface="Calibri"/>
+                  <a:srgbClr val="000000"/>
+                </a:solidFill>
+                <a:latin typeface="Arial"/>
               </a:rPr>
               <a:t>Click to edit the outline text format</a:t>
             </a:r>
             <a:endParaRPr b="0" lang="en-US" sz="1800" spc="-1" strike="noStrike">
               <a:solidFill>
-                <a:schemeClr val="dk1"/>
-              </a:solidFill>
-              <a:latin typeface="Calibri"/>
+                <a:srgbClr val="000000"/>
+              </a:solidFill>
+              <a:latin typeface="Arial"/>
             </a:endParaRPr>
           </a:p>
           <a:p>
             <a:pPr lvl="1" marL="864000" indent="-324000">
-              <a:lnSpc>
-                <a:spcPct val="90000"/>
-              </a:lnSpc>
               <a:spcBef>
                 <a:spcPts val="1134"/>
               </a:spcBef>
@@ -3731,24 +3656,21 @@
             <a:r>
               <a:rPr b="0" lang="en-US" sz="1800" spc="-1" strike="noStrike">
                 <a:solidFill>
-                  <a:schemeClr val="dk1"/>
-                </a:solidFill>
-                <a:latin typeface="Calibri"/>
+                  <a:srgbClr val="000000"/>
+                </a:solidFill>
+                <a:latin typeface="Arial"/>
               </a:rPr>
               <a:t>Second Outline Level</a:t>
             </a:r>
             <a:endParaRPr b="0" lang="en-US" sz="1800" spc="-1" strike="noStrike">
               <a:solidFill>
-                <a:schemeClr val="dk1"/>
-              </a:solidFill>
-              <a:latin typeface="Calibri"/>
+                <a:srgbClr val="000000"/>
+              </a:solidFill>
+              <a:latin typeface="Arial"/>
             </a:endParaRPr>
           </a:p>
           <a:p>
             <a:pPr lvl="2" marL="1296000" indent="-288000">
-              <a:lnSpc>
-                <a:spcPct val="90000"/>
-              </a:lnSpc>
               <a:spcBef>
                 <a:spcPts val="850"/>
               </a:spcBef>
@@ -3762,24 +3684,21 @@
             <a:r>
               <a:rPr b="0" lang="en-US" sz="1800" spc="-1" strike="noStrike">
                 <a:solidFill>
-                  <a:schemeClr val="dk1"/>
-                </a:solidFill>
-                <a:latin typeface="Calibri"/>
+                  <a:srgbClr val="000000"/>
+                </a:solidFill>
+                <a:latin typeface="Arial"/>
               </a:rPr>
               <a:t>Third Outline Level</a:t>
             </a:r>
             <a:endParaRPr b="0" lang="en-US" sz="1800" spc="-1" strike="noStrike">
               <a:solidFill>
-                <a:schemeClr val="dk1"/>
-              </a:solidFill>
-              <a:latin typeface="Calibri"/>
+                <a:srgbClr val="000000"/>
+              </a:solidFill>
+              <a:latin typeface="Arial"/>
             </a:endParaRPr>
           </a:p>
           <a:p>
             <a:pPr lvl="3" marL="1728000" indent="-216000">
-              <a:lnSpc>
-                <a:spcPct val="90000"/>
-              </a:lnSpc>
               <a:spcBef>
                 <a:spcPts val="567"/>
               </a:spcBef>
@@ -3793,24 +3712,21 @@
             <a:r>
               <a:rPr b="0" lang="en-US" sz="1800" spc="-1" strike="noStrike">
                 <a:solidFill>
-                  <a:schemeClr val="dk1"/>
-                </a:solidFill>
-                <a:latin typeface="Calibri"/>
+                  <a:srgbClr val="000000"/>
+                </a:solidFill>
+                <a:latin typeface="Arial"/>
               </a:rPr>
               <a:t>Fourth Outline Level</a:t>
             </a:r>
             <a:endParaRPr b="0" lang="en-US" sz="1800" spc="-1" strike="noStrike">
               <a:solidFill>
-                <a:schemeClr val="dk1"/>
-              </a:solidFill>
-              <a:latin typeface="Calibri"/>
+                <a:srgbClr val="000000"/>
+              </a:solidFill>
+              <a:latin typeface="Arial"/>
             </a:endParaRPr>
           </a:p>
           <a:p>
             <a:pPr lvl="4" marL="2160000" indent="-216000">
-              <a:lnSpc>
-                <a:spcPct val="90000"/>
-              </a:lnSpc>
               <a:spcBef>
                 <a:spcPts val="283"/>
               </a:spcBef>
@@ -3824,24 +3740,21 @@
             <a:r>
               <a:rPr b="0" lang="en-US" sz="1800" spc="-1" strike="noStrike">
                 <a:solidFill>
-                  <a:schemeClr val="dk1"/>
-                </a:solidFill>
-                <a:latin typeface="Calibri"/>
+                  <a:srgbClr val="000000"/>
+                </a:solidFill>
+                <a:latin typeface="Arial"/>
               </a:rPr>
               <a:t>Fifth Outline Level</a:t>
             </a:r>
             <a:endParaRPr b="0" lang="en-US" sz="1800" spc="-1" strike="noStrike">
               <a:solidFill>
-                <a:schemeClr val="dk1"/>
-              </a:solidFill>
-              <a:latin typeface="Calibri"/>
+                <a:srgbClr val="000000"/>
+              </a:solidFill>
+              <a:latin typeface="Arial"/>
             </a:endParaRPr>
           </a:p>
           <a:p>
             <a:pPr lvl="5" marL="2592000" indent="-216000">
-              <a:lnSpc>
-                <a:spcPct val="90000"/>
-              </a:lnSpc>
               <a:spcBef>
                 <a:spcPts val="283"/>
               </a:spcBef>
@@ -3855,24 +3768,21 @@
             <a:r>
               <a:rPr b="0" lang="en-US" sz="1800" spc="-1" strike="noStrike">
                 <a:solidFill>
-                  <a:schemeClr val="dk1"/>
-                </a:solidFill>
-                <a:latin typeface="Calibri"/>
+                  <a:srgbClr val="000000"/>
+                </a:solidFill>
+                <a:latin typeface="Arial"/>
               </a:rPr>
               <a:t>Sixth Outline Level</a:t>
             </a:r>
             <a:endParaRPr b="0" lang="en-US" sz="1800" spc="-1" strike="noStrike">
               <a:solidFill>
-                <a:schemeClr val="dk1"/>
-              </a:solidFill>
-              <a:latin typeface="Calibri"/>
+                <a:srgbClr val="000000"/>
+              </a:solidFill>
+              <a:latin typeface="Arial"/>
             </a:endParaRPr>
           </a:p>
           <a:p>
             <a:pPr lvl="6" marL="3024000" indent="-216000">
-              <a:lnSpc>
-                <a:spcPct val="90000"/>
-              </a:lnSpc>
               <a:spcBef>
                 <a:spcPts val="283"/>
               </a:spcBef>
@@ -3886,17 +3796,17 @@
             <a:r>
               <a:rPr b="0" lang="en-US" sz="1800" spc="-1" strike="noStrike">
                 <a:solidFill>
-                  <a:schemeClr val="dk1"/>
-                </a:solidFill>
-                <a:latin typeface="Calibri"/>
+                  <a:srgbClr val="000000"/>
+                </a:solidFill>
+                <a:latin typeface="Arial"/>
               </a:rPr>
               <a:t>Seventh Outline Level</a:t>
             </a:r>
             <a:endParaRPr b="0" lang="en-US" sz="1800" spc="-1" strike="noStrike">
               <a:solidFill>
-                <a:schemeClr val="dk1"/>
-              </a:solidFill>
-              <a:latin typeface="Calibri"/>
+                <a:srgbClr val="000000"/>
+              </a:solidFill>
+              <a:latin typeface="Arial"/>
             </a:endParaRPr>
           </a:p>
         </p:txBody>
@@ -3914,7 +3824,7 @@
         <p:spPr>
           <a:xfrm>
             <a:off x="3124080" y="6356520"/>
-            <a:ext cx="2894040" cy="363600"/>
+            <a:ext cx="2893680" cy="363240"/>
           </a:xfrm>
           <a:prstGeom prst="rect">
             <a:avLst/>
@@ -3986,7 +3896,7 @@
         <p:spPr>
           <a:xfrm>
             <a:off x="6553080" y="6356520"/>
-            <a:ext cx="2132280" cy="363600"/>
+            <a:ext cx="2131920" cy="363240"/>
           </a:xfrm>
           <a:prstGeom prst="rect">
             <a:avLst/>
@@ -4029,7 +3939,7 @@
                 <a:tab algn="l" pos="0"/>
               </a:tabLst>
             </a:pPr>
-            <a:fld id="{B252F41F-3DE5-4394-BE3F-3DFF93B7503B}" type="slidenum">
+            <a:fld id="{99B49829-0F8F-4C27-B599-5C9565197D9B}" type="slidenum">
               <a:rPr b="0" lang="en-US" sz="1200" spc="-1" strike="noStrike">
                 <a:solidFill>
                   <a:schemeClr val="dk1">
@@ -4062,7 +3972,7 @@
         <p:spPr>
           <a:xfrm>
             <a:off x="457200" y="6356520"/>
-            <a:ext cx="2132280" cy="363600"/>
+            <a:ext cx="2131920" cy="363240"/>
           </a:xfrm>
           <a:prstGeom prst="rect">
             <a:avLst/>
@@ -4155,7 +4065,7 @@
         <p:spPr>
           <a:xfrm>
             <a:off x="3124080" y="6356520"/>
-            <a:ext cx="2894040" cy="363600"/>
+            <a:ext cx="2893680" cy="363240"/>
           </a:xfrm>
           <a:prstGeom prst="rect">
             <a:avLst/>
@@ -4227,7 +4137,7 @@
         <p:spPr>
           <a:xfrm>
             <a:off x="6553080" y="6356520"/>
-            <a:ext cx="2132280" cy="363600"/>
+            <a:ext cx="2131920" cy="363240"/>
           </a:xfrm>
           <a:prstGeom prst="rect">
             <a:avLst/>
@@ -4270,7 +4180,7 @@
                 <a:tab algn="l" pos="0"/>
               </a:tabLst>
             </a:pPr>
-            <a:fld id="{826A3994-DF09-44DB-B203-9D287CB1F65D}" type="slidenum">
+            <a:fld id="{6DCE5F5C-37DD-4C67-B20A-8627B65AEF1D}" type="slidenum">
               <a:rPr b="0" lang="en-US" sz="1200" spc="-1" strike="noStrike">
                 <a:solidFill>
                   <a:schemeClr val="dk1">
@@ -4303,7 +4213,7 @@
         <p:spPr>
           <a:xfrm>
             <a:off x="457200" y="6356520"/>
-            <a:ext cx="2132280" cy="363600"/>
+            <a:ext cx="2131920" cy="363240"/>
           </a:xfrm>
           <a:prstGeom prst="rect">
             <a:avLst/>
@@ -4415,19 +4325,19 @@
               <a:buNone/>
             </a:pPr>
             <a:r>
-              <a:rPr b="0" lang="en-US" sz="4400" spc="-1" strike="noStrike">
-                <a:solidFill>
-                  <a:schemeClr val="dk1"/>
-                </a:solidFill>
-                <a:latin typeface="Calibri"/>
+              <a:rPr b="0" lang="en-US" sz="1800" spc="-1" strike="noStrike">
+                <a:solidFill>
+                  <a:srgbClr val="000000"/>
+                </a:solidFill>
+                <a:latin typeface="Arial"/>
               </a:rPr>
               <a:t>Click to edit the title text format</a:t>
             </a:r>
-            <a:endParaRPr b="0" lang="en-US" sz="4400" spc="-1" strike="noStrike">
-              <a:solidFill>
-                <a:schemeClr val="dk1"/>
-              </a:solidFill>
-              <a:latin typeface="Calibri"/>
+            <a:endParaRPr b="0" lang="en-US" sz="1800" spc="-1" strike="noStrike">
+              <a:solidFill>
+                <a:srgbClr val="000000"/>
+              </a:solidFill>
+              <a:latin typeface="Arial"/>
             </a:endParaRPr>
           </a:p>
         </p:txBody>
@@ -4445,7 +4355,7 @@
         <p:spPr>
           <a:xfrm>
             <a:off x="3124080" y="6356520"/>
-            <a:ext cx="2894040" cy="363600"/>
+            <a:ext cx="2893680" cy="363240"/>
           </a:xfrm>
           <a:prstGeom prst="rect">
             <a:avLst/>
@@ -4517,7 +4427,7 @@
         <p:spPr>
           <a:xfrm>
             <a:off x="6553080" y="6356520"/>
-            <a:ext cx="2132280" cy="363600"/>
+            <a:ext cx="2131920" cy="363240"/>
           </a:xfrm>
           <a:prstGeom prst="rect">
             <a:avLst/>
@@ -4560,7 +4470,7 @@
                 <a:tab algn="l" pos="0"/>
               </a:tabLst>
             </a:pPr>
-            <a:fld id="{FDDFB825-8287-4906-9A72-AD2B70E81C30}" type="slidenum">
+            <a:fld id="{A2E73DD1-A5E7-4787-98FB-C5AE314B9A75}" type="slidenum">
               <a:rPr b="0" lang="en-US" sz="1200" spc="-1" strike="noStrike">
                 <a:solidFill>
                   <a:schemeClr val="dk1">
@@ -4593,7 +4503,7 @@
         <p:spPr>
           <a:xfrm>
             <a:off x="457200" y="6356520"/>
-            <a:ext cx="2132280" cy="363600"/>
+            <a:ext cx="2131920" cy="363240"/>
           </a:xfrm>
           <a:prstGeom prst="rect">
             <a:avLst/>
@@ -4686,7 +4596,7 @@
         <p:spPr>
           <a:xfrm>
             <a:off x="3124080" y="6356520"/>
-            <a:ext cx="2894040" cy="363600"/>
+            <a:ext cx="2893680" cy="363240"/>
           </a:xfrm>
           <a:prstGeom prst="rect">
             <a:avLst/>
@@ -4758,7 +4668,7 @@
         <p:spPr>
           <a:xfrm>
             <a:off x="6553080" y="6356520"/>
-            <a:ext cx="2132280" cy="363600"/>
+            <a:ext cx="2131920" cy="363240"/>
           </a:xfrm>
           <a:prstGeom prst="rect">
             <a:avLst/>
@@ -4801,7 +4711,7 @@
                 <a:tab algn="l" pos="0"/>
               </a:tabLst>
             </a:pPr>
-            <a:fld id="{293B7ECA-E497-4863-AC61-9888C6AE99CD}" type="slidenum">
+            <a:fld id="{B6B54B92-C26B-4B1D-BBC7-726E7263B430}" type="slidenum">
               <a:rPr b="0" lang="en-US" sz="1200" spc="-1" strike="noStrike">
                 <a:solidFill>
                   <a:schemeClr val="dk1">
@@ -4834,7 +4744,7 @@
         <p:spPr>
           <a:xfrm>
             <a:off x="457200" y="6356520"/>
-            <a:ext cx="2132280" cy="363600"/>
+            <a:ext cx="2131920" cy="363240"/>
           </a:xfrm>
           <a:prstGeom prst="rect">
             <a:avLst/>
@@ -4909,23 +4819,23 @@
             <a:noAutofit/>
           </a:bodyPr>
           <a:p>
-            <a:pPr indent="0">
+            <a:pPr indent="0" algn="ctr">
               <a:buNone/>
             </a:pPr>
             <a:r>
-              <a:rPr b="0" lang="en-US" sz="1800" spc="-1" strike="noStrike">
-                <a:solidFill>
-                  <a:schemeClr val="dk1"/>
-                </a:solidFill>
-                <a:latin typeface="Calibri"/>
+              <a:rPr b="0" lang="en-US" sz="4400" spc="-1" strike="noStrike">
+                <a:solidFill>
+                  <a:srgbClr val="000000"/>
+                </a:solidFill>
+                <a:latin typeface="Arial"/>
               </a:rPr>
               <a:t>Click to edit the title text format</a:t>
             </a:r>
-            <a:endParaRPr b="0" lang="en-US" sz="1800" spc="-1" strike="noStrike">
-              <a:solidFill>
-                <a:schemeClr val="dk1"/>
-              </a:solidFill>
-              <a:latin typeface="Calibri"/>
+            <a:endParaRPr b="0" lang="en-US" sz="4400" spc="-1" strike="noStrike">
+              <a:solidFill>
+                <a:srgbClr val="000000"/>
+              </a:solidFill>
+              <a:latin typeface="Arial"/>
             </a:endParaRPr>
           </a:p>
         </p:txBody>
@@ -4959,9 +4869,6 @@
           </a:bodyPr>
           <a:p>
             <a:pPr marL="432000" indent="-324000">
-              <a:lnSpc>
-                <a:spcPct val="90000"/>
-              </a:lnSpc>
               <a:spcBef>
                 <a:spcPts val="1417"/>
               </a:spcBef>
@@ -4973,26 +4880,23 @@
               <a:buChar char=""/>
             </a:pPr>
             <a:r>
-              <a:rPr b="0" lang="en-US" sz="2800" spc="-1" strike="noStrike">
-                <a:solidFill>
-                  <a:schemeClr val="dk1"/>
-                </a:solidFill>
-                <a:latin typeface="Calibri"/>
+              <a:rPr b="0" lang="en-US" sz="3200" spc="-1" strike="noStrike">
+                <a:solidFill>
+                  <a:srgbClr val="000000"/>
+                </a:solidFill>
+                <a:latin typeface="Arial"/>
               </a:rPr>
               <a:t>Click to edit the outline text format</a:t>
             </a:r>
-            <a:endParaRPr b="0" lang="en-US" sz="2800" spc="-1" strike="noStrike">
-              <a:solidFill>
-                <a:schemeClr val="dk1"/>
-              </a:solidFill>
-              <a:latin typeface="Calibri"/>
+            <a:endParaRPr b="0" lang="en-US" sz="3200" spc="-1" strike="noStrike">
+              <a:solidFill>
+                <a:srgbClr val="000000"/>
+              </a:solidFill>
+              <a:latin typeface="Arial"/>
             </a:endParaRPr>
           </a:p>
           <a:p>
             <a:pPr lvl="1" marL="864000" indent="-324000">
-              <a:lnSpc>
-                <a:spcPct val="90000"/>
-              </a:lnSpc>
               <a:spcBef>
                 <a:spcPts val="1134"/>
               </a:spcBef>
@@ -5004,26 +4908,23 @@
               <a:buChar char=""/>
             </a:pPr>
             <a:r>
-              <a:rPr b="0" lang="en-US" sz="2000" spc="-1" strike="noStrike">
-                <a:solidFill>
-                  <a:schemeClr val="dk1"/>
-                </a:solidFill>
-                <a:latin typeface="Calibri"/>
+              <a:rPr b="0" lang="en-US" sz="2800" spc="-1" strike="noStrike">
+                <a:solidFill>
+                  <a:srgbClr val="000000"/>
+                </a:solidFill>
+                <a:latin typeface="Arial"/>
               </a:rPr>
               <a:t>Second Outline Level</a:t>
             </a:r>
-            <a:endParaRPr b="0" lang="en-US" sz="2000" spc="-1" strike="noStrike">
-              <a:solidFill>
-                <a:schemeClr val="dk1"/>
-              </a:solidFill>
-              <a:latin typeface="Calibri"/>
+            <a:endParaRPr b="0" lang="en-US" sz="2800" spc="-1" strike="noStrike">
+              <a:solidFill>
+                <a:srgbClr val="000000"/>
+              </a:solidFill>
+              <a:latin typeface="Arial"/>
             </a:endParaRPr>
           </a:p>
           <a:p>
             <a:pPr lvl="2" marL="1296000" indent="-288000">
-              <a:lnSpc>
-                <a:spcPct val="90000"/>
-              </a:lnSpc>
               <a:spcBef>
                 <a:spcPts val="850"/>
               </a:spcBef>
@@ -5035,26 +4936,23 @@
               <a:buChar char=""/>
             </a:pPr>
             <a:r>
-              <a:rPr b="0" lang="en-US" sz="1800" spc="-1" strike="noStrike">
-                <a:solidFill>
-                  <a:schemeClr val="dk1"/>
-                </a:solidFill>
-                <a:latin typeface="Calibri"/>
+              <a:rPr b="0" lang="en-US" sz="2400" spc="-1" strike="noStrike">
+                <a:solidFill>
+                  <a:srgbClr val="000000"/>
+                </a:solidFill>
+                <a:latin typeface="Arial"/>
               </a:rPr>
               <a:t>Third Outline Level</a:t>
             </a:r>
-            <a:endParaRPr b="0" lang="en-US" sz="1800" spc="-1" strike="noStrike">
-              <a:solidFill>
-                <a:schemeClr val="dk1"/>
-              </a:solidFill>
-              <a:latin typeface="Calibri"/>
+            <a:endParaRPr b="0" lang="en-US" sz="2400" spc="-1" strike="noStrike">
+              <a:solidFill>
+                <a:srgbClr val="000000"/>
+              </a:solidFill>
+              <a:latin typeface="Arial"/>
             </a:endParaRPr>
           </a:p>
           <a:p>
             <a:pPr lvl="3" marL="1728000" indent="-216000">
-              <a:lnSpc>
-                <a:spcPct val="90000"/>
-              </a:lnSpc>
               <a:spcBef>
                 <a:spcPts val="567"/>
               </a:spcBef>
@@ -5066,26 +4964,23 @@
               <a:buChar char=""/>
             </a:pPr>
             <a:r>
-              <a:rPr b="0" lang="en-US" sz="1800" spc="-1" strike="noStrike">
-                <a:solidFill>
-                  <a:schemeClr val="dk1"/>
-                </a:solidFill>
-                <a:latin typeface="Calibri"/>
+              <a:rPr b="0" lang="en-US" sz="2000" spc="-1" strike="noStrike">
+                <a:solidFill>
+                  <a:srgbClr val="000000"/>
+                </a:solidFill>
+                <a:latin typeface="Arial"/>
               </a:rPr>
               <a:t>Fourth Outline Level</a:t>
             </a:r>
-            <a:endParaRPr b="0" lang="en-US" sz="1800" spc="-1" strike="noStrike">
-              <a:solidFill>
-                <a:schemeClr val="dk1"/>
-              </a:solidFill>
-              <a:latin typeface="Calibri"/>
+            <a:endParaRPr b="0" lang="en-US" sz="2000" spc="-1" strike="noStrike">
+              <a:solidFill>
+                <a:srgbClr val="000000"/>
+              </a:solidFill>
+              <a:latin typeface="Arial"/>
             </a:endParaRPr>
           </a:p>
           <a:p>
             <a:pPr lvl="4" marL="2160000" indent="-216000">
-              <a:lnSpc>
-                <a:spcPct val="90000"/>
-              </a:lnSpc>
               <a:spcBef>
                 <a:spcPts val="283"/>
               </a:spcBef>
@@ -5099,24 +4994,21 @@
             <a:r>
               <a:rPr b="0" lang="en-US" sz="2000" spc="-1" strike="noStrike">
                 <a:solidFill>
-                  <a:schemeClr val="dk1"/>
-                </a:solidFill>
-                <a:latin typeface="Calibri"/>
+                  <a:srgbClr val="000000"/>
+                </a:solidFill>
+                <a:latin typeface="Arial"/>
               </a:rPr>
               <a:t>Fifth Outline Level</a:t>
             </a:r>
             <a:endParaRPr b="0" lang="en-US" sz="2000" spc="-1" strike="noStrike">
               <a:solidFill>
-                <a:schemeClr val="dk1"/>
-              </a:solidFill>
-              <a:latin typeface="Calibri"/>
+                <a:srgbClr val="000000"/>
+              </a:solidFill>
+              <a:latin typeface="Arial"/>
             </a:endParaRPr>
           </a:p>
           <a:p>
             <a:pPr lvl="5" marL="2592000" indent="-216000">
-              <a:lnSpc>
-                <a:spcPct val="90000"/>
-              </a:lnSpc>
               <a:spcBef>
                 <a:spcPts val="283"/>
               </a:spcBef>
@@ -5130,24 +5022,21 @@
             <a:r>
               <a:rPr b="0" lang="en-US" sz="2000" spc="-1" strike="noStrike">
                 <a:solidFill>
-                  <a:schemeClr val="dk1"/>
-                </a:solidFill>
-                <a:latin typeface="Calibri"/>
+                  <a:srgbClr val="000000"/>
+                </a:solidFill>
+                <a:latin typeface="Arial"/>
               </a:rPr>
               <a:t>Sixth Outline Level</a:t>
             </a:r>
             <a:endParaRPr b="0" lang="en-US" sz="2000" spc="-1" strike="noStrike">
               <a:solidFill>
-                <a:schemeClr val="dk1"/>
-              </a:solidFill>
-              <a:latin typeface="Calibri"/>
+                <a:srgbClr val="000000"/>
+              </a:solidFill>
+              <a:latin typeface="Arial"/>
             </a:endParaRPr>
           </a:p>
           <a:p>
             <a:pPr lvl="6" marL="3024000" indent="-216000">
-              <a:lnSpc>
-                <a:spcPct val="90000"/>
-              </a:lnSpc>
               <a:spcBef>
                 <a:spcPts val="283"/>
               </a:spcBef>
@@ -5161,17 +5050,17 @@
             <a:r>
               <a:rPr b="0" lang="en-US" sz="2000" spc="-1" strike="noStrike">
                 <a:solidFill>
-                  <a:schemeClr val="dk1"/>
-                </a:solidFill>
-                <a:latin typeface="Calibri"/>
+                  <a:srgbClr val="000000"/>
+                </a:solidFill>
+                <a:latin typeface="Arial"/>
               </a:rPr>
               <a:t>Seventh Outline Level</a:t>
             </a:r>
             <a:endParaRPr b="0" lang="en-US" sz="2000" spc="-1" strike="noStrike">
               <a:solidFill>
-                <a:schemeClr val="dk1"/>
-              </a:solidFill>
-              <a:latin typeface="Calibri"/>
+                <a:srgbClr val="000000"/>
+              </a:solidFill>
+              <a:latin typeface="Arial"/>
             </a:endParaRPr>
           </a:p>
         </p:txBody>
@@ -5218,9 +5107,9 @@
         <p:grpSpPr>
           <a:xfrm>
             <a:off x="0" y="0"/>
-            <a:ext cx="18286560" cy="10285560"/>
+            <a:ext cx="18286200" cy="10285200"/>
             <a:chOff x="0" y="0"/>
-            <a:chExt cx="18286560" cy="10285560"/>
+            <a:chExt cx="18286200" cy="10285200"/>
           </a:xfrm>
         </p:grpSpPr>
         <p:sp>
@@ -5232,15 +5121,15 @@
           <p:spPr>
             <a:xfrm>
               <a:off x="0" y="0"/>
-              <a:ext cx="18286560" cy="10285560"/>
+              <a:ext cx="18286200" cy="10285200"/>
             </a:xfrm>
             <a:custGeom>
               <a:avLst/>
               <a:gdLst>
-                <a:gd name="textAreaLeft" fmla="*/ 0 w 18286560"/>
-                <a:gd name="textAreaRight" fmla="*/ 18288000 w 18286560"/>
-                <a:gd name="textAreaTop" fmla="*/ 0 h 10285560"/>
-                <a:gd name="textAreaBottom" fmla="*/ 10287000 h 10285560"/>
+                <a:gd name="textAreaLeft" fmla="*/ 0 w 18286200"/>
+                <a:gd name="textAreaRight" fmla="*/ 18288000 w 18286200"/>
+                <a:gd name="textAreaTop" fmla="*/ 0 h 10285200"/>
+                <a:gd name="textAreaBottom" fmla="*/ 10287000 h 10285200"/>
               </a:gdLst>
               <a:ahLst/>
               <a:rect l="textAreaLeft" t="textAreaTop" r="textAreaRight" b="textAreaBottom"/>
@@ -5308,9 +5197,9 @@
           <p:grpSpPr>
             <a:xfrm>
               <a:off x="13716000" y="1589760"/>
-              <a:ext cx="1332000" cy="1848960"/>
+              <a:ext cx="1331640" cy="1848600"/>
               <a:chOff x="13716000" y="1589760"/>
-              <a:chExt cx="1332000" cy="1848960"/>
+              <a:chExt cx="1331640" cy="1848600"/>
             </a:xfrm>
           </p:grpSpPr>
           <p:sp>
@@ -5322,15 +5211,15 @@
             <p:spPr>
               <a:xfrm>
                 <a:off x="13716000" y="1770480"/>
-                <a:ext cx="1332000" cy="1668240"/>
+                <a:ext cx="1331640" cy="1667880"/>
               </a:xfrm>
               <a:custGeom>
                 <a:avLst/>
                 <a:gdLst>
-                  <a:gd name="textAreaLeft" fmla="*/ 0 w 1332000"/>
-                  <a:gd name="textAreaRight" fmla="*/ 1333440 w 1332000"/>
-                  <a:gd name="textAreaTop" fmla="*/ 0 h 1668240"/>
-                  <a:gd name="textAreaBottom" fmla="*/ 1669680 h 1668240"/>
+                  <a:gd name="textAreaLeft" fmla="*/ 0 w 1331640"/>
+                  <a:gd name="textAreaRight" fmla="*/ 1333440 w 1331640"/>
+                  <a:gd name="textAreaTop" fmla="*/ 0 h 1667880"/>
+                  <a:gd name="textAreaBottom" fmla="*/ 1669680 h 1667880"/>
                 </a:gdLst>
                 <a:ahLst/>
                 <a:rect l="textAreaLeft" t="textAreaTop" r="textAreaRight" b="textAreaBottom"/>
@@ -5393,7 +5282,7 @@
             <p:spPr>
               <a:xfrm>
                 <a:off x="13716000" y="1589760"/>
-                <a:ext cx="1332000" cy="1848960"/>
+                <a:ext cx="1331640" cy="1848600"/>
               </a:xfrm>
               <a:prstGeom prst="rect">
                 <a:avLst/>
@@ -5439,7 +5328,7 @@
         <p:spPr>
           <a:xfrm>
             <a:off x="4486320" y="593640"/>
-            <a:ext cx="9313920" cy="5486040"/>
+            <a:ext cx="9313560" cy="5486040"/>
           </a:xfrm>
           <a:prstGeom prst="rect">
             <a:avLst/>
@@ -5539,15 +5428,15 @@
         <p:spPr>
           <a:xfrm>
             <a:off x="8751960" y="4398840"/>
-            <a:ext cx="10917000" cy="4611600"/>
+            <a:ext cx="10916640" cy="4611240"/>
           </a:xfrm>
           <a:custGeom>
             <a:avLst/>
             <a:gdLst>
-              <a:gd name="textAreaLeft" fmla="*/ 0 w 10917000"/>
-              <a:gd name="textAreaRight" fmla="*/ 10918440 w 10917000"/>
-              <a:gd name="textAreaTop" fmla="*/ 0 h 4611600"/>
-              <a:gd name="textAreaBottom" fmla="*/ 4613040 h 4611600"/>
+              <a:gd name="textAreaLeft" fmla="*/ 0 w 10916640"/>
+              <a:gd name="textAreaRight" fmla="*/ 10918440 w 10916640"/>
+              <a:gd name="textAreaTop" fmla="*/ 0 h 4611240"/>
+              <a:gd name="textAreaBottom" fmla="*/ 4613040 h 4611240"/>
             </a:gdLst>
             <a:ahLst/>
             <a:rect l="textAreaLeft" t="textAreaTop" r="textAreaRight" b="textAreaBottom"/>
@@ -5615,7 +5504,7 @@
         <p:spPr>
           <a:xfrm>
             <a:off x="15163920" y="9487080"/>
-            <a:ext cx="3122640" cy="638280"/>
+            <a:ext cx="3122280" cy="638280"/>
           </a:xfrm>
           <a:prstGeom prst="rect">
             <a:avLst/>
@@ -5720,14 +5609,14 @@
       </p:grpSpPr>
       <p:sp>
         <p:nvSpPr>
-          <p:cNvPr id="126" name="TextBox 6"/>
+          <p:cNvPr id="137" name="TextBox 6"/>
           <p:cNvSpPr/>
           <p:nvPr/>
         </p:nvSpPr>
         <p:spPr>
           <a:xfrm>
             <a:off x="1028880" y="1019160"/>
-            <a:ext cx="14286240" cy="1371240"/>
+            <a:ext cx="14285880" cy="1371240"/>
           </a:xfrm>
           <a:prstGeom prst="rect">
             <a:avLst/>
@@ -5784,14 +5673,14 @@
       </p:sp>
       <p:sp>
         <p:nvSpPr>
-          <p:cNvPr id="127" name="TextBox 8"/>
+          <p:cNvPr id="138" name="TextBox 8"/>
           <p:cNvSpPr/>
           <p:nvPr/>
         </p:nvSpPr>
         <p:spPr>
           <a:xfrm>
             <a:off x="5283720" y="4005360"/>
-            <a:ext cx="4031280" cy="487440"/>
+            <a:ext cx="4030920" cy="487440"/>
           </a:xfrm>
           <a:prstGeom prst="rect">
             <a:avLst/>
@@ -5841,14 +5730,14 @@
       </p:sp>
       <p:sp>
         <p:nvSpPr>
-          <p:cNvPr id="128" name="TextBox 9"/>
+          <p:cNvPr id="139" name="TextBox 9"/>
           <p:cNvSpPr/>
           <p:nvPr/>
         </p:nvSpPr>
         <p:spPr>
           <a:xfrm>
             <a:off x="1028880" y="6998400"/>
-            <a:ext cx="3869280" cy="487440"/>
+            <a:ext cx="3868920" cy="487440"/>
           </a:xfrm>
           <a:prstGeom prst="rect">
             <a:avLst/>
@@ -5898,14 +5787,14 @@
       </p:sp>
       <p:sp>
         <p:nvSpPr>
-          <p:cNvPr id="129" name="TextBox 10"/>
+          <p:cNvPr id="140" name="TextBox 10"/>
           <p:cNvSpPr/>
           <p:nvPr/>
         </p:nvSpPr>
         <p:spPr>
           <a:xfrm>
             <a:off x="5283720" y="6998400"/>
-            <a:ext cx="4031280" cy="487440"/>
+            <a:ext cx="4030920" cy="487440"/>
           </a:xfrm>
           <a:prstGeom prst="rect">
             <a:avLst/>
@@ -5955,14 +5844,14 @@
       </p:sp>
       <p:sp>
         <p:nvSpPr>
-          <p:cNvPr id="130" name="TextBox 11"/>
+          <p:cNvPr id="141" name="TextBox 11"/>
           <p:cNvSpPr/>
           <p:nvPr/>
         </p:nvSpPr>
         <p:spPr>
           <a:xfrm>
             <a:off x="1028880" y="4686840"/>
-            <a:ext cx="3869280" cy="852840"/>
+            <a:ext cx="3868920" cy="852840"/>
           </a:xfrm>
           <a:prstGeom prst="rect">
             <a:avLst/>
@@ -6012,14 +5901,14 @@
       </p:sp>
       <p:sp>
         <p:nvSpPr>
-          <p:cNvPr id="131" name="TextBox 12"/>
+          <p:cNvPr id="142" name="TextBox 12"/>
           <p:cNvSpPr/>
           <p:nvPr/>
         </p:nvSpPr>
         <p:spPr>
           <a:xfrm>
             <a:off x="5283720" y="4686840"/>
-            <a:ext cx="3869280" cy="852840"/>
+            <a:ext cx="3868920" cy="852840"/>
           </a:xfrm>
           <a:prstGeom prst="rect">
             <a:avLst/>
@@ -6069,14 +5958,14 @@
       </p:sp>
       <p:sp>
         <p:nvSpPr>
-          <p:cNvPr id="132" name="TextBox 13"/>
+          <p:cNvPr id="143" name="TextBox 13"/>
           <p:cNvSpPr/>
           <p:nvPr/>
         </p:nvSpPr>
         <p:spPr>
           <a:xfrm>
             <a:off x="1028880" y="7679880"/>
-            <a:ext cx="3978720" cy="852840"/>
+            <a:ext cx="3978360" cy="852840"/>
           </a:xfrm>
           <a:prstGeom prst="rect">
             <a:avLst/>
@@ -6126,14 +6015,14 @@
       </p:sp>
       <p:sp>
         <p:nvSpPr>
-          <p:cNvPr id="133" name="TextBox 14"/>
+          <p:cNvPr id="144" name="TextBox 14"/>
           <p:cNvSpPr/>
           <p:nvPr/>
         </p:nvSpPr>
         <p:spPr>
           <a:xfrm>
             <a:off x="5283720" y="7679880"/>
-            <a:ext cx="3978720" cy="852840"/>
+            <a:ext cx="3978360" cy="852840"/>
           </a:xfrm>
           <a:prstGeom prst="rect">
             <a:avLst/>
@@ -6220,14 +6109,14 @@
       </p:grpSpPr>
       <p:sp>
         <p:nvSpPr>
-          <p:cNvPr id="134" name="TextBox 6"/>
+          <p:cNvPr id="145" name="TextBox 6"/>
           <p:cNvSpPr/>
           <p:nvPr/>
         </p:nvSpPr>
         <p:spPr>
           <a:xfrm>
             <a:off x="1028880" y="1019160"/>
-            <a:ext cx="14286240" cy="1371240"/>
+            <a:ext cx="14285880" cy="1371240"/>
           </a:xfrm>
           <a:prstGeom prst="rect">
             <a:avLst/>
@@ -6284,14 +6173,14 @@
       </p:sp>
       <p:sp>
         <p:nvSpPr>
-          <p:cNvPr id="135" name="TextBox 7"/>
+          <p:cNvPr id="146" name="TextBox 7"/>
           <p:cNvSpPr/>
           <p:nvPr/>
         </p:nvSpPr>
         <p:spPr>
           <a:xfrm>
             <a:off x="1028880" y="4005360"/>
-            <a:ext cx="3869280" cy="487440"/>
+            <a:ext cx="3868920" cy="487440"/>
           </a:xfrm>
           <a:prstGeom prst="rect">
             <a:avLst/>
@@ -6341,14 +6230,14 @@
       </p:sp>
       <p:sp>
         <p:nvSpPr>
-          <p:cNvPr id="136" name="TextBox 8"/>
+          <p:cNvPr id="147" name="TextBox 8"/>
           <p:cNvSpPr/>
           <p:nvPr/>
         </p:nvSpPr>
         <p:spPr>
           <a:xfrm>
             <a:off x="5283720" y="4005360"/>
-            <a:ext cx="4031280" cy="487440"/>
+            <a:ext cx="4030920" cy="487440"/>
           </a:xfrm>
           <a:prstGeom prst="rect">
             <a:avLst/>
@@ -6398,14 +6287,14 @@
       </p:sp>
       <p:sp>
         <p:nvSpPr>
-          <p:cNvPr id="137" name="TextBox 9"/>
+          <p:cNvPr id="148" name="TextBox 9"/>
           <p:cNvSpPr/>
           <p:nvPr/>
         </p:nvSpPr>
         <p:spPr>
           <a:xfrm>
             <a:off x="1028880" y="6998400"/>
-            <a:ext cx="3869280" cy="487440"/>
+            <a:ext cx="3868920" cy="487440"/>
           </a:xfrm>
           <a:prstGeom prst="rect">
             <a:avLst/>
@@ -6455,14 +6344,14 @@
       </p:sp>
       <p:sp>
         <p:nvSpPr>
-          <p:cNvPr id="138" name="TextBox 10"/>
+          <p:cNvPr id="149" name="TextBox 10"/>
           <p:cNvSpPr/>
           <p:nvPr/>
         </p:nvSpPr>
         <p:spPr>
           <a:xfrm>
             <a:off x="5283720" y="6998400"/>
-            <a:ext cx="4031280" cy="487440"/>
+            <a:ext cx="4030920" cy="487440"/>
           </a:xfrm>
           <a:prstGeom prst="rect">
             <a:avLst/>
@@ -6512,14 +6401,14 @@
       </p:sp>
       <p:sp>
         <p:nvSpPr>
-          <p:cNvPr id="139" name="TextBox 11"/>
+          <p:cNvPr id="150" name="TextBox 11"/>
           <p:cNvSpPr/>
           <p:nvPr/>
         </p:nvSpPr>
         <p:spPr>
           <a:xfrm>
             <a:off x="1028880" y="4686840"/>
-            <a:ext cx="3869280" cy="3412440"/>
+            <a:ext cx="3868920" cy="3412440"/>
           </a:xfrm>
           <a:prstGeom prst="rect">
             <a:avLst/>
@@ -6575,14 +6464,14 @@
       </p:sp>
       <p:sp>
         <p:nvSpPr>
-          <p:cNvPr id="140" name="TextBox 12"/>
+          <p:cNvPr id="151" name="TextBox 12"/>
           <p:cNvSpPr/>
           <p:nvPr/>
         </p:nvSpPr>
         <p:spPr>
           <a:xfrm>
             <a:off x="5283720" y="4686840"/>
-            <a:ext cx="3869280" cy="852840"/>
+            <a:ext cx="3868920" cy="852840"/>
           </a:xfrm>
           <a:prstGeom prst="rect">
             <a:avLst/>
@@ -6632,14 +6521,14 @@
       </p:sp>
       <p:sp>
         <p:nvSpPr>
-          <p:cNvPr id="141" name="TextBox 13"/>
+          <p:cNvPr id="152" name="TextBox 13"/>
           <p:cNvSpPr/>
           <p:nvPr/>
         </p:nvSpPr>
         <p:spPr>
           <a:xfrm>
             <a:off x="1028880" y="7679880"/>
-            <a:ext cx="3978720" cy="852840"/>
+            <a:ext cx="3978360" cy="852840"/>
           </a:xfrm>
           <a:prstGeom prst="rect">
             <a:avLst/>
@@ -6689,14 +6578,14 @@
       </p:sp>
       <p:sp>
         <p:nvSpPr>
-          <p:cNvPr id="142" name="TextBox 14"/>
+          <p:cNvPr id="153" name="TextBox 14"/>
           <p:cNvSpPr/>
           <p:nvPr/>
         </p:nvSpPr>
         <p:spPr>
           <a:xfrm>
             <a:off x="5283720" y="7679880"/>
-            <a:ext cx="3978720" cy="852840"/>
+            <a:ext cx="3978360" cy="852840"/>
           </a:xfrm>
           <a:prstGeom prst="rect">
             <a:avLst/>
@@ -6783,14 +6672,14 @@
       </p:grpSpPr>
       <p:sp>
         <p:nvSpPr>
-          <p:cNvPr id="143" name="TextBox 6"/>
+          <p:cNvPr id="154" name="TextBox 6"/>
           <p:cNvSpPr/>
           <p:nvPr/>
         </p:nvSpPr>
         <p:spPr>
           <a:xfrm>
             <a:off x="1028880" y="1019160"/>
-            <a:ext cx="14286240" cy="1371240"/>
+            <a:ext cx="14285880" cy="1371240"/>
           </a:xfrm>
           <a:prstGeom prst="rect">
             <a:avLst/>
@@ -6847,14 +6736,14 @@
       </p:sp>
       <p:sp>
         <p:nvSpPr>
-          <p:cNvPr id="144" name="TextBox 7"/>
+          <p:cNvPr id="155" name="TextBox 7"/>
           <p:cNvSpPr/>
           <p:nvPr/>
         </p:nvSpPr>
         <p:spPr>
           <a:xfrm>
             <a:off x="1028880" y="4005360"/>
-            <a:ext cx="3869280" cy="487440"/>
+            <a:ext cx="3868920" cy="487440"/>
           </a:xfrm>
           <a:prstGeom prst="rect">
             <a:avLst/>
@@ -6904,14 +6793,14 @@
       </p:sp>
       <p:sp>
         <p:nvSpPr>
-          <p:cNvPr id="145" name="TextBox 8"/>
+          <p:cNvPr id="156" name="TextBox 8"/>
           <p:cNvSpPr/>
           <p:nvPr/>
         </p:nvSpPr>
         <p:spPr>
           <a:xfrm>
             <a:off x="5283720" y="4005360"/>
-            <a:ext cx="4031280" cy="487440"/>
+            <a:ext cx="4030920" cy="487440"/>
           </a:xfrm>
           <a:prstGeom prst="rect">
             <a:avLst/>
@@ -6961,14 +6850,14 @@
       </p:sp>
       <p:sp>
         <p:nvSpPr>
-          <p:cNvPr id="146" name="TextBox 9"/>
+          <p:cNvPr id="157" name="TextBox 9"/>
           <p:cNvSpPr/>
           <p:nvPr/>
         </p:nvSpPr>
         <p:spPr>
           <a:xfrm>
             <a:off x="1028880" y="6998400"/>
-            <a:ext cx="3869280" cy="487440"/>
+            <a:ext cx="3868920" cy="487440"/>
           </a:xfrm>
           <a:prstGeom prst="rect">
             <a:avLst/>
@@ -7018,14 +6907,14 @@
       </p:sp>
       <p:sp>
         <p:nvSpPr>
-          <p:cNvPr id="147" name="TextBox 10"/>
+          <p:cNvPr id="158" name="TextBox 10"/>
           <p:cNvSpPr/>
           <p:nvPr/>
         </p:nvSpPr>
         <p:spPr>
           <a:xfrm>
             <a:off x="5283720" y="6998400"/>
-            <a:ext cx="4031280" cy="487440"/>
+            <a:ext cx="4030920" cy="487440"/>
           </a:xfrm>
           <a:prstGeom prst="rect">
             <a:avLst/>
@@ -7075,14 +6964,14 @@
       </p:sp>
       <p:sp>
         <p:nvSpPr>
-          <p:cNvPr id="148" name="TextBox 11"/>
+          <p:cNvPr id="159" name="TextBox 11"/>
           <p:cNvSpPr/>
           <p:nvPr/>
         </p:nvSpPr>
         <p:spPr>
           <a:xfrm>
             <a:off x="1028880" y="4686840"/>
-            <a:ext cx="3869280" cy="852840"/>
+            <a:ext cx="3868920" cy="852840"/>
           </a:xfrm>
           <a:prstGeom prst="rect">
             <a:avLst/>
@@ -7132,14 +7021,14 @@
       </p:sp>
       <p:sp>
         <p:nvSpPr>
-          <p:cNvPr id="149" name="TextBox 12"/>
+          <p:cNvPr id="160" name="TextBox 12"/>
           <p:cNvSpPr/>
           <p:nvPr/>
         </p:nvSpPr>
         <p:spPr>
           <a:xfrm>
             <a:off x="5283720" y="4686840"/>
-            <a:ext cx="3869280" cy="3839040"/>
+            <a:ext cx="3868920" cy="3839040"/>
           </a:xfrm>
           <a:prstGeom prst="rect">
             <a:avLst/>
@@ -7202,14 +7091,14 @@
       </p:sp>
       <p:sp>
         <p:nvSpPr>
-          <p:cNvPr id="150" name="TextBox 13"/>
+          <p:cNvPr id="161" name="TextBox 13"/>
           <p:cNvSpPr/>
           <p:nvPr/>
         </p:nvSpPr>
         <p:spPr>
           <a:xfrm>
             <a:off x="1028880" y="7679880"/>
-            <a:ext cx="3978720" cy="852840"/>
+            <a:ext cx="3978360" cy="852840"/>
           </a:xfrm>
           <a:prstGeom prst="rect">
             <a:avLst/>
@@ -7259,14 +7148,14 @@
       </p:sp>
       <p:sp>
         <p:nvSpPr>
-          <p:cNvPr id="151" name="TextBox 14"/>
+          <p:cNvPr id="162" name="TextBox 14"/>
           <p:cNvSpPr/>
           <p:nvPr/>
         </p:nvSpPr>
         <p:spPr>
           <a:xfrm>
             <a:off x="5283720" y="7679880"/>
-            <a:ext cx="3978720" cy="852840"/>
+            <a:ext cx="3978360" cy="852840"/>
           </a:xfrm>
           <a:prstGeom prst="rect">
             <a:avLst/>
@@ -7316,14 +7205,14 @@
       </p:sp>
       <p:sp>
         <p:nvSpPr>
-          <p:cNvPr id="152" name="TextBox 1"/>
+          <p:cNvPr id="163" name="TextBox 1"/>
           <p:cNvSpPr/>
           <p:nvPr/>
         </p:nvSpPr>
         <p:spPr>
           <a:xfrm>
             <a:off x="10122480" y="2723400"/>
-            <a:ext cx="7725960" cy="5850360"/>
+            <a:ext cx="7725600" cy="5850360"/>
           </a:xfrm>
           <a:prstGeom prst="rect">
             <a:avLst/>
@@ -7591,14 +7480,14 @@
       </p:grpSpPr>
       <p:sp>
         <p:nvSpPr>
-          <p:cNvPr id="153" name="TextBox 6"/>
+          <p:cNvPr id="164" name="TextBox 6"/>
           <p:cNvSpPr/>
           <p:nvPr/>
         </p:nvSpPr>
         <p:spPr>
           <a:xfrm>
             <a:off x="1028880" y="1019160"/>
-            <a:ext cx="14286240" cy="1371240"/>
+            <a:ext cx="14285880" cy="1371240"/>
           </a:xfrm>
           <a:prstGeom prst="rect">
             <a:avLst/>
@@ -7655,14 +7544,14 @@
       </p:sp>
       <p:sp>
         <p:nvSpPr>
-          <p:cNvPr id="154" name="TextBox 7"/>
+          <p:cNvPr id="165" name="TextBox 7"/>
           <p:cNvSpPr/>
           <p:nvPr/>
         </p:nvSpPr>
         <p:spPr>
           <a:xfrm>
             <a:off x="1028880" y="4005360"/>
-            <a:ext cx="3869280" cy="487440"/>
+            <a:ext cx="3868920" cy="487440"/>
           </a:xfrm>
           <a:prstGeom prst="rect">
             <a:avLst/>
@@ -7712,14 +7601,14 @@
       </p:sp>
       <p:sp>
         <p:nvSpPr>
-          <p:cNvPr id="155" name="TextBox 8"/>
+          <p:cNvPr id="166" name="TextBox 8"/>
           <p:cNvSpPr/>
           <p:nvPr/>
         </p:nvSpPr>
         <p:spPr>
           <a:xfrm>
             <a:off x="5283720" y="4005360"/>
-            <a:ext cx="4031280" cy="487440"/>
+            <a:ext cx="4030920" cy="487440"/>
           </a:xfrm>
           <a:prstGeom prst="rect">
             <a:avLst/>
@@ -7769,14 +7658,14 @@
       </p:sp>
       <p:sp>
         <p:nvSpPr>
-          <p:cNvPr id="156" name="TextBox 9"/>
+          <p:cNvPr id="167" name="TextBox 9"/>
           <p:cNvSpPr/>
           <p:nvPr/>
         </p:nvSpPr>
         <p:spPr>
           <a:xfrm>
             <a:off x="1028880" y="6998400"/>
-            <a:ext cx="3869280" cy="487440"/>
+            <a:ext cx="3868920" cy="487440"/>
           </a:xfrm>
           <a:prstGeom prst="rect">
             <a:avLst/>
@@ -7826,14 +7715,14 @@
       </p:sp>
       <p:sp>
         <p:nvSpPr>
-          <p:cNvPr id="157" name="TextBox 10"/>
+          <p:cNvPr id="168" name="TextBox 10"/>
           <p:cNvSpPr/>
           <p:nvPr/>
         </p:nvSpPr>
         <p:spPr>
           <a:xfrm>
             <a:off x="5283720" y="6998400"/>
-            <a:ext cx="4031280" cy="487440"/>
+            <a:ext cx="4030920" cy="487440"/>
           </a:xfrm>
           <a:prstGeom prst="rect">
             <a:avLst/>
@@ -7883,14 +7772,14 @@
       </p:sp>
       <p:sp>
         <p:nvSpPr>
-          <p:cNvPr id="158" name="TextBox 11"/>
+          <p:cNvPr id="169" name="TextBox 11"/>
           <p:cNvSpPr/>
           <p:nvPr/>
         </p:nvSpPr>
         <p:spPr>
           <a:xfrm>
             <a:off x="1028880" y="4686840"/>
-            <a:ext cx="3869280" cy="852840"/>
+            <a:ext cx="3868920" cy="852840"/>
           </a:xfrm>
           <a:prstGeom prst="rect">
             <a:avLst/>
@@ -7940,14 +7829,14 @@
       </p:sp>
       <p:sp>
         <p:nvSpPr>
-          <p:cNvPr id="159" name="TextBox 12"/>
+          <p:cNvPr id="170" name="TextBox 12"/>
           <p:cNvSpPr/>
           <p:nvPr/>
         </p:nvSpPr>
         <p:spPr>
           <a:xfrm>
             <a:off x="5283720" y="4686840"/>
-            <a:ext cx="3869280" cy="852840"/>
+            <a:ext cx="3868920" cy="852840"/>
           </a:xfrm>
           <a:prstGeom prst="rect">
             <a:avLst/>
@@ -7997,14 +7886,14 @@
       </p:sp>
       <p:sp>
         <p:nvSpPr>
-          <p:cNvPr id="160" name="TextBox 13"/>
+          <p:cNvPr id="171" name="TextBox 13"/>
           <p:cNvSpPr/>
           <p:nvPr/>
         </p:nvSpPr>
         <p:spPr>
           <a:xfrm>
             <a:off x="1028880" y="7679880"/>
-            <a:ext cx="3978720" cy="852840"/>
+            <a:ext cx="3978360" cy="852840"/>
           </a:xfrm>
           <a:prstGeom prst="rect">
             <a:avLst/>
@@ -8054,14 +7943,14 @@
       </p:sp>
       <p:sp>
         <p:nvSpPr>
-          <p:cNvPr id="161" name="TextBox 14"/>
+          <p:cNvPr id="172" name="TextBox 14"/>
           <p:cNvSpPr/>
           <p:nvPr/>
         </p:nvSpPr>
         <p:spPr>
           <a:xfrm>
             <a:off x="5283720" y="7679880"/>
-            <a:ext cx="3978720" cy="852840"/>
+            <a:ext cx="3978360" cy="852840"/>
           </a:xfrm>
           <a:prstGeom prst="rect">
             <a:avLst/>
@@ -8148,36 +8037,36 @@
       </p:grpSpPr>
       <p:grpSp>
         <p:nvGrpSpPr>
-          <p:cNvPr id="162" name="Group 6"/>
+          <p:cNvPr id="173" name="Group 6"/>
           <p:cNvGrpSpPr/>
           <p:nvPr/>
         </p:nvGrpSpPr>
         <p:grpSpPr>
           <a:xfrm>
             <a:off x="7492320" y="3423240"/>
-            <a:ext cx="2924640" cy="2924640"/>
+            <a:ext cx="2924280" cy="2924280"/>
             <a:chOff x="7492320" y="3423240"/>
-            <a:chExt cx="2924640" cy="2924640"/>
+            <a:chExt cx="2924280" cy="2924280"/>
           </a:xfrm>
         </p:grpSpPr>
         <p:sp>
           <p:nvSpPr>
-            <p:cNvPr id="163" name="Freeform 7"/>
+            <p:cNvPr id="174" name="Freeform 7"/>
             <p:cNvSpPr/>
             <p:nvPr/>
           </p:nvSpPr>
           <p:spPr>
             <a:xfrm>
               <a:off x="7492320" y="3423240"/>
-              <a:ext cx="2924640" cy="2924640"/>
+              <a:ext cx="2924280" cy="2924280"/>
             </a:xfrm>
             <a:custGeom>
               <a:avLst/>
               <a:gdLst>
-                <a:gd name="textAreaLeft" fmla="*/ 0 w 2924640"/>
-                <a:gd name="textAreaRight" fmla="*/ 2926080 w 2924640"/>
-                <a:gd name="textAreaTop" fmla="*/ 0 h 2924640"/>
-                <a:gd name="textAreaBottom" fmla="*/ 2926080 h 2924640"/>
+                <a:gd name="textAreaLeft" fmla="*/ 0 w 2924280"/>
+                <a:gd name="textAreaRight" fmla="*/ 2926080 w 2924280"/>
+                <a:gd name="textAreaTop" fmla="*/ 0 h 2924280"/>
+                <a:gd name="textAreaBottom" fmla="*/ 2926080 h 2924280"/>
               </a:gdLst>
               <a:ahLst/>
               <a:rect l="textAreaLeft" t="textAreaTop" r="textAreaRight" b="textAreaBottom"/>
@@ -8247,36 +8136,36 @@
       </p:grpSp>
       <p:grpSp>
         <p:nvGrpSpPr>
-          <p:cNvPr id="164" name="Group 8"/>
+          <p:cNvPr id="175" name="Group 8"/>
           <p:cNvGrpSpPr/>
           <p:nvPr/>
         </p:nvGrpSpPr>
         <p:grpSpPr>
           <a:xfrm>
             <a:off x="3193920" y="3423240"/>
-            <a:ext cx="2924640" cy="2924640"/>
+            <a:ext cx="2924280" cy="2924280"/>
             <a:chOff x="3193920" y="3423240"/>
-            <a:chExt cx="2924640" cy="2924640"/>
+            <a:chExt cx="2924280" cy="2924280"/>
           </a:xfrm>
         </p:grpSpPr>
         <p:sp>
           <p:nvSpPr>
-            <p:cNvPr id="165" name="Freeform 9"/>
+            <p:cNvPr id="176" name="Freeform 9"/>
             <p:cNvSpPr/>
             <p:nvPr/>
           </p:nvSpPr>
           <p:spPr>
             <a:xfrm>
               <a:off x="3193920" y="3423240"/>
-              <a:ext cx="2924640" cy="2924640"/>
+              <a:ext cx="2924280" cy="2924280"/>
             </a:xfrm>
             <a:custGeom>
               <a:avLst/>
               <a:gdLst>
-                <a:gd name="textAreaLeft" fmla="*/ 0 w 2924640"/>
-                <a:gd name="textAreaRight" fmla="*/ 2926080 w 2924640"/>
-                <a:gd name="textAreaTop" fmla="*/ 0 h 2924640"/>
-                <a:gd name="textAreaBottom" fmla="*/ 2926080 h 2924640"/>
+                <a:gd name="textAreaLeft" fmla="*/ 0 w 2924280"/>
+                <a:gd name="textAreaRight" fmla="*/ 2926080 w 2924280"/>
+                <a:gd name="textAreaTop" fmla="*/ 0 h 2924280"/>
+                <a:gd name="textAreaBottom" fmla="*/ 2926080 h 2924280"/>
               </a:gdLst>
               <a:ahLst/>
               <a:rect l="textAreaLeft" t="textAreaTop" r="textAreaRight" b="textAreaBottom"/>
@@ -8346,36 +8235,36 @@
       </p:grpSp>
       <p:grpSp>
         <p:nvGrpSpPr>
-          <p:cNvPr id="166" name="Group 10"/>
+          <p:cNvPr id="177" name="Group 10"/>
           <p:cNvGrpSpPr/>
           <p:nvPr/>
         </p:nvGrpSpPr>
         <p:grpSpPr>
           <a:xfrm>
             <a:off x="11790720" y="3423240"/>
-            <a:ext cx="2924640" cy="2924640"/>
+            <a:ext cx="2924280" cy="2924280"/>
             <a:chOff x="11790720" y="3423240"/>
-            <a:chExt cx="2924640" cy="2924640"/>
+            <a:chExt cx="2924280" cy="2924280"/>
           </a:xfrm>
         </p:grpSpPr>
         <p:sp>
           <p:nvSpPr>
-            <p:cNvPr id="167" name="Freeform 11"/>
+            <p:cNvPr id="178" name="Freeform 11"/>
             <p:cNvSpPr/>
             <p:nvPr/>
           </p:nvSpPr>
           <p:spPr>
             <a:xfrm>
               <a:off x="11790720" y="3423240"/>
-              <a:ext cx="2924640" cy="2924640"/>
+              <a:ext cx="2924280" cy="2924280"/>
             </a:xfrm>
             <a:custGeom>
               <a:avLst/>
               <a:gdLst>
-                <a:gd name="textAreaLeft" fmla="*/ 0 w 2924640"/>
-                <a:gd name="textAreaRight" fmla="*/ 2926080 w 2924640"/>
-                <a:gd name="textAreaTop" fmla="*/ 0 h 2924640"/>
-                <a:gd name="textAreaBottom" fmla="*/ 2926080 h 2924640"/>
+                <a:gd name="textAreaLeft" fmla="*/ 0 w 2924280"/>
+                <a:gd name="textAreaRight" fmla="*/ 2926080 w 2924280"/>
+                <a:gd name="textAreaTop" fmla="*/ 0 h 2924280"/>
+                <a:gd name="textAreaBottom" fmla="*/ 2926080 h 2924280"/>
               </a:gdLst>
               <a:ahLst/>
               <a:rect l="textAreaLeft" t="textAreaTop" r="textAreaRight" b="textAreaBottom"/>
@@ -8445,14 +8334,14 @@
       </p:grpSp>
       <p:sp>
         <p:nvSpPr>
-          <p:cNvPr id="168" name="TextBox 12"/>
+          <p:cNvPr id="179" name="TextBox 12"/>
           <p:cNvSpPr/>
           <p:nvPr/>
         </p:nvSpPr>
         <p:spPr>
           <a:xfrm>
             <a:off x="890280" y="1019160"/>
-            <a:ext cx="16506000" cy="1371240"/>
+            <a:ext cx="16505640" cy="1371240"/>
           </a:xfrm>
           <a:prstGeom prst="rect">
             <a:avLst/>
@@ -8512,14 +8401,14 @@
       </p:sp>
       <p:sp>
         <p:nvSpPr>
-          <p:cNvPr id="169" name="TextBox 15"/>
+          <p:cNvPr id="180" name="TextBox 15"/>
           <p:cNvSpPr/>
           <p:nvPr/>
         </p:nvSpPr>
         <p:spPr>
           <a:xfrm>
             <a:off x="7302240" y="6819480"/>
-            <a:ext cx="3304800" cy="487440"/>
+            <a:ext cx="3304440" cy="487440"/>
           </a:xfrm>
           <a:prstGeom prst="rect">
             <a:avLst/>
@@ -8569,14 +8458,14 @@
       </p:sp>
       <p:sp>
         <p:nvSpPr>
-          <p:cNvPr id="170" name="TextBox 16"/>
+          <p:cNvPr id="181" name="TextBox 16"/>
           <p:cNvSpPr/>
           <p:nvPr/>
         </p:nvSpPr>
         <p:spPr>
           <a:xfrm>
             <a:off x="7302240" y="7610400"/>
-            <a:ext cx="3304800" cy="852840"/>
+            <a:ext cx="3304440" cy="852840"/>
           </a:xfrm>
           <a:prstGeom prst="rect">
             <a:avLst/>
@@ -8626,14 +8515,14 @@
       </p:sp>
       <p:sp>
         <p:nvSpPr>
-          <p:cNvPr id="171" name="TextBox 17"/>
+          <p:cNvPr id="182" name="TextBox 17"/>
           <p:cNvSpPr/>
           <p:nvPr/>
         </p:nvSpPr>
         <p:spPr>
           <a:xfrm>
             <a:off x="3003840" y="6819480"/>
-            <a:ext cx="3304800" cy="487440"/>
+            <a:ext cx="3304440" cy="487440"/>
           </a:xfrm>
           <a:prstGeom prst="rect">
             <a:avLst/>
@@ -8683,14 +8572,14 @@
       </p:sp>
       <p:sp>
         <p:nvSpPr>
-          <p:cNvPr id="172" name="TextBox 18"/>
+          <p:cNvPr id="183" name="TextBox 18"/>
           <p:cNvSpPr/>
           <p:nvPr/>
         </p:nvSpPr>
         <p:spPr>
           <a:xfrm>
             <a:off x="3003840" y="7610400"/>
-            <a:ext cx="3304800" cy="852840"/>
+            <a:ext cx="3304440" cy="852840"/>
           </a:xfrm>
           <a:prstGeom prst="rect">
             <a:avLst/>
@@ -8740,14 +8629,14 @@
       </p:sp>
       <p:sp>
         <p:nvSpPr>
-          <p:cNvPr id="173" name="TextBox 19"/>
+          <p:cNvPr id="184" name="TextBox 19"/>
           <p:cNvSpPr/>
           <p:nvPr/>
         </p:nvSpPr>
         <p:spPr>
           <a:xfrm>
             <a:off x="11600640" y="6819480"/>
-            <a:ext cx="3304800" cy="487440"/>
+            <a:ext cx="3304440" cy="487440"/>
           </a:xfrm>
           <a:prstGeom prst="rect">
             <a:avLst/>
@@ -8797,14 +8686,14 @@
       </p:sp>
       <p:sp>
         <p:nvSpPr>
-          <p:cNvPr id="174" name="TextBox 20"/>
+          <p:cNvPr id="185" name="TextBox 20"/>
           <p:cNvSpPr/>
           <p:nvPr/>
         </p:nvSpPr>
         <p:spPr>
           <a:xfrm>
             <a:off x="11600640" y="7610400"/>
-            <a:ext cx="3304800" cy="852840"/>
+            <a:ext cx="3304440" cy="852840"/>
           </a:xfrm>
           <a:prstGeom prst="rect">
             <a:avLst/>
@@ -8891,14 +8780,14 @@
       </p:grpSpPr>
       <p:sp>
         <p:nvSpPr>
-          <p:cNvPr id="175" name="TextBox 6"/>
+          <p:cNvPr id="186" name="TextBox 6"/>
           <p:cNvSpPr/>
           <p:nvPr/>
         </p:nvSpPr>
         <p:spPr>
           <a:xfrm>
             <a:off x="1028880" y="1019160"/>
-            <a:ext cx="14286240" cy="1371240"/>
+            <a:ext cx="14285880" cy="1371240"/>
           </a:xfrm>
           <a:prstGeom prst="rect">
             <a:avLst/>
@@ -8955,14 +8844,14 @@
       </p:sp>
       <p:sp>
         <p:nvSpPr>
-          <p:cNvPr id="176" name="TextBox 7"/>
+          <p:cNvPr id="187" name="TextBox 7"/>
           <p:cNvSpPr/>
           <p:nvPr/>
         </p:nvSpPr>
         <p:spPr>
           <a:xfrm>
             <a:off x="1028880" y="4005360"/>
-            <a:ext cx="3869280" cy="487440"/>
+            <a:ext cx="3868920" cy="487440"/>
           </a:xfrm>
           <a:prstGeom prst="rect">
             <a:avLst/>
@@ -9012,14 +8901,14 @@
       </p:sp>
       <p:sp>
         <p:nvSpPr>
-          <p:cNvPr id="177" name="TextBox 8"/>
+          <p:cNvPr id="188" name="TextBox 8"/>
           <p:cNvSpPr/>
           <p:nvPr/>
         </p:nvSpPr>
         <p:spPr>
           <a:xfrm>
             <a:off x="5283720" y="4005360"/>
-            <a:ext cx="4031280" cy="487440"/>
+            <a:ext cx="4030920" cy="487440"/>
           </a:xfrm>
           <a:prstGeom prst="rect">
             <a:avLst/>
@@ -9069,14 +8958,14 @@
       </p:sp>
       <p:sp>
         <p:nvSpPr>
-          <p:cNvPr id="178" name="TextBox 9"/>
+          <p:cNvPr id="189" name="TextBox 9"/>
           <p:cNvSpPr/>
           <p:nvPr/>
         </p:nvSpPr>
         <p:spPr>
           <a:xfrm>
             <a:off x="1028880" y="6998400"/>
-            <a:ext cx="3869280" cy="487440"/>
+            <a:ext cx="3868920" cy="487440"/>
           </a:xfrm>
           <a:prstGeom prst="rect">
             <a:avLst/>
@@ -9126,14 +9015,14 @@
       </p:sp>
       <p:sp>
         <p:nvSpPr>
-          <p:cNvPr id="179" name="TextBox 10"/>
+          <p:cNvPr id="190" name="TextBox 10"/>
           <p:cNvSpPr/>
           <p:nvPr/>
         </p:nvSpPr>
         <p:spPr>
           <a:xfrm>
             <a:off x="5283720" y="6998400"/>
-            <a:ext cx="4031280" cy="487440"/>
+            <a:ext cx="4030920" cy="487440"/>
           </a:xfrm>
           <a:prstGeom prst="rect">
             <a:avLst/>
@@ -9183,14 +9072,14 @@
       </p:sp>
       <p:sp>
         <p:nvSpPr>
-          <p:cNvPr id="180" name="TextBox 11"/>
+          <p:cNvPr id="191" name="TextBox 11"/>
           <p:cNvSpPr/>
           <p:nvPr/>
         </p:nvSpPr>
         <p:spPr>
           <a:xfrm>
             <a:off x="1028880" y="4686840"/>
-            <a:ext cx="3869280" cy="852840"/>
+            <a:ext cx="3868920" cy="852840"/>
           </a:xfrm>
           <a:prstGeom prst="rect">
             <a:avLst/>
@@ -9240,14 +9129,14 @@
       </p:sp>
       <p:sp>
         <p:nvSpPr>
-          <p:cNvPr id="181" name="TextBox 12"/>
+          <p:cNvPr id="192" name="TextBox 12"/>
           <p:cNvSpPr/>
           <p:nvPr/>
         </p:nvSpPr>
         <p:spPr>
           <a:xfrm>
             <a:off x="5283720" y="4686840"/>
-            <a:ext cx="3869280" cy="852840"/>
+            <a:ext cx="3868920" cy="852840"/>
           </a:xfrm>
           <a:prstGeom prst="rect">
             <a:avLst/>
@@ -9297,14 +9186,14 @@
       </p:sp>
       <p:sp>
         <p:nvSpPr>
-          <p:cNvPr id="182" name="TextBox 13"/>
+          <p:cNvPr id="193" name="TextBox 13"/>
           <p:cNvSpPr/>
           <p:nvPr/>
         </p:nvSpPr>
         <p:spPr>
           <a:xfrm>
             <a:off x="1028880" y="7679880"/>
-            <a:ext cx="3978720" cy="852840"/>
+            <a:ext cx="3978360" cy="852840"/>
           </a:xfrm>
           <a:prstGeom prst="rect">
             <a:avLst/>
@@ -9354,14 +9243,14 @@
       </p:sp>
       <p:sp>
         <p:nvSpPr>
-          <p:cNvPr id="183" name="TextBox 14"/>
+          <p:cNvPr id="194" name="TextBox 14"/>
           <p:cNvSpPr/>
           <p:nvPr/>
         </p:nvSpPr>
         <p:spPr>
           <a:xfrm>
             <a:off x="5283720" y="7679880"/>
-            <a:ext cx="3978720" cy="852840"/>
+            <a:ext cx="3978360" cy="852840"/>
           </a:xfrm>
           <a:prstGeom prst="rect">
             <a:avLst/>
@@ -9455,7 +9344,7 @@
         <p:spPr>
           <a:xfrm>
             <a:off x="890280" y="1028880"/>
-            <a:ext cx="16506000" cy="1340640"/>
+            <a:ext cx="16505640" cy="1340640"/>
           </a:xfrm>
           <a:prstGeom prst="rect">
             <a:avLst/>
@@ -9522,7 +9411,7 @@
         <p:spPr>
           <a:xfrm>
             <a:off x="7848720" y="7772400"/>
-            <a:ext cx="3685320" cy="426600"/>
+            <a:ext cx="3684960" cy="426240"/>
           </a:xfrm>
           <a:prstGeom prst="rect">
             <a:avLst/>
@@ -9579,7 +9468,7 @@
         <p:spPr>
           <a:xfrm>
             <a:off x="7848720" y="6591240"/>
-            <a:ext cx="3685320" cy="975240"/>
+            <a:ext cx="3684960" cy="975240"/>
           </a:xfrm>
           <a:prstGeom prst="rect">
             <a:avLst/>
@@ -9649,15 +9538,15 @@
         <p:spPr>
           <a:xfrm>
             <a:off x="8336520" y="3328560"/>
-            <a:ext cx="2320920" cy="2710080"/>
+            <a:ext cx="2320560" cy="2709720"/>
           </a:xfrm>
           <a:custGeom>
             <a:avLst/>
             <a:gdLst>
-              <a:gd name="textAreaLeft" fmla="*/ 0 w 2320920"/>
-              <a:gd name="textAreaRight" fmla="*/ 2322360 w 2320920"/>
-              <a:gd name="textAreaTop" fmla="*/ 0 h 2710080"/>
-              <a:gd name="textAreaBottom" fmla="*/ 2711520 h 2710080"/>
+              <a:gd name="textAreaLeft" fmla="*/ 0 w 2320560"/>
+              <a:gd name="textAreaRight" fmla="*/ 2322360 w 2320560"/>
+              <a:gd name="textAreaTop" fmla="*/ 0 h 2709720"/>
+              <a:gd name="textAreaBottom" fmla="*/ 2711520 h 2709720"/>
             </a:gdLst>
             <a:ahLst/>
             <a:rect l="textAreaLeft" t="textAreaTop" r="textAreaRight" b="textAreaBottom"/>
@@ -9731,7 +9620,7 @@
         <p:spPr>
           <a:xfrm>
             <a:off x="12313800" y="6606000"/>
-            <a:ext cx="3792960" cy="975240"/>
+            <a:ext cx="3792600" cy="975240"/>
           </a:xfrm>
           <a:prstGeom prst="rect">
             <a:avLst/>
@@ -9814,7 +9703,7 @@
         <p:spPr>
           <a:xfrm>
             <a:off x="12496680" y="7772400"/>
-            <a:ext cx="3304800" cy="852840"/>
+            <a:ext cx="3304440" cy="852840"/>
           </a:xfrm>
           <a:prstGeom prst="rect">
             <a:avLst/>
@@ -9871,15 +9760,15 @@
         <p:spPr>
           <a:xfrm>
             <a:off x="12557880" y="3328560"/>
-            <a:ext cx="2760480" cy="2710080"/>
+            <a:ext cx="2760120" cy="2709720"/>
           </a:xfrm>
           <a:custGeom>
             <a:avLst/>
             <a:gdLst>
-              <a:gd name="textAreaLeft" fmla="*/ 0 w 2760480"/>
-              <a:gd name="textAreaRight" fmla="*/ 2761920 w 2760480"/>
-              <a:gd name="textAreaTop" fmla="*/ 0 h 2710080"/>
-              <a:gd name="textAreaBottom" fmla="*/ 2711520 h 2710080"/>
+              <a:gd name="textAreaLeft" fmla="*/ 0 w 2760120"/>
+              <a:gd name="textAreaRight" fmla="*/ 2761920 w 2760120"/>
+              <a:gd name="textAreaTop" fmla="*/ 0 h 2709720"/>
+              <a:gd name="textAreaBottom" fmla="*/ 2711520 h 2709720"/>
             </a:gdLst>
             <a:ahLst/>
             <a:rect l="textAreaLeft" t="textAreaTop" r="textAreaRight" b="textAreaBottom"/>
@@ -9953,15 +9842,15 @@
         <p:spPr>
           <a:xfrm>
             <a:off x="2902680" y="3444120"/>
-            <a:ext cx="2916720" cy="2916720"/>
+            <a:ext cx="2916360" cy="2916360"/>
           </a:xfrm>
           <a:custGeom>
             <a:avLst/>
             <a:gdLst>
-              <a:gd name="textAreaLeft" fmla="*/ 0 w 2916720"/>
-              <a:gd name="textAreaRight" fmla="*/ 2918160 w 2916720"/>
-              <a:gd name="textAreaTop" fmla="*/ 0 h 2916720"/>
-              <a:gd name="textAreaBottom" fmla="*/ 2918160 h 2916720"/>
+              <a:gd name="textAreaLeft" fmla="*/ 0 w 2916360"/>
+              <a:gd name="textAreaRight" fmla="*/ 2918160 w 2916360"/>
+              <a:gd name="textAreaTop" fmla="*/ 0 h 2916360"/>
+              <a:gd name="textAreaBottom" fmla="*/ 2918160 h 2916360"/>
             </a:gdLst>
             <a:ahLst/>
             <a:rect l="textAreaLeft" t="textAreaTop" r="textAreaRight" b="textAreaBottom"/>
@@ -10035,7 +9924,7 @@
         <p:spPr>
           <a:xfrm>
             <a:off x="1988280" y="6629400"/>
-            <a:ext cx="4869360" cy="975600"/>
+            <a:ext cx="4869000" cy="975240"/>
           </a:xfrm>
           <a:prstGeom prst="rect">
             <a:avLst/>
@@ -10092,7 +9981,7 @@
         <p:spPr>
           <a:xfrm>
             <a:off x="2743200" y="7772400"/>
-            <a:ext cx="3304800" cy="853200"/>
+            <a:ext cx="3304440" cy="852840"/>
           </a:xfrm>
           <a:prstGeom prst="rect">
             <a:avLst/>
@@ -10186,15 +10075,15 @@
         <p:spPr>
           <a:xfrm>
             <a:off x="12801600" y="6515280"/>
-            <a:ext cx="1141560" cy="1141560"/>
+            <a:ext cx="1141200" cy="1141200"/>
           </a:xfrm>
           <a:custGeom>
             <a:avLst/>
             <a:gdLst>
-              <a:gd name="textAreaLeft" fmla="*/ 0 w 1141560"/>
-              <a:gd name="textAreaRight" fmla="*/ 1143000 w 1141560"/>
-              <a:gd name="textAreaTop" fmla="*/ 0 h 1141560"/>
-              <a:gd name="textAreaBottom" fmla="*/ 1143000 h 1141560"/>
+              <a:gd name="textAreaLeft" fmla="*/ 0 w 1141200"/>
+              <a:gd name="textAreaRight" fmla="*/ 1143000 w 1141200"/>
+              <a:gd name="textAreaTop" fmla="*/ 0 h 1141200"/>
+              <a:gd name="textAreaBottom" fmla="*/ 1143000 h 1141200"/>
             </a:gdLst>
             <a:ahLst/>
             <a:rect l="textAreaLeft" t="textAreaTop" r="textAreaRight" b="textAreaBottom"/>
@@ -10268,15 +10157,15 @@
         <p:spPr>
           <a:xfrm>
             <a:off x="12801600" y="4305240"/>
-            <a:ext cx="1141560" cy="1141560"/>
+            <a:ext cx="1141200" cy="1141200"/>
           </a:xfrm>
           <a:custGeom>
             <a:avLst/>
             <a:gdLst>
-              <a:gd name="textAreaLeft" fmla="*/ 0 w 1141560"/>
-              <a:gd name="textAreaRight" fmla="*/ 1143000 w 1141560"/>
-              <a:gd name="textAreaTop" fmla="*/ 0 h 1141560"/>
-              <a:gd name="textAreaBottom" fmla="*/ 1143000 h 1141560"/>
+              <a:gd name="textAreaLeft" fmla="*/ 0 w 1141200"/>
+              <a:gd name="textAreaRight" fmla="*/ 1143000 w 1141200"/>
+              <a:gd name="textAreaTop" fmla="*/ 0 h 1141200"/>
+              <a:gd name="textAreaBottom" fmla="*/ 1143000 h 1141200"/>
             </a:gdLst>
             <a:ahLst/>
             <a:rect l="textAreaLeft" t="textAreaTop" r="textAreaRight" b="textAreaBottom"/>
@@ -10350,9 +10239,9 @@
         <p:grpSpPr>
           <a:xfrm>
             <a:off x="12649320" y="4610160"/>
-            <a:ext cx="1217880" cy="3351240"/>
+            <a:ext cx="1217520" cy="3350880"/>
             <a:chOff x="12649320" y="4610160"/>
-            <a:chExt cx="1217880" cy="3351240"/>
+            <a:chExt cx="1217520" cy="3350880"/>
           </a:xfrm>
         </p:grpSpPr>
         <p:sp>
@@ -10364,7 +10253,7 @@
           <p:spPr>
             <a:xfrm>
               <a:off x="12649320" y="6819840"/>
-              <a:ext cx="1217880" cy="1141560"/>
+              <a:ext cx="1217520" cy="1141200"/>
             </a:xfrm>
             <a:prstGeom prst="irregularSeal1">
               <a:avLst/>
@@ -10421,7 +10310,7 @@
           <p:spPr>
             <a:xfrm>
               <a:off x="12649320" y="4610160"/>
-              <a:ext cx="1217880" cy="1141560"/>
+              <a:ext cx="1217520" cy="1141200"/>
             </a:xfrm>
             <a:prstGeom prst="irregularSeal1">
               <a:avLst/>
@@ -10479,7 +10368,7 @@
         <p:spPr>
           <a:xfrm>
             <a:off x="887040" y="731520"/>
-            <a:ext cx="16506000" cy="1340640"/>
+            <a:ext cx="16505640" cy="1340640"/>
           </a:xfrm>
           <a:prstGeom prst="rect">
             <a:avLst/>
@@ -10546,15 +10435,15 @@
         <p:spPr>
           <a:xfrm>
             <a:off x="10515600" y="5295960"/>
-            <a:ext cx="1141560" cy="1141560"/>
+            <a:ext cx="1141200" cy="1141200"/>
           </a:xfrm>
           <a:custGeom>
             <a:avLst/>
             <a:gdLst>
-              <a:gd name="textAreaLeft" fmla="*/ 0 w 1141560"/>
-              <a:gd name="textAreaRight" fmla="*/ 1143000 w 1141560"/>
-              <a:gd name="textAreaTop" fmla="*/ 0 h 1141560"/>
-              <a:gd name="textAreaBottom" fmla="*/ 1143000 h 1141560"/>
+              <a:gd name="textAreaLeft" fmla="*/ 0 w 1141200"/>
+              <a:gd name="textAreaRight" fmla="*/ 1143000 w 1141200"/>
+              <a:gd name="textAreaTop" fmla="*/ 0 h 1141200"/>
+              <a:gd name="textAreaBottom" fmla="*/ 1143000 h 1141200"/>
             </a:gdLst>
             <a:ahLst/>
             <a:rect l="textAreaLeft" t="textAreaTop" r="textAreaRight" b="textAreaBottom"/>
@@ -10628,7 +10517,7 @@
         <p:spPr>
           <a:xfrm>
             <a:off x="1143000" y="3543480"/>
-            <a:ext cx="3869280" cy="487440"/>
+            <a:ext cx="3868920" cy="487440"/>
           </a:xfrm>
           <a:prstGeom prst="rect">
             <a:avLst/>
@@ -10685,7 +10574,7 @@
         <p:spPr>
           <a:xfrm>
             <a:off x="1143000" y="4305240"/>
-            <a:ext cx="5865840" cy="1279440"/>
+            <a:ext cx="5865480" cy="1279440"/>
           </a:xfrm>
           <a:prstGeom prst="rect">
             <a:avLst/>
@@ -10742,7 +10631,7 @@
         <p:spPr>
           <a:xfrm>
             <a:off x="1143000" y="6743880"/>
-            <a:ext cx="3869280" cy="487440"/>
+            <a:ext cx="3868920" cy="487440"/>
           </a:xfrm>
           <a:prstGeom prst="rect">
             <a:avLst/>
@@ -10799,7 +10688,7 @@
         <p:spPr>
           <a:xfrm>
             <a:off x="1143000" y="7505640"/>
-            <a:ext cx="6094440" cy="852840"/>
+            <a:ext cx="6094080" cy="852840"/>
           </a:xfrm>
           <a:prstGeom prst="rect">
             <a:avLst/>
@@ -10856,7 +10745,7 @@
         <p:spPr>
           <a:xfrm>
             <a:off x="10363320" y="5600880"/>
-            <a:ext cx="1217880" cy="1141560"/>
+            <a:ext cx="1217520" cy="1141200"/>
           </a:xfrm>
           <a:prstGeom prst="irregularSeal1">
             <a:avLst/>
@@ -10913,15 +10802,15 @@
         <p:spPr>
           <a:xfrm>
             <a:off x="7924680" y="5295960"/>
-            <a:ext cx="1141560" cy="1141560"/>
+            <a:ext cx="1141200" cy="1141200"/>
           </a:xfrm>
           <a:custGeom>
             <a:avLst/>
             <a:gdLst>
-              <a:gd name="textAreaLeft" fmla="*/ 0 w 1141560"/>
-              <a:gd name="textAreaRight" fmla="*/ 1143000 w 1141560"/>
-              <a:gd name="textAreaTop" fmla="*/ 0 h 1141560"/>
-              <a:gd name="textAreaBottom" fmla="*/ 1143000 h 1141560"/>
+              <a:gd name="textAreaLeft" fmla="*/ 0 w 1141200"/>
+              <a:gd name="textAreaRight" fmla="*/ 1143000 w 1141200"/>
+              <a:gd name="textAreaTop" fmla="*/ 0 h 1141200"/>
+              <a:gd name="textAreaBottom" fmla="*/ 1143000 h 1141200"/>
             </a:gdLst>
             <a:ahLst/>
             <a:rect l="textAreaLeft" t="textAreaTop" r="textAreaRight" b="textAreaBottom"/>
@@ -10995,7 +10884,7 @@
         <p:spPr>
           <a:xfrm>
             <a:off x="9220320" y="5524560"/>
-            <a:ext cx="1065240" cy="684360"/>
+            <a:ext cx="1064880" cy="684000"/>
           </a:xfrm>
           <a:prstGeom prst="rightArrow">
             <a:avLst>
@@ -11055,15 +10944,15 @@
         <p:spPr>
           <a:xfrm>
             <a:off x="15468480" y="4610160"/>
-            <a:ext cx="1141560" cy="1141560"/>
+            <a:ext cx="1141200" cy="1141200"/>
           </a:xfrm>
           <a:custGeom>
             <a:avLst/>
             <a:gdLst>
-              <a:gd name="textAreaLeft" fmla="*/ 0 w 1141560"/>
-              <a:gd name="textAreaRight" fmla="*/ 1143000 w 1141560"/>
-              <a:gd name="textAreaTop" fmla="*/ 0 h 1141560"/>
-              <a:gd name="textAreaBottom" fmla="*/ 1143000 h 1141560"/>
+              <a:gd name="textAreaLeft" fmla="*/ 0 w 1141200"/>
+              <a:gd name="textAreaRight" fmla="*/ 1143000 w 1141200"/>
+              <a:gd name="textAreaTop" fmla="*/ 0 h 1141200"/>
+              <a:gd name="textAreaBottom" fmla="*/ 1143000 h 1141200"/>
             </a:gdLst>
             <a:ahLst/>
             <a:rect l="textAreaLeft" t="textAreaTop" r="textAreaRight" b="textAreaBottom"/>
@@ -11137,15 +11026,15 @@
         <p:spPr>
           <a:xfrm>
             <a:off x="15468480" y="2933640"/>
-            <a:ext cx="1141560" cy="1141560"/>
+            <a:ext cx="1141200" cy="1141200"/>
           </a:xfrm>
           <a:custGeom>
             <a:avLst/>
             <a:gdLst>
-              <a:gd name="textAreaLeft" fmla="*/ 0 w 1141560"/>
-              <a:gd name="textAreaRight" fmla="*/ 1143000 w 1141560"/>
-              <a:gd name="textAreaTop" fmla="*/ 0 h 1141560"/>
-              <a:gd name="textAreaBottom" fmla="*/ 1143000 h 1141560"/>
+              <a:gd name="textAreaLeft" fmla="*/ 0 w 1141200"/>
+              <a:gd name="textAreaRight" fmla="*/ 1143000 w 1141200"/>
+              <a:gd name="textAreaTop" fmla="*/ 0 h 1141200"/>
+              <a:gd name="textAreaBottom" fmla="*/ 1143000 h 1141200"/>
             </a:gdLst>
             <a:ahLst/>
             <a:rect l="textAreaLeft" t="textAreaTop" r="textAreaRight" b="textAreaBottom"/>
@@ -11219,15 +11108,15 @@
         <p:spPr>
           <a:xfrm>
             <a:off x="15468480" y="8039160"/>
-            <a:ext cx="1141560" cy="1141560"/>
+            <a:ext cx="1141200" cy="1141200"/>
           </a:xfrm>
           <a:custGeom>
             <a:avLst/>
             <a:gdLst>
-              <a:gd name="textAreaLeft" fmla="*/ 0 w 1141560"/>
-              <a:gd name="textAreaRight" fmla="*/ 1143000 w 1141560"/>
-              <a:gd name="textAreaTop" fmla="*/ 0 h 1141560"/>
-              <a:gd name="textAreaBottom" fmla="*/ 1143000 h 1141560"/>
+              <a:gd name="textAreaLeft" fmla="*/ 0 w 1141200"/>
+              <a:gd name="textAreaRight" fmla="*/ 1143000 w 1141200"/>
+              <a:gd name="textAreaTop" fmla="*/ 0 h 1141200"/>
+              <a:gd name="textAreaBottom" fmla="*/ 1143000 h 1141200"/>
             </a:gdLst>
             <a:ahLst/>
             <a:rect l="textAreaLeft" t="textAreaTop" r="textAreaRight" b="textAreaBottom"/>
@@ -11301,15 +11190,15 @@
         <p:spPr>
           <a:xfrm>
             <a:off x="15468480" y="6362640"/>
-            <a:ext cx="1141560" cy="1141560"/>
+            <a:ext cx="1141200" cy="1141200"/>
           </a:xfrm>
           <a:custGeom>
             <a:avLst/>
             <a:gdLst>
-              <a:gd name="textAreaLeft" fmla="*/ 0 w 1141560"/>
-              <a:gd name="textAreaRight" fmla="*/ 1143000 w 1141560"/>
-              <a:gd name="textAreaTop" fmla="*/ 0 h 1141560"/>
-              <a:gd name="textAreaBottom" fmla="*/ 1143000 h 1141560"/>
+              <a:gd name="textAreaLeft" fmla="*/ 0 w 1141200"/>
+              <a:gd name="textAreaRight" fmla="*/ 1143000 w 1141200"/>
+              <a:gd name="textAreaTop" fmla="*/ 0 h 1141200"/>
+              <a:gd name="textAreaBottom" fmla="*/ 1143000 h 1141200"/>
             </a:gdLst>
             <a:ahLst/>
             <a:rect l="textAreaLeft" t="textAreaTop" r="textAreaRight" b="textAreaBottom"/>
@@ -11383,9 +11272,9 @@
         <p:grpSpPr>
           <a:xfrm>
             <a:off x="15316200" y="3238560"/>
-            <a:ext cx="1217880" cy="6247080"/>
+            <a:ext cx="1217520" cy="6246720"/>
             <a:chOff x="15316200" y="3238560"/>
-            <a:chExt cx="1217880" cy="6247080"/>
+            <a:chExt cx="1217520" cy="6246720"/>
           </a:xfrm>
         </p:grpSpPr>
         <p:sp>
@@ -11397,7 +11286,7 @@
           <p:spPr>
             <a:xfrm>
               <a:off x="15316200" y="4915080"/>
-              <a:ext cx="1217880" cy="1141560"/>
+              <a:ext cx="1217520" cy="1141200"/>
             </a:xfrm>
             <a:prstGeom prst="irregularSeal1">
               <a:avLst/>
@@ -11454,7 +11343,7 @@
           <p:spPr>
             <a:xfrm>
               <a:off x="15316200" y="3238560"/>
-              <a:ext cx="1217880" cy="1141560"/>
+              <a:ext cx="1217520" cy="1141200"/>
             </a:xfrm>
             <a:prstGeom prst="irregularSeal1">
               <a:avLst/>
@@ -11511,7 +11400,7 @@
           <p:spPr>
             <a:xfrm>
               <a:off x="15316200" y="8344080"/>
-              <a:ext cx="1217880" cy="1141560"/>
+              <a:ext cx="1217520" cy="1141200"/>
             </a:xfrm>
             <a:prstGeom prst="irregularSeal1">
               <a:avLst/>
@@ -11568,7 +11457,7 @@
           <p:spPr>
             <a:xfrm>
               <a:off x="15316200" y="6667560"/>
-              <a:ext cx="1217880" cy="1141560"/>
+              <a:ext cx="1217520" cy="1141200"/>
             </a:xfrm>
             <a:prstGeom prst="irregularSeal1">
               <a:avLst/>
@@ -11626,9 +11515,9 @@
         <p:grpSpPr>
           <a:xfrm>
             <a:off x="14095440" y="3695760"/>
-            <a:ext cx="1035360" cy="4875480"/>
+            <a:ext cx="1034640" cy="4874760"/>
             <a:chOff x="14095440" y="3695760"/>
-            <a:chExt cx="1035360" cy="4875480"/>
+            <a:chExt cx="1034640" cy="4874760"/>
           </a:xfrm>
         </p:grpSpPr>
         <p:sp>
@@ -11639,8 +11528,8 @@
           </p:nvSpPr>
           <p:spPr>
             <a:xfrm rot="20311800">
-              <a:off x="14271120" y="3810960"/>
-              <a:ext cx="760680" cy="684360"/>
+              <a:off x="14270760" y="3810960"/>
+              <a:ext cx="760320" cy="684000"/>
             </a:xfrm>
             <a:prstGeom prst="rightArrow">
               <a:avLst>
@@ -11700,7 +11589,7 @@
           <p:spPr>
             <a:xfrm flipV="1" rot="1288200">
               <a:off x="14194080" y="7771320"/>
-              <a:ext cx="760680" cy="684000"/>
+              <a:ext cx="760320" cy="683640"/>
             </a:xfrm>
             <a:prstGeom prst="rightArrow">
               <a:avLst>
@@ -11760,7 +11649,7 @@
           <p:spPr>
             <a:xfrm flipV="1">
               <a:off x="14249520" y="6894720"/>
-              <a:ext cx="760680" cy="684360"/>
+              <a:ext cx="760320" cy="684000"/>
             </a:xfrm>
             <a:prstGeom prst="rightArrow">
               <a:avLst>
@@ -11820,7 +11709,7 @@
           <p:spPr>
             <a:xfrm flipV="1">
               <a:off x="14325480" y="4837320"/>
-              <a:ext cx="760680" cy="684360"/>
+              <a:ext cx="760320" cy="684000"/>
             </a:xfrm>
             <a:prstGeom prst="rightArrow">
               <a:avLst>
@@ -11881,9 +11770,9 @@
         <p:grpSpPr>
           <a:xfrm>
             <a:off x="11733480" y="4991040"/>
-            <a:ext cx="959040" cy="1980000"/>
+            <a:ext cx="958320" cy="1979280"/>
             <a:chOff x="11733480" y="4991040"/>
-            <a:chExt cx="959040" cy="1980000"/>
+            <a:chExt cx="958320" cy="1979280"/>
           </a:xfrm>
         </p:grpSpPr>
         <p:sp>
@@ -11894,8 +11783,8 @@
           </p:nvSpPr>
           <p:spPr>
             <a:xfrm rot="20311800">
-              <a:off x="11832840" y="5106240"/>
-              <a:ext cx="760680" cy="684360"/>
+              <a:off x="11832480" y="5106240"/>
+              <a:ext cx="760320" cy="684000"/>
             </a:xfrm>
             <a:prstGeom prst="rightArrow">
               <a:avLst>
@@ -11955,7 +11844,7 @@
           <p:spPr>
             <a:xfrm flipV="1" rot="1288200">
               <a:off x="11832120" y="6171120"/>
-              <a:ext cx="760680" cy="684000"/>
+              <a:ext cx="760320" cy="683640"/>
             </a:xfrm>
             <a:prstGeom prst="rightArrow">
               <a:avLst>
@@ -12308,7 +12197,7 @@
         <p:spPr>
           <a:xfrm>
             <a:off x="887040" y="731520"/>
-            <a:ext cx="14286240" cy="1371240"/>
+            <a:ext cx="14285880" cy="1371240"/>
           </a:xfrm>
           <a:prstGeom prst="rect">
             <a:avLst/>
@@ -12376,7 +12265,7 @@
         <p:spPr>
           <a:xfrm>
             <a:off x="1265760" y="2057400"/>
-            <a:ext cx="15649920" cy="7771680"/>
+            <a:ext cx="15649560" cy="7771320"/>
           </a:xfrm>
           <a:prstGeom prst="rect">
             <a:avLst/>
@@ -12395,7 +12284,7 @@
         <p:spPr>
           <a:xfrm>
             <a:off x="9944280" y="2514600"/>
-            <a:ext cx="5828400" cy="487440"/>
+            <a:ext cx="5828040" cy="487440"/>
           </a:xfrm>
           <a:prstGeom prst="rect">
             <a:avLst/>
@@ -12443,6 +12332,63 @@
             <a:endParaRPr b="0" lang="en-US" sz="3200" spc="-1" strike="noStrike">
               <a:solidFill>
                 <a:srgbClr val="ffffff"/>
+              </a:solidFill>
+              <a:latin typeface="Arial"/>
+            </a:endParaRPr>
+          </a:p>
+        </p:txBody>
+      </p:sp>
+      <p:sp>
+        <p:nvSpPr>
+          <p:cNvPr id="102" name=""/>
+          <p:cNvSpPr/>
+          <p:nvPr/>
+        </p:nvSpPr>
+        <p:spPr>
+          <a:xfrm>
+            <a:off x="6629400" y="3886200"/>
+            <a:ext cx="4572000" cy="2286000"/>
+          </a:xfrm>
+          <a:prstGeom prst="wedgeRoundRectCallout">
+            <a:avLst>
+              <a:gd name="adj1" fmla="val -30324"/>
+              <a:gd name="adj2" fmla="val 158333"/>
+              <a:gd name="adj3" fmla="val 16667"/>
+            </a:avLst>
+          </a:prstGeom>
+          <a:solidFill>
+            <a:srgbClr val="729fcf"/>
+          </a:solidFill>
+          <a:ln w="0">
+            <a:solidFill>
+              <a:srgbClr val="3465a4"/>
+            </a:solidFill>
+          </a:ln>
+        </p:spPr>
+        <p:style>
+          <a:lnRef idx="0"/>
+          <a:fillRef idx="0"/>
+          <a:effectRef idx="0"/>
+          <a:fontRef idx="minor"/>
+        </p:style>
+        <p:txBody>
+          <a:bodyPr lIns="90000" rIns="90000" tIns="45000" bIns="45000" anchor="ctr">
+            <a:noAutofit/>
+          </a:bodyPr>
+          <a:p>
+            <a:pPr algn="ctr"/>
+            <a:r>
+              <a:rPr b="0" lang="en-US" sz="1800" spc="-1" strike="noStrike">
+                <a:solidFill>
+                  <a:srgbClr val="000000"/>
+                </a:solidFill>
+                <a:latin typeface="Arial"/>
+              </a:rPr>
+              <a:t>Up to date graph needed</a:t>
+            </a:r>
+            <a:endParaRPr b="0" lang="en-US" sz="1800" spc="-1" strike="noStrike">
+              <a:solidFill>
+                <a:srgbClr val="000000"/>
               </a:solidFill>
               <a:latin typeface="Arial"/>
             </a:endParaRPr>
@@ -12488,7 +12434,7 @@
       </p:grpSpPr>
       <p:pic>
         <p:nvPicPr>
-          <p:cNvPr id="102" name="Picture 101" descr=""/>
+          <p:cNvPr id="103" name="Picture 101" descr=""/>
           <p:cNvPicPr/>
           <p:nvPr/>
         </p:nvPicPr>
@@ -12499,7 +12445,7 @@
         <p:spPr>
           <a:xfrm>
             <a:off x="432000" y="2300400"/>
-            <a:ext cx="17159400" cy="7540920"/>
+            <a:ext cx="17159040" cy="7540560"/>
           </a:xfrm>
           <a:prstGeom prst="rect">
             <a:avLst/>
@@ -12511,14 +12457,14 @@
       </p:pic>
       <p:sp>
         <p:nvSpPr>
-          <p:cNvPr id="103" name="TextBox 22"/>
+          <p:cNvPr id="104" name="TextBox 22"/>
           <p:cNvSpPr/>
           <p:nvPr/>
         </p:nvSpPr>
         <p:spPr>
           <a:xfrm>
             <a:off x="887040" y="731520"/>
-            <a:ext cx="14286240" cy="1371240"/>
+            <a:ext cx="14285880" cy="1371240"/>
           </a:xfrm>
           <a:prstGeom prst="rect">
             <a:avLst/>
@@ -12575,14 +12521,14 @@
       </p:sp>
       <p:sp>
         <p:nvSpPr>
-          <p:cNvPr id="104" name="TextBox 25"/>
+          <p:cNvPr id="105" name="TextBox 25"/>
           <p:cNvSpPr/>
           <p:nvPr/>
         </p:nvSpPr>
         <p:spPr>
           <a:xfrm>
             <a:off x="13471920" y="1051560"/>
-            <a:ext cx="4332600" cy="975240"/>
+            <a:ext cx="4332240" cy="975240"/>
           </a:xfrm>
           <a:prstGeom prst="rect">
             <a:avLst/>
@@ -12632,7 +12578,7 @@
       </p:sp>
       <p:pic>
         <p:nvPicPr>
-          <p:cNvPr id="105" name="Picture 104" descr=""/>
+          <p:cNvPr id="106" name="Picture 104" descr=""/>
           <p:cNvPicPr/>
           <p:nvPr/>
         </p:nvPicPr>
@@ -12643,7 +12589,7 @@
         <p:spPr>
           <a:xfrm>
             <a:off x="12032640" y="3332520"/>
-            <a:ext cx="6025680" cy="4667400"/>
+            <a:ext cx="6025320" cy="4667040"/>
           </a:xfrm>
           <a:prstGeom prst="rect">
             <a:avLst/>
@@ -12655,7 +12601,7 @@
       </p:pic>
       <p:pic>
         <p:nvPicPr>
-          <p:cNvPr id="106" name="Picture 105" descr=""/>
+          <p:cNvPr id="107" name="Picture 105" descr=""/>
           <p:cNvPicPr/>
           <p:nvPr/>
         </p:nvPicPr>
@@ -12666,7 +12612,7 @@
         <p:spPr>
           <a:xfrm>
             <a:off x="7086600" y="3441600"/>
-            <a:ext cx="4793760" cy="4570920"/>
+            <a:ext cx="4793400" cy="4570560"/>
           </a:xfrm>
           <a:prstGeom prst="rect">
             <a:avLst/>
@@ -12676,6 +12622,63 @@
           </a:ln>
         </p:spPr>
       </p:pic>
+      <p:sp>
+        <p:nvSpPr>
+          <p:cNvPr id="108" name=""/>
+          <p:cNvSpPr/>
+          <p:nvPr/>
+        </p:nvSpPr>
+        <p:spPr>
+          <a:xfrm>
+            <a:off x="6629760" y="5124960"/>
+            <a:ext cx="4572000" cy="2286000"/>
+          </a:xfrm>
+          <a:prstGeom prst="wedgeRoundRectCallout">
+            <a:avLst>
+              <a:gd name="adj1" fmla="val -30324"/>
+              <a:gd name="adj2" fmla="val 158333"/>
+              <a:gd name="adj3" fmla="val 16667"/>
+            </a:avLst>
+          </a:prstGeom>
+          <a:solidFill>
+            <a:srgbClr val="729fcf"/>
+          </a:solidFill>
+          <a:ln w="0">
+            <a:solidFill>
+              <a:srgbClr val="3465a4"/>
+            </a:solidFill>
+          </a:ln>
+        </p:spPr>
+        <p:style>
+          <a:lnRef idx="0"/>
+          <a:fillRef idx="0"/>
+          <a:effectRef idx="0"/>
+          <a:fontRef idx="minor"/>
+        </p:style>
+        <p:txBody>
+          <a:bodyPr lIns="90000" rIns="90000" tIns="45000" bIns="45000" anchor="ctr">
+            <a:noAutofit/>
+          </a:bodyPr>
+          <a:p>
+            <a:pPr algn="ctr"/>
+            <a:r>
+              <a:rPr b="0" lang="en-US" sz="1800" spc="-1" strike="noStrike">
+                <a:solidFill>
+                  <a:srgbClr val="000000"/>
+                </a:solidFill>
+                <a:latin typeface="Arial"/>
+              </a:rPr>
+              <a:t>Up to date graph needed</a:t>
+            </a:r>
+            <a:endParaRPr b="0" lang="en-US" sz="1800" spc="-1" strike="noStrike">
+              <a:solidFill>
+                <a:srgbClr val="000000"/>
+              </a:solidFill>
+              <a:latin typeface="Arial"/>
+            </a:endParaRPr>
+          </a:p>
+        </p:txBody>
+      </p:sp>
     </p:spTree>
   </p:cSld>
   <mc:AlternateContent>
@@ -12715,7 +12718,7 @@
       </p:grpSpPr>
       <p:pic>
         <p:nvPicPr>
-          <p:cNvPr id="107" name="Picture 106" descr=""/>
+          <p:cNvPr id="109" name="Picture 106" descr=""/>
           <p:cNvPicPr/>
           <p:nvPr/>
         </p:nvPicPr>
@@ -12726,7 +12729,7 @@
         <p:spPr>
           <a:xfrm>
             <a:off x="349200" y="2570400"/>
-            <a:ext cx="10843200" cy="7222320"/>
+            <a:ext cx="10842840" cy="7221960"/>
           </a:xfrm>
           <a:prstGeom prst="rect">
             <a:avLst/>
@@ -12738,14 +12741,14 @@
       </p:pic>
       <p:sp>
         <p:nvSpPr>
-          <p:cNvPr id="108" name="TextBox 32"/>
+          <p:cNvPr id="110" name="TextBox 32"/>
           <p:cNvSpPr/>
           <p:nvPr/>
         </p:nvSpPr>
         <p:spPr>
           <a:xfrm>
             <a:off x="13269240" y="1058400"/>
-            <a:ext cx="4332600" cy="975240"/>
+            <a:ext cx="4332240" cy="975240"/>
           </a:xfrm>
           <a:prstGeom prst="rect">
             <a:avLst/>
@@ -12821,14 +12824,14 @@
       </p:sp>
       <p:sp>
         <p:nvSpPr>
-          <p:cNvPr id="109" name="TextBox 21"/>
+          <p:cNvPr id="111" name="TextBox 21"/>
           <p:cNvSpPr/>
           <p:nvPr/>
         </p:nvSpPr>
         <p:spPr>
           <a:xfrm>
             <a:off x="887040" y="754560"/>
-            <a:ext cx="14286240" cy="1371240"/>
+            <a:ext cx="14285880" cy="1371240"/>
           </a:xfrm>
           <a:prstGeom prst="rect">
             <a:avLst/>
@@ -12885,7 +12888,7 @@
       </p:sp>
       <p:pic>
         <p:nvPicPr>
-          <p:cNvPr id="110" name="Picture 109" descr=""/>
+          <p:cNvPr id="112" name="Picture 109" descr=""/>
           <p:cNvPicPr/>
           <p:nvPr/>
         </p:nvPicPr>
@@ -12896,7 +12899,7 @@
         <p:spPr>
           <a:xfrm>
             <a:off x="11658600" y="2435400"/>
-            <a:ext cx="5943240" cy="7394040"/>
+            <a:ext cx="5942880" cy="7393680"/>
           </a:xfrm>
           <a:prstGeom prst="rect">
             <a:avLst/>
@@ -12908,7 +12911,7 @@
       </p:pic>
       <p:pic>
         <p:nvPicPr>
-          <p:cNvPr id="111" name="Picture 110" descr=""/>
+          <p:cNvPr id="113" name="Picture 110" descr=""/>
           <p:cNvPicPr/>
           <p:nvPr/>
         </p:nvPicPr>
@@ -12919,7 +12922,7 @@
         <p:spPr>
           <a:xfrm>
             <a:off x="4114800" y="3797640"/>
-            <a:ext cx="6629040" cy="4948560"/>
+            <a:ext cx="6628680" cy="4948200"/>
           </a:xfrm>
           <a:prstGeom prst="rect">
             <a:avLst/>
@@ -12931,7 +12934,7 @@
       </p:pic>
       <p:pic>
         <p:nvPicPr>
-          <p:cNvPr id="112" name="Picture 111" descr=""/>
+          <p:cNvPr id="114" name="Picture 111" descr=""/>
           <p:cNvPicPr/>
           <p:nvPr/>
         </p:nvPicPr>
@@ -12942,7 +12945,7 @@
         <p:spPr>
           <a:xfrm>
             <a:off x="13944600" y="4283640"/>
-            <a:ext cx="3885840" cy="3885840"/>
+            <a:ext cx="3885480" cy="3885480"/>
           </a:xfrm>
           <a:prstGeom prst="rect">
             <a:avLst/>
@@ -12952,6 +12955,63 @@
           </a:ln>
         </p:spPr>
       </p:pic>
+      <p:sp>
+        <p:nvSpPr>
+          <p:cNvPr id="115" name=""/>
+          <p:cNvSpPr/>
+          <p:nvPr/>
+        </p:nvSpPr>
+        <p:spPr>
+          <a:xfrm>
+            <a:off x="6629760" y="5124960"/>
+            <a:ext cx="4572000" cy="2286000"/>
+          </a:xfrm>
+          <a:prstGeom prst="wedgeRoundRectCallout">
+            <a:avLst>
+              <a:gd name="adj1" fmla="val -30324"/>
+              <a:gd name="adj2" fmla="val 158333"/>
+              <a:gd name="adj3" fmla="val 16667"/>
+            </a:avLst>
+          </a:prstGeom>
+          <a:solidFill>
+            <a:srgbClr val="729fcf"/>
+          </a:solidFill>
+          <a:ln w="0">
+            <a:solidFill>
+              <a:srgbClr val="3465a4"/>
+            </a:solidFill>
+          </a:ln>
+        </p:spPr>
+        <p:style>
+          <a:lnRef idx="0"/>
+          <a:fillRef idx="0"/>
+          <a:effectRef idx="0"/>
+          <a:fontRef idx="minor"/>
+        </p:style>
+        <p:txBody>
+          <a:bodyPr lIns="90000" rIns="90000" tIns="45000" bIns="45000" anchor="ctr">
+            <a:noAutofit/>
+          </a:bodyPr>
+          <a:p>
+            <a:pPr algn="ctr"/>
+            <a:r>
+              <a:rPr b="0" lang="en-US" sz="1800" spc="-1" strike="noStrike">
+                <a:solidFill>
+                  <a:srgbClr val="000000"/>
+                </a:solidFill>
+                <a:latin typeface="Arial"/>
+              </a:rPr>
+              <a:t>Up to date graph needed</a:t>
+            </a:r>
+            <a:endParaRPr b="0" lang="en-US" sz="1800" spc="-1" strike="noStrike">
+              <a:solidFill>
+                <a:srgbClr val="000000"/>
+              </a:solidFill>
+              <a:latin typeface="Arial"/>
+            </a:endParaRPr>
+          </a:p>
+        </p:txBody>
+      </p:sp>
     </p:spTree>
   </p:cSld>
   <mc:AlternateContent>
@@ -12991,14 +13051,14 @@
       </p:grpSpPr>
       <p:sp>
         <p:nvSpPr>
-          <p:cNvPr id="113" name="TextBox 23"/>
+          <p:cNvPr id="116" name="TextBox 23"/>
           <p:cNvSpPr/>
           <p:nvPr/>
         </p:nvSpPr>
         <p:spPr>
           <a:xfrm>
             <a:off x="887040" y="731520"/>
-            <a:ext cx="14286240" cy="1371960"/>
+            <a:ext cx="14285880" cy="1371600"/>
           </a:xfrm>
           <a:prstGeom prst="rect">
             <a:avLst/>
@@ -13055,14 +13115,14 @@
       </p:sp>
       <p:sp>
         <p:nvSpPr>
-          <p:cNvPr id="114" name="TextBox 26"/>
+          <p:cNvPr id="117" name="TextBox 26"/>
           <p:cNvSpPr/>
           <p:nvPr/>
         </p:nvSpPr>
         <p:spPr>
           <a:xfrm>
             <a:off x="14401800" y="2712240"/>
-            <a:ext cx="1371600" cy="488160"/>
+            <a:ext cx="1371240" cy="487800"/>
           </a:xfrm>
           <a:prstGeom prst="rect">
             <a:avLst/>
@@ -13102,7 +13162,7 @@
       </p:sp>
       <p:pic>
         <p:nvPicPr>
-          <p:cNvPr id="115" name="" descr=""/>
+          <p:cNvPr id="118" name="" descr=""/>
           <p:cNvPicPr/>
           <p:nvPr/>
         </p:nvPicPr>
@@ -13113,7 +13173,7 @@
         <p:spPr>
           <a:xfrm>
             <a:off x="457200" y="3429000"/>
-            <a:ext cx="17443080" cy="6172200"/>
+            <a:ext cx="17442720" cy="6171840"/>
           </a:xfrm>
           <a:prstGeom prst="rect">
             <a:avLst/>
@@ -13125,7 +13185,7 @@
       </p:pic>
       <p:pic>
         <p:nvPicPr>
-          <p:cNvPr id="116" name="" descr=""/>
+          <p:cNvPr id="119" name="" descr=""/>
           <p:cNvPicPr/>
           <p:nvPr/>
         </p:nvPicPr>
@@ -13136,7 +13196,7 @@
         <p:spPr>
           <a:xfrm>
             <a:off x="13258800" y="447120"/>
-            <a:ext cx="4800600" cy="4485960"/>
+            <a:ext cx="4800240" cy="4485600"/>
           </a:xfrm>
           <a:prstGeom prst="rect">
             <a:avLst/>
@@ -13148,14 +13208,14 @@
       </p:pic>
       <p:sp>
         <p:nvSpPr>
-          <p:cNvPr id="117" name="TextBox 28"/>
+          <p:cNvPr id="120" name="TextBox 28"/>
           <p:cNvSpPr/>
           <p:nvPr/>
         </p:nvSpPr>
         <p:spPr>
           <a:xfrm>
             <a:off x="685800" y="2940840"/>
-            <a:ext cx="9144000" cy="488160"/>
+            <a:ext cx="9143640" cy="487800"/>
           </a:xfrm>
           <a:prstGeom prst="rect">
             <a:avLst/>
@@ -13242,14 +13302,14 @@
       </p:grpSpPr>
       <p:sp>
         <p:nvSpPr>
-          <p:cNvPr id="118" name="TextBox 24"/>
+          <p:cNvPr id="121" name="TextBox 24"/>
           <p:cNvSpPr/>
           <p:nvPr/>
         </p:nvSpPr>
         <p:spPr>
           <a:xfrm>
             <a:off x="887040" y="731520"/>
-            <a:ext cx="14286240" cy="1371960"/>
+            <a:ext cx="14285880" cy="1371600"/>
           </a:xfrm>
           <a:prstGeom prst="rect">
             <a:avLst/>
@@ -13306,14 +13366,14 @@
       </p:sp>
       <p:sp>
         <p:nvSpPr>
-          <p:cNvPr id="119" name="TextBox 27"/>
+          <p:cNvPr id="122" name="TextBox 27"/>
           <p:cNvSpPr/>
           <p:nvPr/>
         </p:nvSpPr>
         <p:spPr>
           <a:xfrm>
             <a:off x="14401800" y="2712240"/>
-            <a:ext cx="1371600" cy="488160"/>
+            <a:ext cx="1371240" cy="487800"/>
           </a:xfrm>
           <a:prstGeom prst="rect">
             <a:avLst/>
@@ -13334,6 +13394,11 @@
             <a:spAutoFit/>
           </a:bodyPr>
           <a:p>
+            <a:pPr>
+              <a:lnSpc>
+                <a:spcPct val="100000"/>
+              </a:lnSpc>
+            </a:pPr>
             <a:endParaRPr b="0" lang="en-US" sz="1800" spc="-1" strike="noStrike">
               <a:solidFill>
                 <a:srgbClr val="ffffff"/>
@@ -13345,7 +13410,7 @@
       </p:sp>
       <p:pic>
         <p:nvPicPr>
-          <p:cNvPr id="120" name="" descr=""/>
+          <p:cNvPr id="123" name="" descr=""/>
           <p:cNvPicPr/>
           <p:nvPr/>
         </p:nvPicPr>
@@ -13356,7 +13421,7 @@
         <p:spPr>
           <a:xfrm>
             <a:off x="6041520" y="2514600"/>
-            <a:ext cx="10417680" cy="7302600"/>
+            <a:ext cx="10417320" cy="7302240"/>
           </a:xfrm>
           <a:prstGeom prst="rect">
             <a:avLst/>
@@ -13368,14 +13433,14 @@
       </p:pic>
       <p:sp>
         <p:nvSpPr>
-          <p:cNvPr id="121" name="TextBox 29"/>
+          <p:cNvPr id="124" name="TextBox 29"/>
           <p:cNvSpPr/>
           <p:nvPr/>
         </p:nvSpPr>
         <p:spPr>
           <a:xfrm>
             <a:off x="997920" y="3657600"/>
-            <a:ext cx="4031280" cy="487440"/>
+            <a:ext cx="4030920" cy="487440"/>
           </a:xfrm>
           <a:prstGeom prst="rect">
             <a:avLst/>
@@ -13425,14 +13490,14 @@
       </p:sp>
       <p:sp>
         <p:nvSpPr>
-          <p:cNvPr id="122" name="TextBox 30"/>
+          <p:cNvPr id="125" name="TextBox 30"/>
           <p:cNvSpPr/>
           <p:nvPr/>
         </p:nvSpPr>
         <p:spPr>
           <a:xfrm>
             <a:off x="997920" y="4339080"/>
-            <a:ext cx="3869280" cy="1279440"/>
+            <a:ext cx="3868920" cy="1279440"/>
           </a:xfrm>
           <a:prstGeom prst="rect">
             <a:avLst/>
@@ -13482,14 +13547,14 @@
       </p:sp>
       <p:sp>
         <p:nvSpPr>
-          <p:cNvPr id="123" name="TextBox 33"/>
+          <p:cNvPr id="126" name="TextBox 33"/>
           <p:cNvSpPr/>
           <p:nvPr/>
         </p:nvSpPr>
         <p:spPr>
           <a:xfrm>
             <a:off x="997920" y="6172200"/>
-            <a:ext cx="4031280" cy="487440"/>
+            <a:ext cx="4030920" cy="487440"/>
           </a:xfrm>
           <a:prstGeom prst="rect">
             <a:avLst/>
@@ -13539,14 +13604,14 @@
       </p:sp>
       <p:sp>
         <p:nvSpPr>
-          <p:cNvPr id="124" name="TextBox 34"/>
+          <p:cNvPr id="127" name="TextBox 34"/>
           <p:cNvSpPr/>
           <p:nvPr/>
         </p:nvSpPr>
         <p:spPr>
           <a:xfrm>
             <a:off x="997920" y="6853680"/>
-            <a:ext cx="3869280" cy="1279440"/>
+            <a:ext cx="3868920" cy="1279440"/>
           </a:xfrm>
           <a:prstGeom prst="rect">
             <a:avLst/>
@@ -13588,6 +13653,63 @@
             <a:endParaRPr b="0" lang="en-US" sz="2400" spc="-1" strike="noStrike">
               <a:solidFill>
                 <a:srgbClr val="ffffff"/>
+              </a:solidFill>
+              <a:latin typeface="Arial"/>
+            </a:endParaRPr>
+          </a:p>
+        </p:txBody>
+      </p:sp>
+      <p:sp>
+        <p:nvSpPr>
+          <p:cNvPr id="128" name=""/>
+          <p:cNvSpPr/>
+          <p:nvPr/>
+        </p:nvSpPr>
+        <p:spPr>
+          <a:xfrm>
+            <a:off x="6629760" y="5124960"/>
+            <a:ext cx="4572000" cy="2286000"/>
+          </a:xfrm>
+          <a:prstGeom prst="wedgeRoundRectCallout">
+            <a:avLst>
+              <a:gd name="adj1" fmla="val -30324"/>
+              <a:gd name="adj2" fmla="val 158333"/>
+              <a:gd name="adj3" fmla="val 16667"/>
+            </a:avLst>
+          </a:prstGeom>
+          <a:solidFill>
+            <a:srgbClr val="729fcf"/>
+          </a:solidFill>
+          <a:ln w="0">
+            <a:solidFill>
+              <a:srgbClr val="3465a4"/>
+            </a:solidFill>
+          </a:ln>
+        </p:spPr>
+        <p:style>
+          <a:lnRef idx="0"/>
+          <a:fillRef idx="0"/>
+          <a:effectRef idx="0"/>
+          <a:fontRef idx="minor"/>
+        </p:style>
+        <p:txBody>
+          <a:bodyPr lIns="90000" rIns="90000" tIns="45000" bIns="45000" anchor="ctr">
+            <a:noAutofit/>
+          </a:bodyPr>
+          <a:p>
+            <a:pPr algn="ctr"/>
+            <a:r>
+              <a:rPr b="0" lang="en-US" sz="1800" spc="-1" strike="noStrike">
+                <a:solidFill>
+                  <a:srgbClr val="000000"/>
+                </a:solidFill>
+                <a:latin typeface="Arial"/>
+              </a:rPr>
+              <a:t>Up to date graph needed</a:t>
+            </a:r>
+            <a:endParaRPr b="0" lang="en-US" sz="1800" spc="-1" strike="noStrike">
+              <a:solidFill>
+                <a:srgbClr val="000000"/>
               </a:solidFill>
               <a:latin typeface="Arial"/>
             </a:endParaRPr>
@@ -13633,14 +13755,14 @@
       </p:grpSpPr>
       <p:sp>
         <p:nvSpPr>
-          <p:cNvPr id="125" name="TextBox 31"/>
+          <p:cNvPr id="129" name="TextBox 31"/>
           <p:cNvSpPr/>
           <p:nvPr/>
         </p:nvSpPr>
         <p:spPr>
           <a:xfrm>
             <a:off x="887040" y="731520"/>
-            <a:ext cx="14286240" cy="1371240"/>
+            <a:ext cx="14285880" cy="1371240"/>
           </a:xfrm>
           <a:prstGeom prst="rect">
             <a:avLst/>
@@ -13687,6 +13809,597 @@
               <a:t>Origins</a:t>
             </a:r>
             <a:endParaRPr b="0" lang="en-US" sz="9000" spc="-1" strike="noStrike">
+              <a:solidFill>
+                <a:srgbClr val="ffffff"/>
+              </a:solidFill>
+              <a:latin typeface="Arial"/>
+            </a:endParaRPr>
+          </a:p>
+        </p:txBody>
+      </p:sp>
+      <p:pic>
+        <p:nvPicPr>
+          <p:cNvPr id="130" name="" descr=""/>
+          <p:cNvPicPr/>
+          <p:nvPr/>
+        </p:nvPicPr>
+        <p:blipFill>
+          <a:blip r:embed="rId1"/>
+          <a:stretch/>
+        </p:blipFill>
+        <p:spPr>
+          <a:xfrm>
+            <a:off x="5257800" y="2330280"/>
+            <a:ext cx="12581640" cy="7499520"/>
+          </a:xfrm>
+          <a:prstGeom prst="rect">
+            <a:avLst/>
+          </a:prstGeom>
+          <a:ln w="0">
+            <a:noFill/>
+          </a:ln>
+        </p:spPr>
+      </p:pic>
+      <p:sp>
+        <p:nvSpPr>
+          <p:cNvPr id="131" name="TextBox 35"/>
+          <p:cNvSpPr/>
+          <p:nvPr/>
+        </p:nvSpPr>
+        <p:spPr>
+          <a:xfrm>
+            <a:off x="914400" y="2611080"/>
+            <a:ext cx="4030920" cy="487440"/>
+          </a:xfrm>
+          <a:prstGeom prst="rect">
+            <a:avLst/>
+          </a:prstGeom>
+          <a:noFill/>
+          <a:ln w="0">
+            <a:noFill/>
+          </a:ln>
+        </p:spPr>
+        <p:style>
+          <a:lnRef idx="0"/>
+          <a:fillRef idx="0"/>
+          <a:effectRef idx="0"/>
+          <a:fontRef idx="minor"/>
+        </p:style>
+        <p:txBody>
+          <a:bodyPr lIns="0" rIns="0" tIns="0" bIns="0" anchor="t">
+            <a:spAutoFit/>
+          </a:bodyPr>
+          <a:p>
+            <a:pPr defTabSz="914400">
+              <a:lnSpc>
+                <a:spcPts val="3841"/>
+              </a:lnSpc>
+              <a:tabLst>
+                <a:tab algn="l" pos="0"/>
+              </a:tabLst>
+            </a:pPr>
+            <a:r>
+              <a:rPr b="1" lang="en-US" sz="3200" spc="-1" strike="noStrike">
+                <a:solidFill>
+                  <a:srgbClr val="9ad3f3"/>
+                </a:solidFill>
+                <a:latin typeface="Open Sauce Semi-Bold"/>
+                <a:ea typeface="Open Sauce Semi-Bold"/>
+              </a:rPr>
+              <a:t>Starlink</a:t>
+            </a:r>
+            <a:endParaRPr b="0" lang="en-US" sz="3200" spc="-1" strike="noStrike">
+              <a:solidFill>
+                <a:srgbClr val="ffffff"/>
+              </a:solidFill>
+              <a:latin typeface="Arial"/>
+            </a:endParaRPr>
+          </a:p>
+        </p:txBody>
+      </p:sp>
+      <p:sp>
+        <p:nvSpPr>
+          <p:cNvPr id="132" name="TextBox 36"/>
+          <p:cNvSpPr/>
+          <p:nvPr/>
+        </p:nvSpPr>
+        <p:spPr>
+          <a:xfrm>
+            <a:off x="914400" y="3292560"/>
+            <a:ext cx="3868920" cy="1279440"/>
+          </a:xfrm>
+          <a:prstGeom prst="rect">
+            <a:avLst/>
+          </a:prstGeom>
+          <a:noFill/>
+          <a:ln w="0">
+            <a:noFill/>
+          </a:ln>
+        </p:spPr>
+        <p:style>
+          <a:lnRef idx="0"/>
+          <a:fillRef idx="0"/>
+          <a:effectRef idx="0"/>
+          <a:fontRef idx="minor"/>
+        </p:style>
+        <p:txBody>
+          <a:bodyPr lIns="0" rIns="0" tIns="0" bIns="0" anchor="t">
+            <a:spAutoFit/>
+          </a:bodyPr>
+          <a:p>
+            <a:pPr defTabSz="914400">
+              <a:lnSpc>
+                <a:spcPts val="3359"/>
+              </a:lnSpc>
+              <a:tabLst>
+                <a:tab algn="l" pos="0"/>
+              </a:tabLst>
+            </a:pPr>
+            <a:r>
+              <a:rPr b="0" lang="en-US" sz="2400" spc="-1" strike="noStrike">
+                <a:solidFill>
+                  <a:srgbClr val="ffffff"/>
+                </a:solidFill>
+                <a:latin typeface="Open Sauce"/>
+                <a:ea typeface="Open Sauce"/>
+              </a:rPr>
+              <a:t>First launch: </a:t>
+            </a:r>
+            <a:r>
+              <a:rPr b="1" lang="en-US" sz="2400" spc="-1" strike="noStrike">
+                <a:solidFill>
+                  <a:srgbClr val="ffffff"/>
+                </a:solidFill>
+                <a:latin typeface="Open Sauce"/>
+                <a:ea typeface="Open Sauce"/>
+              </a:rPr>
+              <a:t>2018</a:t>
+            </a:r>
+            <a:endParaRPr b="0" lang="en-US" sz="2400" spc="-1" strike="noStrike">
+              <a:solidFill>
+                <a:srgbClr val="ffffff"/>
+              </a:solidFill>
+              <a:latin typeface="Arial"/>
+            </a:endParaRPr>
+          </a:p>
+          <a:p>
+            <a:pPr defTabSz="914400">
+              <a:lnSpc>
+                <a:spcPts val="3359"/>
+              </a:lnSpc>
+              <a:tabLst>
+                <a:tab algn="l" pos="0"/>
+              </a:tabLst>
+            </a:pPr>
+            <a:r>
+              <a:rPr b="0" lang="en-US" sz="2400" spc="-1" strike="noStrike">
+                <a:solidFill>
+                  <a:srgbClr val="ffffff"/>
+                </a:solidFill>
+                <a:latin typeface="Open Sauce"/>
+                <a:ea typeface="Open Sauce"/>
+              </a:rPr>
+              <a:t>Total launches: </a:t>
+            </a:r>
+            <a:r>
+              <a:rPr b="1" lang="en-US" sz="2400" spc="-1" strike="noStrike">
+                <a:solidFill>
+                  <a:srgbClr val="ffffff"/>
+                </a:solidFill>
+                <a:latin typeface="Open Sauce"/>
+                <a:ea typeface="Open Sauce"/>
+              </a:rPr>
+              <a:t>10,413</a:t>
+            </a:r>
+            <a:endParaRPr b="0" lang="en-US" sz="2400" spc="-1" strike="noStrike">
+              <a:solidFill>
+                <a:srgbClr val="ffffff"/>
+              </a:solidFill>
+              <a:latin typeface="Arial"/>
+            </a:endParaRPr>
+          </a:p>
+          <a:p>
+            <a:pPr defTabSz="914400">
+              <a:lnSpc>
+                <a:spcPts val="3359"/>
+              </a:lnSpc>
+              <a:tabLst>
+                <a:tab algn="l" pos="0"/>
+              </a:tabLst>
+            </a:pPr>
+            <a:r>
+              <a:rPr b="0" lang="en-US" sz="2400" spc="-1" strike="noStrike">
+                <a:solidFill>
+                  <a:srgbClr val="ffffff"/>
+                </a:solidFill>
+                <a:latin typeface="Open Sauce"/>
+                <a:ea typeface="Open Sauce"/>
+              </a:rPr>
+              <a:t>Purpose: </a:t>
+            </a:r>
+            <a:r>
+              <a:rPr b="1" lang="en-US" sz="2400" spc="-1" strike="noStrike">
+                <a:solidFill>
+                  <a:srgbClr val="ffffff"/>
+                </a:solidFill>
+                <a:latin typeface="Open Sauce"/>
+                <a:ea typeface="Open Sauce"/>
+              </a:rPr>
+              <a:t>Comms</a:t>
+            </a:r>
+            <a:endParaRPr b="0" lang="en-US" sz="2400" spc="-1" strike="noStrike">
+              <a:solidFill>
+                <a:srgbClr val="ffffff"/>
+              </a:solidFill>
+              <a:latin typeface="Arial"/>
+            </a:endParaRPr>
+          </a:p>
+        </p:txBody>
+      </p:sp>
+      <p:sp>
+        <p:nvSpPr>
+          <p:cNvPr id="133" name="TextBox 37"/>
+          <p:cNvSpPr/>
+          <p:nvPr/>
+        </p:nvSpPr>
+        <p:spPr>
+          <a:xfrm>
+            <a:off x="914400" y="5125680"/>
+            <a:ext cx="4030920" cy="487440"/>
+          </a:xfrm>
+          <a:prstGeom prst="rect">
+            <a:avLst/>
+          </a:prstGeom>
+          <a:noFill/>
+          <a:ln w="0">
+            <a:noFill/>
+          </a:ln>
+        </p:spPr>
+        <p:style>
+          <a:lnRef idx="0"/>
+          <a:fillRef idx="0"/>
+          <a:effectRef idx="0"/>
+          <a:fontRef idx="minor"/>
+        </p:style>
+        <p:txBody>
+          <a:bodyPr lIns="0" rIns="0" tIns="0" bIns="0" anchor="t">
+            <a:spAutoFit/>
+          </a:bodyPr>
+          <a:p>
+            <a:pPr defTabSz="914400">
+              <a:lnSpc>
+                <a:spcPts val="3841"/>
+              </a:lnSpc>
+              <a:tabLst>
+                <a:tab algn="l" pos="0"/>
+              </a:tabLst>
+            </a:pPr>
+            <a:r>
+              <a:rPr b="1" lang="en-US" sz="3200" spc="-1" strike="noStrike">
+                <a:solidFill>
+                  <a:srgbClr val="9ad3f3"/>
+                </a:solidFill>
+                <a:latin typeface="Open Sauce Semi-Bold"/>
+                <a:ea typeface="Open Sauce Semi-Bold"/>
+              </a:rPr>
+              <a:t>OneWeb</a:t>
+            </a:r>
+            <a:endParaRPr b="0" lang="en-US" sz="3200" spc="-1" strike="noStrike">
+              <a:solidFill>
+                <a:srgbClr val="ffffff"/>
+              </a:solidFill>
+              <a:latin typeface="Arial"/>
+            </a:endParaRPr>
+          </a:p>
+        </p:txBody>
+      </p:sp>
+      <p:sp>
+        <p:nvSpPr>
+          <p:cNvPr id="134" name="TextBox 38"/>
+          <p:cNvSpPr/>
+          <p:nvPr/>
+        </p:nvSpPr>
+        <p:spPr>
+          <a:xfrm>
+            <a:off x="914400" y="5807160"/>
+            <a:ext cx="3868920" cy="1279440"/>
+          </a:xfrm>
+          <a:prstGeom prst="rect">
+            <a:avLst/>
+          </a:prstGeom>
+          <a:noFill/>
+          <a:ln w="0">
+            <a:noFill/>
+          </a:ln>
+        </p:spPr>
+        <p:style>
+          <a:lnRef idx="0"/>
+          <a:fillRef idx="0"/>
+          <a:effectRef idx="0"/>
+          <a:fontRef idx="minor"/>
+        </p:style>
+        <p:txBody>
+          <a:bodyPr lIns="0" rIns="0" tIns="0" bIns="0" anchor="t">
+            <a:spAutoFit/>
+          </a:bodyPr>
+          <a:p>
+            <a:pPr defTabSz="914400">
+              <a:lnSpc>
+                <a:spcPts val="3359"/>
+              </a:lnSpc>
+              <a:tabLst>
+                <a:tab algn="l" pos="0"/>
+              </a:tabLst>
+            </a:pPr>
+            <a:r>
+              <a:rPr b="0" lang="en-US" sz="2400" spc="-1" strike="noStrike">
+                <a:solidFill>
+                  <a:srgbClr val="ffffff"/>
+                </a:solidFill>
+                <a:latin typeface="Open Sauce"/>
+                <a:ea typeface="Open Sauce"/>
+              </a:rPr>
+              <a:t>First launch: 2019</a:t>
+            </a:r>
+            <a:endParaRPr b="0" lang="en-US" sz="2400" spc="-1" strike="noStrike">
+              <a:solidFill>
+                <a:srgbClr val="ffffff"/>
+              </a:solidFill>
+              <a:latin typeface="Arial"/>
+            </a:endParaRPr>
+          </a:p>
+          <a:p>
+            <a:pPr defTabSz="914400">
+              <a:lnSpc>
+                <a:spcPts val="3359"/>
+              </a:lnSpc>
+              <a:tabLst>
+                <a:tab algn="l" pos="0"/>
+              </a:tabLst>
+            </a:pPr>
+            <a:r>
+              <a:rPr b="0" lang="en-US" sz="2400" spc="-1" strike="noStrike">
+                <a:solidFill>
+                  <a:srgbClr val="ffffff"/>
+                </a:solidFill>
+                <a:latin typeface="Open Sauce"/>
+                <a:ea typeface="Open Sauce"/>
+              </a:rPr>
+              <a:t>Total launches: 656</a:t>
+            </a:r>
+            <a:endParaRPr b="0" lang="en-US" sz="2400" spc="-1" strike="noStrike">
+              <a:solidFill>
+                <a:srgbClr val="ffffff"/>
+              </a:solidFill>
+              <a:latin typeface="Arial"/>
+            </a:endParaRPr>
+          </a:p>
+          <a:p>
+            <a:pPr defTabSz="914400">
+              <a:lnSpc>
+                <a:spcPts val="3359"/>
+              </a:lnSpc>
+              <a:tabLst>
+                <a:tab algn="l" pos="0"/>
+              </a:tabLst>
+            </a:pPr>
+            <a:r>
+              <a:rPr b="0" lang="en-US" sz="2400" spc="-1" strike="noStrike">
+                <a:solidFill>
+                  <a:srgbClr val="ffffff"/>
+                </a:solidFill>
+                <a:latin typeface="Open Sauce"/>
+                <a:ea typeface="Open Sauce"/>
+              </a:rPr>
+              <a:t>Purpose: </a:t>
+            </a:r>
+            <a:r>
+              <a:rPr b="1" lang="en-US" sz="2400" spc="-1" strike="noStrike">
+                <a:solidFill>
+                  <a:srgbClr val="ffffff"/>
+                </a:solidFill>
+                <a:latin typeface="Open Sauce"/>
+                <a:ea typeface="Open Sauce"/>
+              </a:rPr>
+              <a:t>Internet</a:t>
+            </a:r>
+            <a:endParaRPr b="0" lang="en-US" sz="2400" spc="-1" strike="noStrike">
+              <a:solidFill>
+                <a:srgbClr val="ffffff"/>
+              </a:solidFill>
+              <a:latin typeface="Arial"/>
+            </a:endParaRPr>
+          </a:p>
+        </p:txBody>
+      </p:sp>
+      <p:sp>
+        <p:nvSpPr>
+          <p:cNvPr id="135" name="TextBox 39"/>
+          <p:cNvSpPr/>
+          <p:nvPr/>
+        </p:nvSpPr>
+        <p:spPr>
+          <a:xfrm>
+            <a:off x="914400" y="7640280"/>
+            <a:ext cx="4030920" cy="487440"/>
+          </a:xfrm>
+          <a:prstGeom prst="rect">
+            <a:avLst/>
+          </a:prstGeom>
+          <a:noFill/>
+          <a:ln w="0">
+            <a:noFill/>
+          </a:ln>
+        </p:spPr>
+        <p:style>
+          <a:lnRef idx="0"/>
+          <a:fillRef idx="0"/>
+          <a:effectRef idx="0"/>
+          <a:fontRef idx="minor"/>
+        </p:style>
+        <p:txBody>
+          <a:bodyPr lIns="0" rIns="0" tIns="0" bIns="0" anchor="t">
+            <a:spAutoFit/>
+          </a:bodyPr>
+          <a:p>
+            <a:pPr defTabSz="914400">
+              <a:lnSpc>
+                <a:spcPts val="3841"/>
+              </a:lnSpc>
+              <a:tabLst>
+                <a:tab algn="l" pos="0"/>
+              </a:tabLst>
+            </a:pPr>
+            <a:r>
+              <a:rPr b="1" lang="en-US" sz="3200" spc="-1" strike="noStrike">
+                <a:solidFill>
+                  <a:srgbClr val="9ad3f3"/>
+                </a:solidFill>
+                <a:latin typeface="Open Sauce Semi-Bold"/>
+                <a:ea typeface="Open Sauce Semi-Bold"/>
+              </a:rPr>
+              <a:t>Flock</a:t>
+            </a:r>
+            <a:endParaRPr b="0" lang="en-US" sz="3200" spc="-1" strike="noStrike">
+              <a:solidFill>
+                <a:srgbClr val="ffffff"/>
+              </a:solidFill>
+              <a:latin typeface="Arial"/>
+            </a:endParaRPr>
+          </a:p>
+        </p:txBody>
+      </p:sp>
+      <p:sp>
+        <p:nvSpPr>
+          <p:cNvPr id="136" name="TextBox 40"/>
+          <p:cNvSpPr/>
+          <p:nvPr/>
+        </p:nvSpPr>
+        <p:spPr>
+          <a:xfrm>
+            <a:off x="914400" y="8321760"/>
+            <a:ext cx="4343400" cy="1280160"/>
+          </a:xfrm>
+          <a:prstGeom prst="rect">
+            <a:avLst/>
+          </a:prstGeom>
+          <a:noFill/>
+          <a:ln w="0">
+            <a:noFill/>
+          </a:ln>
+        </p:spPr>
+        <p:style>
+          <a:lnRef idx="0"/>
+          <a:fillRef idx="0"/>
+          <a:effectRef idx="0"/>
+          <a:fontRef idx="minor"/>
+        </p:style>
+        <p:txBody>
+          <a:bodyPr lIns="0" rIns="0" tIns="0" bIns="0" anchor="t">
+            <a:spAutoFit/>
+          </a:bodyPr>
+          <a:p>
+            <a:pPr defTabSz="914400">
+              <a:lnSpc>
+                <a:spcPts val="3359"/>
+              </a:lnSpc>
+              <a:tabLst>
+                <a:tab algn="l" pos="0"/>
+              </a:tabLst>
+            </a:pPr>
+            <a:r>
+              <a:rPr b="0" lang="en-US" sz="2400" spc="-1" strike="noStrike">
+                <a:solidFill>
+                  <a:srgbClr val="ffffff"/>
+                </a:solidFill>
+                <a:latin typeface="Open Sauce"/>
+                <a:ea typeface="Open Sauce"/>
+              </a:rPr>
+              <a:t>First launch: </a:t>
+            </a:r>
+            <a:r>
+              <a:rPr b="1" lang="en-US" sz="2400" spc="-1" strike="noStrike">
+                <a:solidFill>
+                  <a:srgbClr val="ffffff"/>
+                </a:solidFill>
+                <a:latin typeface="Open Sauce"/>
+                <a:ea typeface="Open Sauce"/>
+              </a:rPr>
+              <a:t>2015</a:t>
+            </a:r>
+            <a:endParaRPr b="0" lang="en-US" sz="2400" spc="-1" strike="noStrike">
+              <a:solidFill>
+                <a:srgbClr val="ffffff"/>
+              </a:solidFill>
+              <a:latin typeface="Arial"/>
+            </a:endParaRPr>
+          </a:p>
+          <a:p>
+            <a:pPr defTabSz="914400">
+              <a:lnSpc>
+                <a:spcPts val="3359"/>
+              </a:lnSpc>
+              <a:tabLst>
+                <a:tab algn="l" pos="0"/>
+              </a:tabLst>
+            </a:pPr>
+            <a:r>
+              <a:rPr b="0" lang="en-US" sz="2400" spc="-1" strike="noStrike">
+                <a:solidFill>
+                  <a:srgbClr val="ffffff"/>
+                </a:solidFill>
+                <a:latin typeface="Open Sauce"/>
+                <a:ea typeface="Open Sauce"/>
+              </a:rPr>
+              <a:t>Total launches: </a:t>
+            </a:r>
+            <a:r>
+              <a:rPr b="1" lang="en-US" sz="2400" spc="-1" strike="noStrike">
+                <a:solidFill>
+                  <a:srgbClr val="ffffff"/>
+                </a:solidFill>
+                <a:latin typeface="Open Sauce"/>
+                <a:ea typeface="Open Sauce"/>
+              </a:rPr>
+              <a:t>548</a:t>
+            </a:r>
+            <a:endParaRPr b="0" lang="en-US" sz="2400" spc="-1" strike="noStrike">
+              <a:solidFill>
+                <a:srgbClr val="ffffff"/>
+              </a:solidFill>
+              <a:latin typeface="Arial"/>
+            </a:endParaRPr>
+          </a:p>
+          <a:p>
+            <a:pPr defTabSz="914400">
+              <a:lnSpc>
+                <a:spcPts val="3359"/>
+              </a:lnSpc>
+              <a:tabLst>
+                <a:tab algn="l" pos="0"/>
+              </a:tabLst>
+            </a:pPr>
+            <a:r>
+              <a:rPr b="0" lang="en-US" sz="2400" spc="-1" strike="noStrike">
+                <a:solidFill>
+                  <a:srgbClr val="ffffff"/>
+                </a:solidFill>
+                <a:latin typeface="Open Sauce"/>
+                <a:ea typeface="Open Sauce"/>
+              </a:rPr>
+              <a:t>Purpose: </a:t>
+            </a:r>
+            <a:r>
+              <a:rPr b="1" lang="en-US" sz="2400" spc="-1" strike="noStrike">
+                <a:solidFill>
+                  <a:srgbClr val="ffffff"/>
+                </a:solidFill>
+                <a:latin typeface="Open Sauce"/>
+                <a:ea typeface="Open Sauce"/>
+              </a:rPr>
+              <a:t>Earth Observation</a:t>
+            </a:r>
+            <a:endParaRPr b="0" lang="en-US" sz="2400" spc="-1" strike="noStrike">
               <a:solidFill>
                 <a:srgbClr val="ffffff"/>
               </a:solidFill>

--- a/assessment/presentation/From Launch to Litter Orbital Overload.pptx
+++ b/assessment/presentation/From Launch to Litter Orbital Overload.pptx
@@ -167,7 +167,7 @@
         <p:txBody>
           <a:bodyPr/>
           <a:p>
-            <a:fld id="{3FEC978C-BC05-4031-8C8E-5B843554887E}" type="slidenum">
+            <a:fld id="{47308A26-48A3-4BED-901C-946BB72AD2AA}" type="slidenum">
               <a:t>&lt;#&gt;</a:t>
             </a:fld>
           </a:p>
@@ -250,7 +250,7 @@
         <p:txBody>
           <a:bodyPr/>
           <a:p>
-            <a:fld id="{2D44D404-1E0F-4B7C-B617-D6FC62A7390C}" type="slidenum">
+            <a:fld id="{65B3DBE7-7A6D-4129-86A8-0F42D8DDFFCD}" type="slidenum">
               <a:t>&lt;#&gt;</a:t>
             </a:fld>
           </a:p>
@@ -333,7 +333,7 @@
         <p:txBody>
           <a:bodyPr/>
           <a:p>
-            <a:fld id="{5A5D7641-5049-4C1B-AEBF-B650FBA2414D}" type="slidenum">
+            <a:fld id="{09949D96-8034-448B-97CC-1FCF4294A3A2}" type="slidenum">
               <a:t>&lt;#&gt;</a:t>
             </a:fld>
           </a:p>
@@ -416,7 +416,7 @@
         <p:txBody>
           <a:bodyPr/>
           <a:p>
-            <a:fld id="{A1AE1D23-D968-4240-8DDA-D789422E89FE}" type="slidenum">
+            <a:fld id="{459F5DAC-B869-46B8-A9EA-14E0ECF40BED}" type="slidenum">
               <a:t>&lt;#&gt;</a:t>
             </a:fld>
           </a:p>
@@ -499,7 +499,7 @@
         <p:txBody>
           <a:bodyPr/>
           <a:p>
-            <a:fld id="{E235F30A-489B-42E9-BF7D-DA4543821A64}" type="slidenum">
+            <a:fld id="{0A9468D6-CE53-4D16-B0D6-3898F504459A}" type="slidenum">
               <a:t>&lt;#&gt;</a:t>
             </a:fld>
           </a:p>
@@ -665,7 +665,7 @@
         <p:txBody>
           <a:bodyPr/>
           <a:p>
-            <a:fld id="{90708870-3FB5-4D6A-9564-8F3BEA3522E8}" type="slidenum">
+            <a:fld id="{CD7A28F6-1F50-4EB8-A0B0-8BFA5F5D4D19}" type="slidenum">
               <a:t>&lt;#&gt;</a:t>
             </a:fld>
           </a:p>
@@ -748,7 +748,7 @@
         <p:txBody>
           <a:bodyPr/>
           <a:p>
-            <a:fld id="{3DEC0E41-D046-4105-A5B7-843AA19A9121}" type="slidenum">
+            <a:fld id="{6B98DD2A-5698-4297-BF6B-0ECE808351FC}" type="slidenum">
               <a:t>&lt;#&gt;</a:t>
             </a:fld>
           </a:p>
@@ -957,7 +957,7 @@
         <p:txBody>
           <a:bodyPr/>
           <a:p>
-            <a:fld id="{B1568C54-7E3E-4ACF-98CA-6966289A88E9}" type="slidenum">
+            <a:fld id="{55DCB369-9547-40E9-B7D8-BC5C1B0826BF}" type="slidenum">
               <a:t>&lt;#&gt;</a:t>
             </a:fld>
           </a:p>
@@ -1040,7 +1040,7 @@
         <p:txBody>
           <a:bodyPr/>
           <a:p>
-            <a:fld id="{7384D0DD-B40B-4642-AEC1-F7AD27A7179F}" type="slidenum">
+            <a:fld id="{8481D4EB-DE22-47AC-8819-9B05A0AF3AC2}" type="slidenum">
               <a:t>&lt;#&gt;</a:t>
             </a:fld>
           </a:p>
@@ -1163,7 +1163,7 @@
         <p:txBody>
           <a:bodyPr/>
           <a:p>
-            <a:fld id="{0D33A0C0-FA1E-48C0-A5EB-63AFFD4809F0}" type="slidenum">
+            <a:fld id="{6BC442E3-3D39-4E79-B6AE-D9860FB9DBD9}" type="slidenum">
               <a:t>&lt;#&gt;</a:t>
             </a:fld>
           </a:p>
@@ -1246,7 +1246,7 @@
         <p:txBody>
           <a:bodyPr/>
           <a:p>
-            <a:fld id="{DC6B6ECF-7A83-442A-A81A-FC8677827384}" type="slidenum">
+            <a:fld id="{E854A0F8-245F-4A6D-B55D-B28C09A4FDC2}" type="slidenum">
               <a:t>&lt;#&gt;</a:t>
             </a:fld>
           </a:p>
@@ -1364,7 +1364,7 @@
         <p:spPr>
           <a:xfrm>
             <a:off x="3124080" y="6356520"/>
-            <a:ext cx="2893680" cy="363240"/>
+            <a:ext cx="2893320" cy="362880"/>
           </a:xfrm>
           <a:prstGeom prst="rect">
             <a:avLst/>
@@ -1436,7 +1436,7 @@
         <p:spPr>
           <a:xfrm>
             <a:off x="6553080" y="6356520"/>
-            <a:ext cx="2131920" cy="363240"/>
+            <a:ext cx="2131560" cy="362880"/>
           </a:xfrm>
           <a:prstGeom prst="rect">
             <a:avLst/>
@@ -1479,7 +1479,7 @@
                 <a:tab algn="l" pos="0"/>
               </a:tabLst>
             </a:pPr>
-            <a:fld id="{6BDC22EF-76C9-4B66-9E81-F834A15288A1}" type="slidenum">
+            <a:fld id="{75D8AC19-5C4A-4ED3-972E-5127F0731256}" type="slidenum">
               <a:rPr b="0" lang="en-US" sz="1200" spc="-1" strike="noStrike">
                 <a:solidFill>
                   <a:schemeClr val="dk1">
@@ -1512,7 +1512,7 @@
         <p:spPr>
           <a:xfrm>
             <a:off x="457200" y="6356520"/>
-            <a:ext cx="2131920" cy="363240"/>
+            <a:ext cx="2131560" cy="362880"/>
           </a:xfrm>
           <a:prstGeom prst="rect">
             <a:avLst/>
@@ -1605,7 +1605,7 @@
         <p:spPr>
           <a:xfrm>
             <a:off x="3124080" y="6356520"/>
-            <a:ext cx="2893680" cy="363240"/>
+            <a:ext cx="2893320" cy="362880"/>
           </a:xfrm>
           <a:prstGeom prst="rect">
             <a:avLst/>
@@ -1677,7 +1677,7 @@
         <p:spPr>
           <a:xfrm>
             <a:off x="6553080" y="6356520"/>
-            <a:ext cx="2131920" cy="363240"/>
+            <a:ext cx="2131560" cy="362880"/>
           </a:xfrm>
           <a:prstGeom prst="rect">
             <a:avLst/>
@@ -1720,7 +1720,7 @@
                 <a:tab algn="l" pos="0"/>
               </a:tabLst>
             </a:pPr>
-            <a:fld id="{CE81FC3C-0D77-4A19-934D-1653A2CA6D8C}" type="slidenum">
+            <a:fld id="{48E42333-CFE0-43BB-9792-684DE67F36B8}" type="slidenum">
               <a:rPr b="0" lang="en-US" sz="1200" spc="-1" strike="noStrike">
                 <a:solidFill>
                   <a:schemeClr val="dk1">
@@ -1753,7 +1753,7 @@
         <p:spPr>
           <a:xfrm>
             <a:off x="457200" y="6356520"/>
-            <a:ext cx="2131920" cy="363240"/>
+            <a:ext cx="2131560" cy="362880"/>
           </a:xfrm>
           <a:prstGeom prst="rect">
             <a:avLst/>
@@ -1846,7 +1846,7 @@
         <p:spPr>
           <a:xfrm>
             <a:off x="3124080" y="6356520"/>
-            <a:ext cx="2893680" cy="363240"/>
+            <a:ext cx="2893320" cy="362880"/>
           </a:xfrm>
           <a:prstGeom prst="rect">
             <a:avLst/>
@@ -1918,7 +1918,7 @@
         <p:spPr>
           <a:xfrm>
             <a:off x="6553080" y="6356520"/>
-            <a:ext cx="2131920" cy="363240"/>
+            <a:ext cx="2131560" cy="362880"/>
           </a:xfrm>
           <a:prstGeom prst="rect">
             <a:avLst/>
@@ -1961,7 +1961,7 @@
                 <a:tab algn="l" pos="0"/>
               </a:tabLst>
             </a:pPr>
-            <a:fld id="{524C68A3-AA9E-4E33-8B8E-02670655E4FA}" type="slidenum">
+            <a:fld id="{9246B29C-0204-479F-9927-59D70B1EE250}" type="slidenum">
               <a:rPr b="0" lang="en-US" sz="1200" spc="-1" strike="noStrike">
                 <a:solidFill>
                   <a:schemeClr val="dk1">
@@ -1994,7 +1994,7 @@
         <p:spPr>
           <a:xfrm>
             <a:off x="457200" y="6356520"/>
-            <a:ext cx="2131920" cy="363240"/>
+            <a:ext cx="2131560" cy="362880"/>
           </a:xfrm>
           <a:prstGeom prst="rect">
             <a:avLst/>
@@ -2087,7 +2087,7 @@
         <p:spPr>
           <a:xfrm>
             <a:off x="3124080" y="6356520"/>
-            <a:ext cx="2893680" cy="363240"/>
+            <a:ext cx="2893320" cy="362880"/>
           </a:xfrm>
           <a:prstGeom prst="rect">
             <a:avLst/>
@@ -2159,7 +2159,7 @@
         <p:spPr>
           <a:xfrm>
             <a:off x="6553080" y="6356520"/>
-            <a:ext cx="2131920" cy="363240"/>
+            <a:ext cx="2131560" cy="362880"/>
           </a:xfrm>
           <a:prstGeom prst="rect">
             <a:avLst/>
@@ -2202,7 +2202,7 @@
                 <a:tab algn="l" pos="0"/>
               </a:tabLst>
             </a:pPr>
-            <a:fld id="{004BD7A1-FD6F-440A-8498-88320F656A8D}" type="slidenum">
+            <a:fld id="{6C64BD49-EF2B-4758-832B-1848878C5D57}" type="slidenum">
               <a:rPr b="0" lang="en-US" sz="1200" spc="-1" strike="noStrike">
                 <a:solidFill>
                   <a:schemeClr val="dk1">
@@ -2235,7 +2235,7 @@
         <p:spPr>
           <a:xfrm>
             <a:off x="457200" y="6356520"/>
-            <a:ext cx="2131920" cy="363240"/>
+            <a:ext cx="2131560" cy="362880"/>
           </a:xfrm>
           <a:prstGeom prst="rect">
             <a:avLst/>
@@ -2328,7 +2328,7 @@
         <p:spPr>
           <a:xfrm>
             <a:off x="3124080" y="6356520"/>
-            <a:ext cx="2893680" cy="363240"/>
+            <a:ext cx="2893320" cy="362880"/>
           </a:xfrm>
           <a:prstGeom prst="rect">
             <a:avLst/>
@@ -2400,7 +2400,7 @@
         <p:spPr>
           <a:xfrm>
             <a:off x="6553080" y="6356520"/>
-            <a:ext cx="2131920" cy="363240"/>
+            <a:ext cx="2131560" cy="362880"/>
           </a:xfrm>
           <a:prstGeom prst="rect">
             <a:avLst/>
@@ -2443,7 +2443,7 @@
                 <a:tab algn="l" pos="0"/>
               </a:tabLst>
             </a:pPr>
-            <a:fld id="{BE4CFAF5-3315-4E54-A8D3-ED11B6136839}" type="slidenum">
+            <a:fld id="{5EC10266-1719-4C6B-9BD7-4D7F2E65E46F}" type="slidenum">
               <a:rPr b="0" lang="en-US" sz="1200" spc="-1" strike="noStrike">
                 <a:solidFill>
                   <a:schemeClr val="dk1">
@@ -2476,7 +2476,7 @@
         <p:spPr>
           <a:xfrm>
             <a:off x="457200" y="6356520"/>
-            <a:ext cx="2131920" cy="363240"/>
+            <a:ext cx="2131560" cy="362880"/>
           </a:xfrm>
           <a:prstGeom prst="rect">
             <a:avLst/>
@@ -2843,7 +2843,7 @@
         <p:spPr>
           <a:xfrm>
             <a:off x="3124080" y="6356520"/>
-            <a:ext cx="2893680" cy="363240"/>
+            <a:ext cx="2893320" cy="362880"/>
           </a:xfrm>
           <a:prstGeom prst="rect">
             <a:avLst/>
@@ -2915,7 +2915,7 @@
         <p:spPr>
           <a:xfrm>
             <a:off x="6553080" y="6356520"/>
-            <a:ext cx="2131920" cy="363240"/>
+            <a:ext cx="2131560" cy="362880"/>
           </a:xfrm>
           <a:prstGeom prst="rect">
             <a:avLst/>
@@ -2958,7 +2958,7 @@
                 <a:tab algn="l" pos="0"/>
               </a:tabLst>
             </a:pPr>
-            <a:fld id="{A594DDDC-1009-4EF4-BA4A-499AC5CD4F05}" type="slidenum">
+            <a:fld id="{E4458062-C9BE-4D31-AB18-8D81DDBAA0A7}" type="slidenum">
               <a:rPr b="0" lang="en-US" sz="1200" spc="-1" strike="noStrike">
                 <a:solidFill>
                   <a:schemeClr val="dk1">
@@ -2991,7 +2991,7 @@
         <p:spPr>
           <a:xfrm>
             <a:off x="457200" y="6356520"/>
-            <a:ext cx="2131920" cy="363240"/>
+            <a:ext cx="2131560" cy="362880"/>
           </a:xfrm>
           <a:prstGeom prst="rect">
             <a:avLst/>
@@ -3084,7 +3084,7 @@
         <p:spPr>
           <a:xfrm>
             <a:off x="3124080" y="6356520"/>
-            <a:ext cx="2893680" cy="363240"/>
+            <a:ext cx="2893320" cy="362880"/>
           </a:xfrm>
           <a:prstGeom prst="rect">
             <a:avLst/>
@@ -3156,7 +3156,7 @@
         <p:spPr>
           <a:xfrm>
             <a:off x="6553080" y="6356520"/>
-            <a:ext cx="2131920" cy="363240"/>
+            <a:ext cx="2131560" cy="362880"/>
           </a:xfrm>
           <a:prstGeom prst="rect">
             <a:avLst/>
@@ -3199,7 +3199,7 @@
                 <a:tab algn="l" pos="0"/>
               </a:tabLst>
             </a:pPr>
-            <a:fld id="{BBC10478-B92B-44C9-BFFA-4B43819B0A74}" type="slidenum">
+            <a:fld id="{E3D6E668-0F45-4B47-AC06-76049ADC8AB2}" type="slidenum">
               <a:rPr b="0" lang="en-US" sz="1200" spc="-1" strike="noStrike">
                 <a:solidFill>
                   <a:schemeClr val="dk1">
@@ -3232,7 +3232,7 @@
         <p:spPr>
           <a:xfrm>
             <a:off x="457200" y="6356520"/>
-            <a:ext cx="2131920" cy="363240"/>
+            <a:ext cx="2131560" cy="362880"/>
           </a:xfrm>
           <a:prstGeom prst="rect">
             <a:avLst/>
@@ -3824,7 +3824,7 @@
         <p:spPr>
           <a:xfrm>
             <a:off x="3124080" y="6356520"/>
-            <a:ext cx="2893680" cy="363240"/>
+            <a:ext cx="2893320" cy="362880"/>
           </a:xfrm>
           <a:prstGeom prst="rect">
             <a:avLst/>
@@ -3896,7 +3896,7 @@
         <p:spPr>
           <a:xfrm>
             <a:off x="6553080" y="6356520"/>
-            <a:ext cx="2131920" cy="363240"/>
+            <a:ext cx="2131560" cy="362880"/>
           </a:xfrm>
           <a:prstGeom prst="rect">
             <a:avLst/>
@@ -3939,7 +3939,7 @@
                 <a:tab algn="l" pos="0"/>
               </a:tabLst>
             </a:pPr>
-            <a:fld id="{99B49829-0F8F-4C27-B599-5C9565197D9B}" type="slidenum">
+            <a:fld id="{1A32118A-3D23-41EF-ACA4-1F61654845D0}" type="slidenum">
               <a:rPr b="0" lang="en-US" sz="1200" spc="-1" strike="noStrike">
                 <a:solidFill>
                   <a:schemeClr val="dk1">
@@ -3972,7 +3972,7 @@
         <p:spPr>
           <a:xfrm>
             <a:off x="457200" y="6356520"/>
-            <a:ext cx="2131920" cy="363240"/>
+            <a:ext cx="2131560" cy="362880"/>
           </a:xfrm>
           <a:prstGeom prst="rect">
             <a:avLst/>
@@ -4065,7 +4065,7 @@
         <p:spPr>
           <a:xfrm>
             <a:off x="3124080" y="6356520"/>
-            <a:ext cx="2893680" cy="363240"/>
+            <a:ext cx="2893320" cy="362880"/>
           </a:xfrm>
           <a:prstGeom prst="rect">
             <a:avLst/>
@@ -4137,7 +4137,7 @@
         <p:spPr>
           <a:xfrm>
             <a:off x="6553080" y="6356520"/>
-            <a:ext cx="2131920" cy="363240"/>
+            <a:ext cx="2131560" cy="362880"/>
           </a:xfrm>
           <a:prstGeom prst="rect">
             <a:avLst/>
@@ -4180,7 +4180,7 @@
                 <a:tab algn="l" pos="0"/>
               </a:tabLst>
             </a:pPr>
-            <a:fld id="{6DCE5F5C-37DD-4C67-B20A-8627B65AEF1D}" type="slidenum">
+            <a:fld id="{E5698EA5-72B0-49F5-9514-81756798C21C}" type="slidenum">
               <a:rPr b="0" lang="en-US" sz="1200" spc="-1" strike="noStrike">
                 <a:solidFill>
                   <a:schemeClr val="dk1">
@@ -4213,7 +4213,7 @@
         <p:spPr>
           <a:xfrm>
             <a:off x="457200" y="6356520"/>
-            <a:ext cx="2131920" cy="363240"/>
+            <a:ext cx="2131560" cy="362880"/>
           </a:xfrm>
           <a:prstGeom prst="rect">
             <a:avLst/>
@@ -4355,7 +4355,7 @@
         <p:spPr>
           <a:xfrm>
             <a:off x="3124080" y="6356520"/>
-            <a:ext cx="2893680" cy="363240"/>
+            <a:ext cx="2893320" cy="362880"/>
           </a:xfrm>
           <a:prstGeom prst="rect">
             <a:avLst/>
@@ -4427,7 +4427,7 @@
         <p:spPr>
           <a:xfrm>
             <a:off x="6553080" y="6356520"/>
-            <a:ext cx="2131920" cy="363240"/>
+            <a:ext cx="2131560" cy="362880"/>
           </a:xfrm>
           <a:prstGeom prst="rect">
             <a:avLst/>
@@ -4470,7 +4470,7 @@
                 <a:tab algn="l" pos="0"/>
               </a:tabLst>
             </a:pPr>
-            <a:fld id="{A2E73DD1-A5E7-4787-98FB-C5AE314B9A75}" type="slidenum">
+            <a:fld id="{AB86CFA8-92FC-483E-B4ED-EAC41758F4B1}" type="slidenum">
               <a:rPr b="0" lang="en-US" sz="1200" spc="-1" strike="noStrike">
                 <a:solidFill>
                   <a:schemeClr val="dk1">
@@ -4503,7 +4503,7 @@
         <p:spPr>
           <a:xfrm>
             <a:off x="457200" y="6356520"/>
-            <a:ext cx="2131920" cy="363240"/>
+            <a:ext cx="2131560" cy="362880"/>
           </a:xfrm>
           <a:prstGeom prst="rect">
             <a:avLst/>
@@ -4596,7 +4596,7 @@
         <p:spPr>
           <a:xfrm>
             <a:off x="3124080" y="6356520"/>
-            <a:ext cx="2893680" cy="363240"/>
+            <a:ext cx="2893320" cy="362880"/>
           </a:xfrm>
           <a:prstGeom prst="rect">
             <a:avLst/>
@@ -4668,7 +4668,7 @@
         <p:spPr>
           <a:xfrm>
             <a:off x="6553080" y="6356520"/>
-            <a:ext cx="2131920" cy="363240"/>
+            <a:ext cx="2131560" cy="362880"/>
           </a:xfrm>
           <a:prstGeom prst="rect">
             <a:avLst/>
@@ -4711,7 +4711,7 @@
                 <a:tab algn="l" pos="0"/>
               </a:tabLst>
             </a:pPr>
-            <a:fld id="{B6B54B92-C26B-4B1D-BBC7-726E7263B430}" type="slidenum">
+            <a:fld id="{7BE82E2E-84F3-4303-87E9-45B4F46468AC}" type="slidenum">
               <a:rPr b="0" lang="en-US" sz="1200" spc="-1" strike="noStrike">
                 <a:solidFill>
                   <a:schemeClr val="dk1">
@@ -4744,7 +4744,7 @@
         <p:spPr>
           <a:xfrm>
             <a:off x="457200" y="6356520"/>
-            <a:ext cx="2131920" cy="363240"/>
+            <a:ext cx="2131560" cy="362880"/>
           </a:xfrm>
           <a:prstGeom prst="rect">
             <a:avLst/>
@@ -5107,9 +5107,9 @@
         <p:grpSpPr>
           <a:xfrm>
             <a:off x="0" y="0"/>
-            <a:ext cx="18286200" cy="10285200"/>
+            <a:ext cx="18285840" cy="10284840"/>
             <a:chOff x="0" y="0"/>
-            <a:chExt cx="18286200" cy="10285200"/>
+            <a:chExt cx="18285840" cy="10284840"/>
           </a:xfrm>
         </p:grpSpPr>
         <p:sp>
@@ -5121,15 +5121,15 @@
           <p:spPr>
             <a:xfrm>
               <a:off x="0" y="0"/>
-              <a:ext cx="18286200" cy="10285200"/>
+              <a:ext cx="18285840" cy="10284840"/>
             </a:xfrm>
             <a:custGeom>
               <a:avLst/>
               <a:gdLst>
-                <a:gd name="textAreaLeft" fmla="*/ 0 w 18286200"/>
-                <a:gd name="textAreaRight" fmla="*/ 18288000 w 18286200"/>
-                <a:gd name="textAreaTop" fmla="*/ 0 h 10285200"/>
-                <a:gd name="textAreaBottom" fmla="*/ 10287000 h 10285200"/>
+                <a:gd name="textAreaLeft" fmla="*/ 0 w 18285840"/>
+                <a:gd name="textAreaRight" fmla="*/ 18288000 w 18285840"/>
+                <a:gd name="textAreaTop" fmla="*/ 0 h 10284840"/>
+                <a:gd name="textAreaBottom" fmla="*/ 10287000 h 10284840"/>
               </a:gdLst>
               <a:ahLst/>
               <a:rect l="textAreaLeft" t="textAreaTop" r="textAreaRight" b="textAreaBottom"/>
@@ -5197,9 +5197,9 @@
           <p:grpSpPr>
             <a:xfrm>
               <a:off x="13716000" y="1589760"/>
-              <a:ext cx="1331640" cy="1848600"/>
+              <a:ext cx="1331280" cy="1848240"/>
               <a:chOff x="13716000" y="1589760"/>
-              <a:chExt cx="1331640" cy="1848600"/>
+              <a:chExt cx="1331280" cy="1848240"/>
             </a:xfrm>
           </p:grpSpPr>
           <p:sp>
@@ -5211,15 +5211,15 @@
             <p:spPr>
               <a:xfrm>
                 <a:off x="13716000" y="1770480"/>
-                <a:ext cx="1331640" cy="1667880"/>
+                <a:ext cx="1331280" cy="1667520"/>
               </a:xfrm>
               <a:custGeom>
                 <a:avLst/>
                 <a:gdLst>
-                  <a:gd name="textAreaLeft" fmla="*/ 0 w 1331640"/>
-                  <a:gd name="textAreaRight" fmla="*/ 1333440 w 1331640"/>
-                  <a:gd name="textAreaTop" fmla="*/ 0 h 1667880"/>
-                  <a:gd name="textAreaBottom" fmla="*/ 1669680 h 1667880"/>
+                  <a:gd name="textAreaLeft" fmla="*/ 0 w 1331280"/>
+                  <a:gd name="textAreaRight" fmla="*/ 1333440 w 1331280"/>
+                  <a:gd name="textAreaTop" fmla="*/ 0 h 1667520"/>
+                  <a:gd name="textAreaBottom" fmla="*/ 1669680 h 1667520"/>
                 </a:gdLst>
                 <a:ahLst/>
                 <a:rect l="textAreaLeft" t="textAreaTop" r="textAreaRight" b="textAreaBottom"/>
@@ -5282,7 +5282,7 @@
             <p:spPr>
               <a:xfrm>
                 <a:off x="13716000" y="1589760"/>
-                <a:ext cx="1331640" cy="1848600"/>
+                <a:ext cx="1331280" cy="1848240"/>
               </a:xfrm>
               <a:prstGeom prst="rect">
                 <a:avLst/>
@@ -5328,7 +5328,7 @@
         <p:spPr>
           <a:xfrm>
             <a:off x="4486320" y="593640"/>
-            <a:ext cx="9313560" cy="5486040"/>
+            <a:ext cx="9313200" cy="5486040"/>
           </a:xfrm>
           <a:prstGeom prst="rect">
             <a:avLst/>
@@ -5428,15 +5428,15 @@
         <p:spPr>
           <a:xfrm>
             <a:off x="8751960" y="4398840"/>
-            <a:ext cx="10916640" cy="4611240"/>
+            <a:ext cx="10916280" cy="4610880"/>
           </a:xfrm>
           <a:custGeom>
             <a:avLst/>
             <a:gdLst>
-              <a:gd name="textAreaLeft" fmla="*/ 0 w 10916640"/>
-              <a:gd name="textAreaRight" fmla="*/ 10918440 w 10916640"/>
-              <a:gd name="textAreaTop" fmla="*/ 0 h 4611240"/>
-              <a:gd name="textAreaBottom" fmla="*/ 4613040 h 4611240"/>
+              <a:gd name="textAreaLeft" fmla="*/ 0 w 10916280"/>
+              <a:gd name="textAreaRight" fmla="*/ 10918440 w 10916280"/>
+              <a:gd name="textAreaTop" fmla="*/ 0 h 4610880"/>
+              <a:gd name="textAreaBottom" fmla="*/ 4613040 h 4610880"/>
             </a:gdLst>
             <a:ahLst/>
             <a:rect l="textAreaLeft" t="textAreaTop" r="textAreaRight" b="textAreaBottom"/>
@@ -5504,7 +5504,7 @@
         <p:spPr>
           <a:xfrm>
             <a:off x="15163920" y="9487080"/>
-            <a:ext cx="3122280" cy="638280"/>
+            <a:ext cx="3121920" cy="638280"/>
           </a:xfrm>
           <a:prstGeom prst="rect">
             <a:avLst/>
@@ -5616,7 +5616,7 @@
         <p:spPr>
           <a:xfrm>
             <a:off x="1028880" y="1019160"/>
-            <a:ext cx="14285880" cy="1371240"/>
+            <a:ext cx="14285520" cy="1371240"/>
           </a:xfrm>
           <a:prstGeom prst="rect">
             <a:avLst/>
@@ -5680,7 +5680,7 @@
         <p:spPr>
           <a:xfrm>
             <a:off x="5283720" y="4005360"/>
-            <a:ext cx="4030920" cy="487440"/>
+            <a:ext cx="4030560" cy="487440"/>
           </a:xfrm>
           <a:prstGeom prst="rect">
             <a:avLst/>
@@ -5737,7 +5737,7 @@
         <p:spPr>
           <a:xfrm>
             <a:off x="1028880" y="6998400"/>
-            <a:ext cx="3868920" cy="487440"/>
+            <a:ext cx="3868560" cy="487440"/>
           </a:xfrm>
           <a:prstGeom prst="rect">
             <a:avLst/>
@@ -5794,7 +5794,7 @@
         <p:spPr>
           <a:xfrm>
             <a:off x="5283720" y="6998400"/>
-            <a:ext cx="4030920" cy="487440"/>
+            <a:ext cx="4030560" cy="487440"/>
           </a:xfrm>
           <a:prstGeom prst="rect">
             <a:avLst/>
@@ -5851,7 +5851,7 @@
         <p:spPr>
           <a:xfrm>
             <a:off x="1028880" y="4686840"/>
-            <a:ext cx="3868920" cy="852840"/>
+            <a:ext cx="3868560" cy="852840"/>
           </a:xfrm>
           <a:prstGeom prst="rect">
             <a:avLst/>
@@ -5908,7 +5908,7 @@
         <p:spPr>
           <a:xfrm>
             <a:off x="5283720" y="4686840"/>
-            <a:ext cx="3868920" cy="852840"/>
+            <a:ext cx="3868560" cy="852840"/>
           </a:xfrm>
           <a:prstGeom prst="rect">
             <a:avLst/>
@@ -5965,7 +5965,7 @@
         <p:spPr>
           <a:xfrm>
             <a:off x="1028880" y="7679880"/>
-            <a:ext cx="3978360" cy="852840"/>
+            <a:ext cx="3978000" cy="852840"/>
           </a:xfrm>
           <a:prstGeom prst="rect">
             <a:avLst/>
@@ -6022,7 +6022,7 @@
         <p:spPr>
           <a:xfrm>
             <a:off x="5283720" y="7679880"/>
-            <a:ext cx="3978360" cy="852840"/>
+            <a:ext cx="3978000" cy="852840"/>
           </a:xfrm>
           <a:prstGeom prst="rect">
             <a:avLst/>
@@ -6116,7 +6116,7 @@
         <p:spPr>
           <a:xfrm>
             <a:off x="1028880" y="1019160"/>
-            <a:ext cx="14285880" cy="1371240"/>
+            <a:ext cx="14285520" cy="1371240"/>
           </a:xfrm>
           <a:prstGeom prst="rect">
             <a:avLst/>
@@ -6180,7 +6180,7 @@
         <p:spPr>
           <a:xfrm>
             <a:off x="1028880" y="4005360"/>
-            <a:ext cx="3868920" cy="487440"/>
+            <a:ext cx="3868560" cy="487440"/>
           </a:xfrm>
           <a:prstGeom prst="rect">
             <a:avLst/>
@@ -6237,7 +6237,7 @@
         <p:spPr>
           <a:xfrm>
             <a:off x="5283720" y="4005360"/>
-            <a:ext cx="4030920" cy="487440"/>
+            <a:ext cx="4030560" cy="487440"/>
           </a:xfrm>
           <a:prstGeom prst="rect">
             <a:avLst/>
@@ -6294,7 +6294,7 @@
         <p:spPr>
           <a:xfrm>
             <a:off x="1028880" y="6998400"/>
-            <a:ext cx="3868920" cy="487440"/>
+            <a:ext cx="3868560" cy="487440"/>
           </a:xfrm>
           <a:prstGeom prst="rect">
             <a:avLst/>
@@ -6351,7 +6351,7 @@
         <p:spPr>
           <a:xfrm>
             <a:off x="5283720" y="6998400"/>
-            <a:ext cx="4030920" cy="487440"/>
+            <a:ext cx="4030560" cy="487440"/>
           </a:xfrm>
           <a:prstGeom prst="rect">
             <a:avLst/>
@@ -6408,7 +6408,7 @@
         <p:spPr>
           <a:xfrm>
             <a:off x="1028880" y="4686840"/>
-            <a:ext cx="3868920" cy="3412440"/>
+            <a:ext cx="3868560" cy="3412440"/>
           </a:xfrm>
           <a:prstGeom prst="rect">
             <a:avLst/>
@@ -6471,7 +6471,7 @@
         <p:spPr>
           <a:xfrm>
             <a:off x="5283720" y="4686840"/>
-            <a:ext cx="3868920" cy="852840"/>
+            <a:ext cx="3868560" cy="852840"/>
           </a:xfrm>
           <a:prstGeom prst="rect">
             <a:avLst/>
@@ -6528,7 +6528,7 @@
         <p:spPr>
           <a:xfrm>
             <a:off x="1028880" y="7679880"/>
-            <a:ext cx="3978360" cy="852840"/>
+            <a:ext cx="3978000" cy="852840"/>
           </a:xfrm>
           <a:prstGeom prst="rect">
             <a:avLst/>
@@ -6585,7 +6585,7 @@
         <p:spPr>
           <a:xfrm>
             <a:off x="5283720" y="7679880"/>
-            <a:ext cx="3978360" cy="852840"/>
+            <a:ext cx="3978000" cy="852840"/>
           </a:xfrm>
           <a:prstGeom prst="rect">
             <a:avLst/>
@@ -6679,7 +6679,7 @@
         <p:spPr>
           <a:xfrm>
             <a:off x="1028880" y="1019160"/>
-            <a:ext cx="14285880" cy="1371240"/>
+            <a:ext cx="14285520" cy="1371240"/>
           </a:xfrm>
           <a:prstGeom prst="rect">
             <a:avLst/>
@@ -6743,7 +6743,7 @@
         <p:spPr>
           <a:xfrm>
             <a:off x="1028880" y="4005360"/>
-            <a:ext cx="3868920" cy="487440"/>
+            <a:ext cx="3868560" cy="487440"/>
           </a:xfrm>
           <a:prstGeom prst="rect">
             <a:avLst/>
@@ -6800,7 +6800,7 @@
         <p:spPr>
           <a:xfrm>
             <a:off x="5283720" y="4005360"/>
-            <a:ext cx="4030920" cy="487440"/>
+            <a:ext cx="4030560" cy="487440"/>
           </a:xfrm>
           <a:prstGeom prst="rect">
             <a:avLst/>
@@ -6857,7 +6857,7 @@
         <p:spPr>
           <a:xfrm>
             <a:off x="1028880" y="6998400"/>
-            <a:ext cx="3868920" cy="487440"/>
+            <a:ext cx="3868560" cy="487440"/>
           </a:xfrm>
           <a:prstGeom prst="rect">
             <a:avLst/>
@@ -6914,7 +6914,7 @@
         <p:spPr>
           <a:xfrm>
             <a:off x="5283720" y="6998400"/>
-            <a:ext cx="4030920" cy="487440"/>
+            <a:ext cx="4030560" cy="487440"/>
           </a:xfrm>
           <a:prstGeom prst="rect">
             <a:avLst/>
@@ -6971,7 +6971,7 @@
         <p:spPr>
           <a:xfrm>
             <a:off x="1028880" y="4686840"/>
-            <a:ext cx="3868920" cy="852840"/>
+            <a:ext cx="3868560" cy="852840"/>
           </a:xfrm>
           <a:prstGeom prst="rect">
             <a:avLst/>
@@ -7028,7 +7028,7 @@
         <p:spPr>
           <a:xfrm>
             <a:off x="5283720" y="4686840"/>
-            <a:ext cx="3868920" cy="3839040"/>
+            <a:ext cx="3868560" cy="3839040"/>
           </a:xfrm>
           <a:prstGeom prst="rect">
             <a:avLst/>
@@ -7098,7 +7098,7 @@
         <p:spPr>
           <a:xfrm>
             <a:off x="1028880" y="7679880"/>
-            <a:ext cx="3978360" cy="852840"/>
+            <a:ext cx="3978000" cy="852840"/>
           </a:xfrm>
           <a:prstGeom prst="rect">
             <a:avLst/>
@@ -7155,7 +7155,7 @@
         <p:spPr>
           <a:xfrm>
             <a:off x="5283720" y="7679880"/>
-            <a:ext cx="3978360" cy="852840"/>
+            <a:ext cx="3978000" cy="852840"/>
           </a:xfrm>
           <a:prstGeom prst="rect">
             <a:avLst/>
@@ -7212,7 +7212,7 @@
         <p:spPr>
           <a:xfrm>
             <a:off x="10122480" y="2723400"/>
-            <a:ext cx="7725600" cy="5850360"/>
+            <a:ext cx="7725240" cy="5850360"/>
           </a:xfrm>
           <a:prstGeom prst="rect">
             <a:avLst/>
@@ -7487,7 +7487,7 @@
         <p:spPr>
           <a:xfrm>
             <a:off x="1028880" y="1019160"/>
-            <a:ext cx="14285880" cy="1371240"/>
+            <a:ext cx="14285520" cy="1371240"/>
           </a:xfrm>
           <a:prstGeom prst="rect">
             <a:avLst/>
@@ -7551,7 +7551,7 @@
         <p:spPr>
           <a:xfrm>
             <a:off x="1028880" y="4005360"/>
-            <a:ext cx="3868920" cy="487440"/>
+            <a:ext cx="3868560" cy="487440"/>
           </a:xfrm>
           <a:prstGeom prst="rect">
             <a:avLst/>
@@ -7608,7 +7608,7 @@
         <p:spPr>
           <a:xfrm>
             <a:off x="5283720" y="4005360"/>
-            <a:ext cx="4030920" cy="487440"/>
+            <a:ext cx="4030560" cy="487440"/>
           </a:xfrm>
           <a:prstGeom prst="rect">
             <a:avLst/>
@@ -7665,7 +7665,7 @@
         <p:spPr>
           <a:xfrm>
             <a:off x="1028880" y="6998400"/>
-            <a:ext cx="3868920" cy="487440"/>
+            <a:ext cx="3868560" cy="487440"/>
           </a:xfrm>
           <a:prstGeom prst="rect">
             <a:avLst/>
@@ -7722,7 +7722,7 @@
         <p:spPr>
           <a:xfrm>
             <a:off x="5283720" y="6998400"/>
-            <a:ext cx="4030920" cy="487440"/>
+            <a:ext cx="4030560" cy="487440"/>
           </a:xfrm>
           <a:prstGeom prst="rect">
             <a:avLst/>
@@ -7779,7 +7779,7 @@
         <p:spPr>
           <a:xfrm>
             <a:off x="1028880" y="4686840"/>
-            <a:ext cx="3868920" cy="852840"/>
+            <a:ext cx="3868560" cy="852840"/>
           </a:xfrm>
           <a:prstGeom prst="rect">
             <a:avLst/>
@@ -7836,7 +7836,7 @@
         <p:spPr>
           <a:xfrm>
             <a:off x="5283720" y="4686840"/>
-            <a:ext cx="3868920" cy="852840"/>
+            <a:ext cx="3868560" cy="852840"/>
           </a:xfrm>
           <a:prstGeom prst="rect">
             <a:avLst/>
@@ -7893,7 +7893,7 @@
         <p:spPr>
           <a:xfrm>
             <a:off x="1028880" y="7679880"/>
-            <a:ext cx="3978360" cy="852840"/>
+            <a:ext cx="3978000" cy="852840"/>
           </a:xfrm>
           <a:prstGeom prst="rect">
             <a:avLst/>
@@ -7950,7 +7950,7 @@
         <p:spPr>
           <a:xfrm>
             <a:off x="5283720" y="7679880"/>
-            <a:ext cx="3978360" cy="852840"/>
+            <a:ext cx="3978000" cy="852840"/>
           </a:xfrm>
           <a:prstGeom prst="rect">
             <a:avLst/>
@@ -8044,9 +8044,9 @@
         <p:grpSpPr>
           <a:xfrm>
             <a:off x="7492320" y="3423240"/>
-            <a:ext cx="2924280" cy="2924280"/>
+            <a:ext cx="2923920" cy="2923920"/>
             <a:chOff x="7492320" y="3423240"/>
-            <a:chExt cx="2924280" cy="2924280"/>
+            <a:chExt cx="2923920" cy="2923920"/>
           </a:xfrm>
         </p:grpSpPr>
         <p:sp>
@@ -8058,15 +8058,15 @@
           <p:spPr>
             <a:xfrm>
               <a:off x="7492320" y="3423240"/>
-              <a:ext cx="2924280" cy="2924280"/>
+              <a:ext cx="2923920" cy="2923920"/>
             </a:xfrm>
             <a:custGeom>
               <a:avLst/>
               <a:gdLst>
-                <a:gd name="textAreaLeft" fmla="*/ 0 w 2924280"/>
-                <a:gd name="textAreaRight" fmla="*/ 2926080 w 2924280"/>
-                <a:gd name="textAreaTop" fmla="*/ 0 h 2924280"/>
-                <a:gd name="textAreaBottom" fmla="*/ 2926080 h 2924280"/>
+                <a:gd name="textAreaLeft" fmla="*/ 0 w 2923920"/>
+                <a:gd name="textAreaRight" fmla="*/ 2926080 w 2923920"/>
+                <a:gd name="textAreaTop" fmla="*/ 0 h 2923920"/>
+                <a:gd name="textAreaBottom" fmla="*/ 2926080 h 2923920"/>
               </a:gdLst>
               <a:ahLst/>
               <a:rect l="textAreaLeft" t="textAreaTop" r="textAreaRight" b="textAreaBottom"/>
@@ -8143,9 +8143,9 @@
         <p:grpSpPr>
           <a:xfrm>
             <a:off x="3193920" y="3423240"/>
-            <a:ext cx="2924280" cy="2924280"/>
+            <a:ext cx="2923920" cy="2923920"/>
             <a:chOff x="3193920" y="3423240"/>
-            <a:chExt cx="2924280" cy="2924280"/>
+            <a:chExt cx="2923920" cy="2923920"/>
           </a:xfrm>
         </p:grpSpPr>
         <p:sp>
@@ -8157,15 +8157,15 @@
           <p:spPr>
             <a:xfrm>
               <a:off x="3193920" y="3423240"/>
-              <a:ext cx="2924280" cy="2924280"/>
+              <a:ext cx="2923920" cy="2923920"/>
             </a:xfrm>
             <a:custGeom>
               <a:avLst/>
               <a:gdLst>
-                <a:gd name="textAreaLeft" fmla="*/ 0 w 2924280"/>
-                <a:gd name="textAreaRight" fmla="*/ 2926080 w 2924280"/>
-                <a:gd name="textAreaTop" fmla="*/ 0 h 2924280"/>
-                <a:gd name="textAreaBottom" fmla="*/ 2926080 h 2924280"/>
+                <a:gd name="textAreaLeft" fmla="*/ 0 w 2923920"/>
+                <a:gd name="textAreaRight" fmla="*/ 2926080 w 2923920"/>
+                <a:gd name="textAreaTop" fmla="*/ 0 h 2923920"/>
+                <a:gd name="textAreaBottom" fmla="*/ 2926080 h 2923920"/>
               </a:gdLst>
               <a:ahLst/>
               <a:rect l="textAreaLeft" t="textAreaTop" r="textAreaRight" b="textAreaBottom"/>
@@ -8242,9 +8242,9 @@
         <p:grpSpPr>
           <a:xfrm>
             <a:off x="11790720" y="3423240"/>
-            <a:ext cx="2924280" cy="2924280"/>
+            <a:ext cx="2923920" cy="2923920"/>
             <a:chOff x="11790720" y="3423240"/>
-            <a:chExt cx="2924280" cy="2924280"/>
+            <a:chExt cx="2923920" cy="2923920"/>
           </a:xfrm>
         </p:grpSpPr>
         <p:sp>
@@ -8256,15 +8256,15 @@
           <p:spPr>
             <a:xfrm>
               <a:off x="11790720" y="3423240"/>
-              <a:ext cx="2924280" cy="2924280"/>
+              <a:ext cx="2923920" cy="2923920"/>
             </a:xfrm>
             <a:custGeom>
               <a:avLst/>
               <a:gdLst>
-                <a:gd name="textAreaLeft" fmla="*/ 0 w 2924280"/>
-                <a:gd name="textAreaRight" fmla="*/ 2926080 w 2924280"/>
-                <a:gd name="textAreaTop" fmla="*/ 0 h 2924280"/>
-                <a:gd name="textAreaBottom" fmla="*/ 2926080 h 2924280"/>
+                <a:gd name="textAreaLeft" fmla="*/ 0 w 2923920"/>
+                <a:gd name="textAreaRight" fmla="*/ 2926080 w 2923920"/>
+                <a:gd name="textAreaTop" fmla="*/ 0 h 2923920"/>
+                <a:gd name="textAreaBottom" fmla="*/ 2926080 h 2923920"/>
               </a:gdLst>
               <a:ahLst/>
               <a:rect l="textAreaLeft" t="textAreaTop" r="textAreaRight" b="textAreaBottom"/>
@@ -8341,7 +8341,7 @@
         <p:spPr>
           <a:xfrm>
             <a:off x="890280" y="1019160"/>
-            <a:ext cx="16505640" cy="1371240"/>
+            <a:ext cx="16505280" cy="1371240"/>
           </a:xfrm>
           <a:prstGeom prst="rect">
             <a:avLst/>
@@ -8408,7 +8408,7 @@
         <p:spPr>
           <a:xfrm>
             <a:off x="7302240" y="6819480"/>
-            <a:ext cx="3304440" cy="487440"/>
+            <a:ext cx="3304080" cy="487440"/>
           </a:xfrm>
           <a:prstGeom prst="rect">
             <a:avLst/>
@@ -8465,7 +8465,7 @@
         <p:spPr>
           <a:xfrm>
             <a:off x="7302240" y="7610400"/>
-            <a:ext cx="3304440" cy="852840"/>
+            <a:ext cx="3304080" cy="852840"/>
           </a:xfrm>
           <a:prstGeom prst="rect">
             <a:avLst/>
@@ -8522,7 +8522,7 @@
         <p:spPr>
           <a:xfrm>
             <a:off x="3003840" y="6819480"/>
-            <a:ext cx="3304440" cy="487440"/>
+            <a:ext cx="3304080" cy="487440"/>
           </a:xfrm>
           <a:prstGeom prst="rect">
             <a:avLst/>
@@ -8579,7 +8579,7 @@
         <p:spPr>
           <a:xfrm>
             <a:off x="3003840" y="7610400"/>
-            <a:ext cx="3304440" cy="852840"/>
+            <a:ext cx="3304080" cy="852840"/>
           </a:xfrm>
           <a:prstGeom prst="rect">
             <a:avLst/>
@@ -8636,7 +8636,7 @@
         <p:spPr>
           <a:xfrm>
             <a:off x="11600640" y="6819480"/>
-            <a:ext cx="3304440" cy="487440"/>
+            <a:ext cx="3304080" cy="487440"/>
           </a:xfrm>
           <a:prstGeom prst="rect">
             <a:avLst/>
@@ -8693,7 +8693,7 @@
         <p:spPr>
           <a:xfrm>
             <a:off x="11600640" y="7610400"/>
-            <a:ext cx="3304440" cy="852840"/>
+            <a:ext cx="3304080" cy="852840"/>
           </a:xfrm>
           <a:prstGeom prst="rect">
             <a:avLst/>
@@ -8787,7 +8787,7 @@
         <p:spPr>
           <a:xfrm>
             <a:off x="1028880" y="1019160"/>
-            <a:ext cx="14285880" cy="1371240"/>
+            <a:ext cx="14285520" cy="1371240"/>
           </a:xfrm>
           <a:prstGeom prst="rect">
             <a:avLst/>
@@ -8851,7 +8851,7 @@
         <p:spPr>
           <a:xfrm>
             <a:off x="1028880" y="4005360"/>
-            <a:ext cx="3868920" cy="487440"/>
+            <a:ext cx="3868560" cy="487440"/>
           </a:xfrm>
           <a:prstGeom prst="rect">
             <a:avLst/>
@@ -8908,7 +8908,7 @@
         <p:spPr>
           <a:xfrm>
             <a:off x="5283720" y="4005360"/>
-            <a:ext cx="4030920" cy="487440"/>
+            <a:ext cx="4030560" cy="487440"/>
           </a:xfrm>
           <a:prstGeom prst="rect">
             <a:avLst/>
@@ -8965,7 +8965,7 @@
         <p:spPr>
           <a:xfrm>
             <a:off x="1028880" y="6998400"/>
-            <a:ext cx="3868920" cy="487440"/>
+            <a:ext cx="3868560" cy="487440"/>
           </a:xfrm>
           <a:prstGeom prst="rect">
             <a:avLst/>
@@ -9022,7 +9022,7 @@
         <p:spPr>
           <a:xfrm>
             <a:off x="5283720" y="6998400"/>
-            <a:ext cx="4030920" cy="487440"/>
+            <a:ext cx="4030560" cy="487440"/>
           </a:xfrm>
           <a:prstGeom prst="rect">
             <a:avLst/>
@@ -9079,7 +9079,7 @@
         <p:spPr>
           <a:xfrm>
             <a:off x="1028880" y="4686840"/>
-            <a:ext cx="3868920" cy="852840"/>
+            <a:ext cx="3868560" cy="852840"/>
           </a:xfrm>
           <a:prstGeom prst="rect">
             <a:avLst/>
@@ -9136,7 +9136,7 @@
         <p:spPr>
           <a:xfrm>
             <a:off x="5283720" y="4686840"/>
-            <a:ext cx="3868920" cy="852840"/>
+            <a:ext cx="3868560" cy="852840"/>
           </a:xfrm>
           <a:prstGeom prst="rect">
             <a:avLst/>
@@ -9193,7 +9193,7 @@
         <p:spPr>
           <a:xfrm>
             <a:off x="1028880" y="7679880"/>
-            <a:ext cx="3978360" cy="852840"/>
+            <a:ext cx="3978000" cy="852840"/>
           </a:xfrm>
           <a:prstGeom prst="rect">
             <a:avLst/>
@@ -9250,7 +9250,7 @@
         <p:spPr>
           <a:xfrm>
             <a:off x="5283720" y="7679880"/>
-            <a:ext cx="3978360" cy="852840"/>
+            <a:ext cx="3978000" cy="852840"/>
           </a:xfrm>
           <a:prstGeom prst="rect">
             <a:avLst/>
@@ -9344,7 +9344,7 @@
         <p:spPr>
           <a:xfrm>
             <a:off x="890280" y="1028880"/>
-            <a:ext cx="16505640" cy="1340640"/>
+            <a:ext cx="16505280" cy="1340640"/>
           </a:xfrm>
           <a:prstGeom prst="rect">
             <a:avLst/>
@@ -9411,7 +9411,7 @@
         <p:spPr>
           <a:xfrm>
             <a:off x="7848720" y="7772400"/>
-            <a:ext cx="3684960" cy="426240"/>
+            <a:ext cx="3684600" cy="426240"/>
           </a:xfrm>
           <a:prstGeom prst="rect">
             <a:avLst/>
@@ -9468,7 +9468,7 @@
         <p:spPr>
           <a:xfrm>
             <a:off x="7848720" y="6591240"/>
-            <a:ext cx="3684960" cy="975240"/>
+            <a:ext cx="3684600" cy="975240"/>
           </a:xfrm>
           <a:prstGeom prst="rect">
             <a:avLst/>
@@ -9538,15 +9538,15 @@
         <p:spPr>
           <a:xfrm>
             <a:off x="8336520" y="3328560"/>
-            <a:ext cx="2320560" cy="2709720"/>
+            <a:ext cx="2320200" cy="2709360"/>
           </a:xfrm>
           <a:custGeom>
             <a:avLst/>
             <a:gdLst>
-              <a:gd name="textAreaLeft" fmla="*/ 0 w 2320560"/>
-              <a:gd name="textAreaRight" fmla="*/ 2322360 w 2320560"/>
-              <a:gd name="textAreaTop" fmla="*/ 0 h 2709720"/>
-              <a:gd name="textAreaBottom" fmla="*/ 2711520 h 2709720"/>
+              <a:gd name="textAreaLeft" fmla="*/ 0 w 2320200"/>
+              <a:gd name="textAreaRight" fmla="*/ 2322360 w 2320200"/>
+              <a:gd name="textAreaTop" fmla="*/ 0 h 2709360"/>
+              <a:gd name="textAreaBottom" fmla="*/ 2711520 h 2709360"/>
             </a:gdLst>
             <a:ahLst/>
             <a:rect l="textAreaLeft" t="textAreaTop" r="textAreaRight" b="textAreaBottom"/>
@@ -9620,7 +9620,7 @@
         <p:spPr>
           <a:xfrm>
             <a:off x="12313800" y="6606000"/>
-            <a:ext cx="3792600" cy="975240"/>
+            <a:ext cx="3792240" cy="975240"/>
           </a:xfrm>
           <a:prstGeom prst="rect">
             <a:avLst/>
@@ -9703,7 +9703,7 @@
         <p:spPr>
           <a:xfrm>
             <a:off x="12496680" y="7772400"/>
-            <a:ext cx="3304440" cy="852840"/>
+            <a:ext cx="3304080" cy="852840"/>
           </a:xfrm>
           <a:prstGeom prst="rect">
             <a:avLst/>
@@ -9760,15 +9760,15 @@
         <p:spPr>
           <a:xfrm>
             <a:off x="12557880" y="3328560"/>
-            <a:ext cx="2760120" cy="2709720"/>
+            <a:ext cx="2759760" cy="2709360"/>
           </a:xfrm>
           <a:custGeom>
             <a:avLst/>
             <a:gdLst>
-              <a:gd name="textAreaLeft" fmla="*/ 0 w 2760120"/>
-              <a:gd name="textAreaRight" fmla="*/ 2761920 w 2760120"/>
-              <a:gd name="textAreaTop" fmla="*/ 0 h 2709720"/>
-              <a:gd name="textAreaBottom" fmla="*/ 2711520 h 2709720"/>
+              <a:gd name="textAreaLeft" fmla="*/ 0 w 2759760"/>
+              <a:gd name="textAreaRight" fmla="*/ 2761920 w 2759760"/>
+              <a:gd name="textAreaTop" fmla="*/ 0 h 2709360"/>
+              <a:gd name="textAreaBottom" fmla="*/ 2711520 h 2709360"/>
             </a:gdLst>
             <a:ahLst/>
             <a:rect l="textAreaLeft" t="textAreaTop" r="textAreaRight" b="textAreaBottom"/>
@@ -9842,15 +9842,15 @@
         <p:spPr>
           <a:xfrm>
             <a:off x="2902680" y="3444120"/>
-            <a:ext cx="2916360" cy="2916360"/>
+            <a:ext cx="2916000" cy="2916000"/>
           </a:xfrm>
           <a:custGeom>
             <a:avLst/>
             <a:gdLst>
-              <a:gd name="textAreaLeft" fmla="*/ 0 w 2916360"/>
-              <a:gd name="textAreaRight" fmla="*/ 2918160 w 2916360"/>
-              <a:gd name="textAreaTop" fmla="*/ 0 h 2916360"/>
-              <a:gd name="textAreaBottom" fmla="*/ 2918160 h 2916360"/>
+              <a:gd name="textAreaLeft" fmla="*/ 0 w 2916000"/>
+              <a:gd name="textAreaRight" fmla="*/ 2918160 w 2916000"/>
+              <a:gd name="textAreaTop" fmla="*/ 0 h 2916000"/>
+              <a:gd name="textAreaBottom" fmla="*/ 2918160 h 2916000"/>
             </a:gdLst>
             <a:ahLst/>
             <a:rect l="textAreaLeft" t="textAreaTop" r="textAreaRight" b="textAreaBottom"/>
@@ -9924,7 +9924,7 @@
         <p:spPr>
           <a:xfrm>
             <a:off x="1988280" y="6629400"/>
-            <a:ext cx="4869000" cy="975240"/>
+            <a:ext cx="4868640" cy="975240"/>
           </a:xfrm>
           <a:prstGeom prst="rect">
             <a:avLst/>
@@ -9981,7 +9981,7 @@
         <p:spPr>
           <a:xfrm>
             <a:off x="2743200" y="7772400"/>
-            <a:ext cx="3304440" cy="852840"/>
+            <a:ext cx="3304080" cy="852840"/>
           </a:xfrm>
           <a:prstGeom prst="rect">
             <a:avLst/>
@@ -10075,15 +10075,15 @@
         <p:spPr>
           <a:xfrm>
             <a:off x="12801600" y="6515280"/>
-            <a:ext cx="1141200" cy="1141200"/>
+            <a:ext cx="1140840" cy="1140840"/>
           </a:xfrm>
           <a:custGeom>
             <a:avLst/>
             <a:gdLst>
-              <a:gd name="textAreaLeft" fmla="*/ 0 w 1141200"/>
-              <a:gd name="textAreaRight" fmla="*/ 1143000 w 1141200"/>
-              <a:gd name="textAreaTop" fmla="*/ 0 h 1141200"/>
-              <a:gd name="textAreaBottom" fmla="*/ 1143000 h 1141200"/>
+              <a:gd name="textAreaLeft" fmla="*/ 0 w 1140840"/>
+              <a:gd name="textAreaRight" fmla="*/ 1143000 w 1140840"/>
+              <a:gd name="textAreaTop" fmla="*/ 0 h 1140840"/>
+              <a:gd name="textAreaBottom" fmla="*/ 1143000 h 1140840"/>
             </a:gdLst>
             <a:ahLst/>
             <a:rect l="textAreaLeft" t="textAreaTop" r="textAreaRight" b="textAreaBottom"/>
@@ -10157,15 +10157,15 @@
         <p:spPr>
           <a:xfrm>
             <a:off x="12801600" y="4305240"/>
-            <a:ext cx="1141200" cy="1141200"/>
+            <a:ext cx="1140840" cy="1140840"/>
           </a:xfrm>
           <a:custGeom>
             <a:avLst/>
             <a:gdLst>
-              <a:gd name="textAreaLeft" fmla="*/ 0 w 1141200"/>
-              <a:gd name="textAreaRight" fmla="*/ 1143000 w 1141200"/>
-              <a:gd name="textAreaTop" fmla="*/ 0 h 1141200"/>
-              <a:gd name="textAreaBottom" fmla="*/ 1143000 h 1141200"/>
+              <a:gd name="textAreaLeft" fmla="*/ 0 w 1140840"/>
+              <a:gd name="textAreaRight" fmla="*/ 1143000 w 1140840"/>
+              <a:gd name="textAreaTop" fmla="*/ 0 h 1140840"/>
+              <a:gd name="textAreaBottom" fmla="*/ 1143000 h 1140840"/>
             </a:gdLst>
             <a:ahLst/>
             <a:rect l="textAreaLeft" t="textAreaTop" r="textAreaRight" b="textAreaBottom"/>
@@ -10239,9 +10239,9 @@
         <p:grpSpPr>
           <a:xfrm>
             <a:off x="12649320" y="4610160"/>
-            <a:ext cx="1217520" cy="3350880"/>
+            <a:ext cx="1217160" cy="3350520"/>
             <a:chOff x="12649320" y="4610160"/>
-            <a:chExt cx="1217520" cy="3350880"/>
+            <a:chExt cx="1217160" cy="3350520"/>
           </a:xfrm>
         </p:grpSpPr>
         <p:sp>
@@ -10253,7 +10253,7 @@
           <p:spPr>
             <a:xfrm>
               <a:off x="12649320" y="6819840"/>
-              <a:ext cx="1217520" cy="1141200"/>
+              <a:ext cx="1217160" cy="1140840"/>
             </a:xfrm>
             <a:prstGeom prst="irregularSeal1">
               <a:avLst/>
@@ -10310,7 +10310,7 @@
           <p:spPr>
             <a:xfrm>
               <a:off x="12649320" y="4610160"/>
-              <a:ext cx="1217520" cy="1141200"/>
+              <a:ext cx="1217160" cy="1140840"/>
             </a:xfrm>
             <a:prstGeom prst="irregularSeal1">
               <a:avLst/>
@@ -10368,7 +10368,7 @@
         <p:spPr>
           <a:xfrm>
             <a:off x="887040" y="731520"/>
-            <a:ext cx="16505640" cy="1340640"/>
+            <a:ext cx="16505280" cy="1340640"/>
           </a:xfrm>
           <a:prstGeom prst="rect">
             <a:avLst/>
@@ -10435,15 +10435,15 @@
         <p:spPr>
           <a:xfrm>
             <a:off x="10515600" y="5295960"/>
-            <a:ext cx="1141200" cy="1141200"/>
+            <a:ext cx="1140840" cy="1140840"/>
           </a:xfrm>
           <a:custGeom>
             <a:avLst/>
             <a:gdLst>
-              <a:gd name="textAreaLeft" fmla="*/ 0 w 1141200"/>
-              <a:gd name="textAreaRight" fmla="*/ 1143000 w 1141200"/>
-              <a:gd name="textAreaTop" fmla="*/ 0 h 1141200"/>
-              <a:gd name="textAreaBottom" fmla="*/ 1143000 h 1141200"/>
+              <a:gd name="textAreaLeft" fmla="*/ 0 w 1140840"/>
+              <a:gd name="textAreaRight" fmla="*/ 1143000 w 1140840"/>
+              <a:gd name="textAreaTop" fmla="*/ 0 h 1140840"/>
+              <a:gd name="textAreaBottom" fmla="*/ 1143000 h 1140840"/>
             </a:gdLst>
             <a:ahLst/>
             <a:rect l="textAreaLeft" t="textAreaTop" r="textAreaRight" b="textAreaBottom"/>
@@ -10517,7 +10517,7 @@
         <p:spPr>
           <a:xfrm>
             <a:off x="1143000" y="3543480"/>
-            <a:ext cx="3868920" cy="487440"/>
+            <a:ext cx="3868560" cy="487440"/>
           </a:xfrm>
           <a:prstGeom prst="rect">
             <a:avLst/>
@@ -10574,7 +10574,7 @@
         <p:spPr>
           <a:xfrm>
             <a:off x="1143000" y="4305240"/>
-            <a:ext cx="5865480" cy="1279440"/>
+            <a:ext cx="5865120" cy="1279440"/>
           </a:xfrm>
           <a:prstGeom prst="rect">
             <a:avLst/>
@@ -10631,7 +10631,7 @@
         <p:spPr>
           <a:xfrm>
             <a:off x="1143000" y="6743880"/>
-            <a:ext cx="3868920" cy="487440"/>
+            <a:ext cx="3868560" cy="487440"/>
           </a:xfrm>
           <a:prstGeom prst="rect">
             <a:avLst/>
@@ -10688,7 +10688,7 @@
         <p:spPr>
           <a:xfrm>
             <a:off x="1143000" y="7505640"/>
-            <a:ext cx="6094080" cy="852840"/>
+            <a:ext cx="6093720" cy="852840"/>
           </a:xfrm>
           <a:prstGeom prst="rect">
             <a:avLst/>
@@ -10745,7 +10745,7 @@
         <p:spPr>
           <a:xfrm>
             <a:off x="10363320" y="5600880"/>
-            <a:ext cx="1217520" cy="1141200"/>
+            <a:ext cx="1217160" cy="1140840"/>
           </a:xfrm>
           <a:prstGeom prst="irregularSeal1">
             <a:avLst/>
@@ -10802,15 +10802,15 @@
         <p:spPr>
           <a:xfrm>
             <a:off x="7924680" y="5295960"/>
-            <a:ext cx="1141200" cy="1141200"/>
+            <a:ext cx="1140840" cy="1140840"/>
           </a:xfrm>
           <a:custGeom>
             <a:avLst/>
             <a:gdLst>
-              <a:gd name="textAreaLeft" fmla="*/ 0 w 1141200"/>
-              <a:gd name="textAreaRight" fmla="*/ 1143000 w 1141200"/>
-              <a:gd name="textAreaTop" fmla="*/ 0 h 1141200"/>
-              <a:gd name="textAreaBottom" fmla="*/ 1143000 h 1141200"/>
+              <a:gd name="textAreaLeft" fmla="*/ 0 w 1140840"/>
+              <a:gd name="textAreaRight" fmla="*/ 1143000 w 1140840"/>
+              <a:gd name="textAreaTop" fmla="*/ 0 h 1140840"/>
+              <a:gd name="textAreaBottom" fmla="*/ 1143000 h 1140840"/>
             </a:gdLst>
             <a:ahLst/>
             <a:rect l="textAreaLeft" t="textAreaTop" r="textAreaRight" b="textAreaBottom"/>
@@ -10884,7 +10884,7 @@
         <p:spPr>
           <a:xfrm>
             <a:off x="9220320" y="5524560"/>
-            <a:ext cx="1064880" cy="684000"/>
+            <a:ext cx="1064520" cy="683640"/>
           </a:xfrm>
           <a:prstGeom prst="rightArrow">
             <a:avLst>
@@ -10944,15 +10944,15 @@
         <p:spPr>
           <a:xfrm>
             <a:off x="15468480" y="4610160"/>
-            <a:ext cx="1141200" cy="1141200"/>
+            <a:ext cx="1140840" cy="1140840"/>
           </a:xfrm>
           <a:custGeom>
             <a:avLst/>
             <a:gdLst>
-              <a:gd name="textAreaLeft" fmla="*/ 0 w 1141200"/>
-              <a:gd name="textAreaRight" fmla="*/ 1143000 w 1141200"/>
-              <a:gd name="textAreaTop" fmla="*/ 0 h 1141200"/>
-              <a:gd name="textAreaBottom" fmla="*/ 1143000 h 1141200"/>
+              <a:gd name="textAreaLeft" fmla="*/ 0 w 1140840"/>
+              <a:gd name="textAreaRight" fmla="*/ 1143000 w 1140840"/>
+              <a:gd name="textAreaTop" fmla="*/ 0 h 1140840"/>
+              <a:gd name="textAreaBottom" fmla="*/ 1143000 h 1140840"/>
             </a:gdLst>
             <a:ahLst/>
             <a:rect l="textAreaLeft" t="textAreaTop" r="textAreaRight" b="textAreaBottom"/>
@@ -11026,15 +11026,15 @@
         <p:spPr>
           <a:xfrm>
             <a:off x="15468480" y="2933640"/>
-            <a:ext cx="1141200" cy="1141200"/>
+            <a:ext cx="1140840" cy="1140840"/>
           </a:xfrm>
           <a:custGeom>
             <a:avLst/>
             <a:gdLst>
-              <a:gd name="textAreaLeft" fmla="*/ 0 w 1141200"/>
-              <a:gd name="textAreaRight" fmla="*/ 1143000 w 1141200"/>
-              <a:gd name="textAreaTop" fmla="*/ 0 h 1141200"/>
-              <a:gd name="textAreaBottom" fmla="*/ 1143000 h 1141200"/>
+              <a:gd name="textAreaLeft" fmla="*/ 0 w 1140840"/>
+              <a:gd name="textAreaRight" fmla="*/ 1143000 w 1140840"/>
+              <a:gd name="textAreaTop" fmla="*/ 0 h 1140840"/>
+              <a:gd name="textAreaBottom" fmla="*/ 1143000 h 1140840"/>
             </a:gdLst>
             <a:ahLst/>
             <a:rect l="textAreaLeft" t="textAreaTop" r="textAreaRight" b="textAreaBottom"/>
@@ -11108,15 +11108,15 @@
         <p:spPr>
           <a:xfrm>
             <a:off x="15468480" y="8039160"/>
-            <a:ext cx="1141200" cy="1141200"/>
+            <a:ext cx="1140840" cy="1140840"/>
           </a:xfrm>
           <a:custGeom>
             <a:avLst/>
             <a:gdLst>
-              <a:gd name="textAreaLeft" fmla="*/ 0 w 1141200"/>
-              <a:gd name="textAreaRight" fmla="*/ 1143000 w 1141200"/>
-              <a:gd name="textAreaTop" fmla="*/ 0 h 1141200"/>
-              <a:gd name="textAreaBottom" fmla="*/ 1143000 h 1141200"/>
+              <a:gd name="textAreaLeft" fmla="*/ 0 w 1140840"/>
+              <a:gd name="textAreaRight" fmla="*/ 1143000 w 1140840"/>
+              <a:gd name="textAreaTop" fmla="*/ 0 h 1140840"/>
+              <a:gd name="textAreaBottom" fmla="*/ 1143000 h 1140840"/>
             </a:gdLst>
             <a:ahLst/>
             <a:rect l="textAreaLeft" t="textAreaTop" r="textAreaRight" b="textAreaBottom"/>
@@ -11190,15 +11190,15 @@
         <p:spPr>
           <a:xfrm>
             <a:off x="15468480" y="6362640"/>
-            <a:ext cx="1141200" cy="1141200"/>
+            <a:ext cx="1140840" cy="1140840"/>
           </a:xfrm>
           <a:custGeom>
             <a:avLst/>
             <a:gdLst>
-              <a:gd name="textAreaLeft" fmla="*/ 0 w 1141200"/>
-              <a:gd name="textAreaRight" fmla="*/ 1143000 w 1141200"/>
-              <a:gd name="textAreaTop" fmla="*/ 0 h 1141200"/>
-              <a:gd name="textAreaBottom" fmla="*/ 1143000 h 1141200"/>
+              <a:gd name="textAreaLeft" fmla="*/ 0 w 1140840"/>
+              <a:gd name="textAreaRight" fmla="*/ 1143000 w 1140840"/>
+              <a:gd name="textAreaTop" fmla="*/ 0 h 1140840"/>
+              <a:gd name="textAreaBottom" fmla="*/ 1143000 h 1140840"/>
             </a:gdLst>
             <a:ahLst/>
             <a:rect l="textAreaLeft" t="textAreaTop" r="textAreaRight" b="textAreaBottom"/>
@@ -11272,9 +11272,9 @@
         <p:grpSpPr>
           <a:xfrm>
             <a:off x="15316200" y="3238560"/>
-            <a:ext cx="1217520" cy="6246720"/>
+            <a:ext cx="1217160" cy="6246360"/>
             <a:chOff x="15316200" y="3238560"/>
-            <a:chExt cx="1217520" cy="6246720"/>
+            <a:chExt cx="1217160" cy="6246360"/>
           </a:xfrm>
         </p:grpSpPr>
         <p:sp>
@@ -11286,7 +11286,7 @@
           <p:spPr>
             <a:xfrm>
               <a:off x="15316200" y="4915080"/>
-              <a:ext cx="1217520" cy="1141200"/>
+              <a:ext cx="1217160" cy="1140840"/>
             </a:xfrm>
             <a:prstGeom prst="irregularSeal1">
               <a:avLst/>
@@ -11343,7 +11343,7 @@
           <p:spPr>
             <a:xfrm>
               <a:off x="15316200" y="3238560"/>
-              <a:ext cx="1217520" cy="1141200"/>
+              <a:ext cx="1217160" cy="1140840"/>
             </a:xfrm>
             <a:prstGeom prst="irregularSeal1">
               <a:avLst/>
@@ -11400,7 +11400,7 @@
           <p:spPr>
             <a:xfrm>
               <a:off x="15316200" y="8344080"/>
-              <a:ext cx="1217520" cy="1141200"/>
+              <a:ext cx="1217160" cy="1140840"/>
             </a:xfrm>
             <a:prstGeom prst="irregularSeal1">
               <a:avLst/>
@@ -11457,7 +11457,7 @@
           <p:spPr>
             <a:xfrm>
               <a:off x="15316200" y="6667560"/>
-              <a:ext cx="1217520" cy="1141200"/>
+              <a:ext cx="1217160" cy="1140840"/>
             </a:xfrm>
             <a:prstGeom prst="irregularSeal1">
               <a:avLst/>
@@ -11514,10 +11514,10 @@
         </p:nvGrpSpPr>
         <p:grpSpPr>
           <a:xfrm>
-            <a:off x="14095440" y="3695760"/>
-            <a:ext cx="1034640" cy="4874760"/>
-            <a:chOff x="14095440" y="3695760"/>
-            <a:chExt cx="1034640" cy="4874760"/>
+            <a:off x="14095440" y="3695400"/>
+            <a:ext cx="1034280" cy="4874040"/>
+            <a:chOff x="14095440" y="3695400"/>
+            <a:chExt cx="1034280" cy="4874040"/>
           </a:xfrm>
         </p:grpSpPr>
         <p:sp>
@@ -11528,8 +11528,8 @@
           </p:nvSpPr>
           <p:spPr>
             <a:xfrm rot="20311800">
-              <a:off x="14270760" y="3810960"/>
-              <a:ext cx="760320" cy="684000"/>
+              <a:off x="14270760" y="3810600"/>
+              <a:ext cx="759960" cy="683640"/>
             </a:xfrm>
             <a:prstGeom prst="rightArrow">
               <a:avLst>
@@ -11588,8 +11588,8 @@
           </p:nvSpPr>
           <p:spPr>
             <a:xfrm flipV="1" rot="1288200">
-              <a:off x="14194080" y="7771320"/>
-              <a:ext cx="760320" cy="683640"/>
+              <a:off x="14194080" y="7770240"/>
+              <a:ext cx="760320" cy="683280"/>
             </a:xfrm>
             <a:prstGeom prst="rightArrow">
               <a:avLst>
@@ -11648,8 +11648,8 @@
           </p:nvSpPr>
           <p:spPr>
             <a:xfrm flipV="1">
-              <a:off x="14249520" y="6894720"/>
-              <a:ext cx="760320" cy="684000"/>
+              <a:off x="14249520" y="6894000"/>
+              <a:ext cx="759960" cy="683640"/>
             </a:xfrm>
             <a:prstGeom prst="rightArrow">
               <a:avLst>
@@ -11708,8 +11708,8 @@
           </p:nvSpPr>
           <p:spPr>
             <a:xfrm flipV="1">
-              <a:off x="14325480" y="4837320"/>
-              <a:ext cx="760320" cy="684000"/>
+              <a:off x="14325480" y="4836600"/>
+              <a:ext cx="759960" cy="683640"/>
             </a:xfrm>
             <a:prstGeom prst="rightArrow">
               <a:avLst>
@@ -11769,10 +11769,10 @@
         </p:nvGrpSpPr>
         <p:grpSpPr>
           <a:xfrm>
-            <a:off x="11733480" y="4991040"/>
-            <a:ext cx="958320" cy="1979280"/>
-            <a:chOff x="11733480" y="4991040"/>
-            <a:chExt cx="958320" cy="1979280"/>
+            <a:off x="11733480" y="4990680"/>
+            <a:ext cx="957960" cy="1978560"/>
+            <a:chOff x="11733480" y="4990680"/>
+            <a:chExt cx="957960" cy="1978560"/>
           </a:xfrm>
         </p:grpSpPr>
         <p:sp>
@@ -11783,8 +11783,8 @@
           </p:nvSpPr>
           <p:spPr>
             <a:xfrm rot="20311800">
-              <a:off x="11832480" y="5106240"/>
-              <a:ext cx="760320" cy="684000"/>
+              <a:off x="11832480" y="5105880"/>
+              <a:ext cx="759960" cy="683640"/>
             </a:xfrm>
             <a:prstGeom prst="rightArrow">
               <a:avLst>
@@ -11843,8 +11843,8 @@
           </p:nvSpPr>
           <p:spPr>
             <a:xfrm flipV="1" rot="1288200">
-              <a:off x="11832120" y="6171120"/>
-              <a:ext cx="760320" cy="683640"/>
+              <a:off x="11832120" y="6170040"/>
+              <a:ext cx="760320" cy="683280"/>
             </a:xfrm>
             <a:prstGeom prst="rightArrow">
               <a:avLst>
@@ -12197,7 +12197,7 @@
         <p:spPr>
           <a:xfrm>
             <a:off x="887040" y="731520"/>
-            <a:ext cx="14285880" cy="1371240"/>
+            <a:ext cx="14285520" cy="1371240"/>
           </a:xfrm>
           <a:prstGeom prst="rect">
             <a:avLst/>
@@ -12265,7 +12265,7 @@
         <p:spPr>
           <a:xfrm>
             <a:off x="1265760" y="2057400"/>
-            <a:ext cx="15649560" cy="7771320"/>
+            <a:ext cx="15649200" cy="7770960"/>
           </a:xfrm>
           <a:prstGeom prst="rect">
             <a:avLst/>
@@ -12284,7 +12284,7 @@
         <p:spPr>
           <a:xfrm>
             <a:off x="9944280" y="2514600"/>
-            <a:ext cx="5828040" cy="487440"/>
+            <a:ext cx="5827680" cy="487440"/>
           </a:xfrm>
           <a:prstGeom prst="rect">
             <a:avLst/>
@@ -12347,7 +12347,7 @@
         <p:spPr>
           <a:xfrm>
             <a:off x="6629400" y="3886200"/>
-            <a:ext cx="4572000" cy="2286000"/>
+            <a:ext cx="4571640" cy="2285640"/>
           </a:xfrm>
           <a:prstGeom prst="wedgeRoundRectCallout">
             <a:avLst>
@@ -12376,7 +12376,11 @@
             <a:noAutofit/>
           </a:bodyPr>
           <a:p>
-            <a:pPr algn="ctr"/>
+            <a:pPr algn="ctr">
+              <a:lnSpc>
+                <a:spcPct val="100000"/>
+              </a:lnSpc>
+            </a:pPr>
             <a:r>
               <a:rPr b="0" lang="en-US" sz="1800" spc="-1" strike="noStrike">
                 <a:solidFill>
@@ -12445,7 +12449,7 @@
         <p:spPr>
           <a:xfrm>
             <a:off x="432000" y="2300400"/>
-            <a:ext cx="17159040" cy="7540560"/>
+            <a:ext cx="17158680" cy="7540200"/>
           </a:xfrm>
           <a:prstGeom prst="rect">
             <a:avLst/>
@@ -12464,7 +12468,7 @@
         <p:spPr>
           <a:xfrm>
             <a:off x="887040" y="731520"/>
-            <a:ext cx="14285880" cy="1371240"/>
+            <a:ext cx="14285520" cy="1371240"/>
           </a:xfrm>
           <a:prstGeom prst="rect">
             <a:avLst/>
@@ -12528,7 +12532,7 @@
         <p:spPr>
           <a:xfrm>
             <a:off x="13471920" y="1051560"/>
-            <a:ext cx="4332240" cy="975240"/>
+            <a:ext cx="4331880" cy="975240"/>
           </a:xfrm>
           <a:prstGeom prst="rect">
             <a:avLst/>
@@ -12589,7 +12593,7 @@
         <p:spPr>
           <a:xfrm>
             <a:off x="12032640" y="3332520"/>
-            <a:ext cx="6025320" cy="4667040"/>
+            <a:ext cx="6024960" cy="4666680"/>
           </a:xfrm>
           <a:prstGeom prst="rect">
             <a:avLst/>
@@ -12612,7 +12616,7 @@
         <p:spPr>
           <a:xfrm>
             <a:off x="7086600" y="3441600"/>
-            <a:ext cx="4793400" cy="4570560"/>
+            <a:ext cx="4793040" cy="4570200"/>
           </a:xfrm>
           <a:prstGeom prst="rect">
             <a:avLst/>
@@ -12630,8 +12634,8 @@
         </p:nvSpPr>
         <p:spPr>
           <a:xfrm>
-            <a:off x="6629760" y="5124960"/>
-            <a:ext cx="4572000" cy="2286000"/>
+            <a:off x="3886200" y="3429000"/>
+            <a:ext cx="4571640" cy="2285640"/>
           </a:xfrm>
           <a:prstGeom prst="wedgeRoundRectCallout">
             <a:avLst>
@@ -12660,7 +12664,11 @@
             <a:noAutofit/>
           </a:bodyPr>
           <a:p>
-            <a:pPr algn="ctr"/>
+            <a:pPr algn="ctr">
+              <a:lnSpc>
+                <a:spcPct val="100000"/>
+              </a:lnSpc>
+            </a:pPr>
             <a:r>
               <a:rPr b="0" lang="en-US" sz="1800" spc="-1" strike="noStrike">
                 <a:solidFill>
@@ -12729,7 +12737,7 @@
         <p:spPr>
           <a:xfrm>
             <a:off x="349200" y="2570400"/>
-            <a:ext cx="10842840" cy="7221960"/>
+            <a:ext cx="10842480" cy="7221600"/>
           </a:xfrm>
           <a:prstGeom prst="rect">
             <a:avLst/>
@@ -12748,7 +12756,7 @@
         <p:spPr>
           <a:xfrm>
             <a:off x="13269240" y="1058400"/>
-            <a:ext cx="4332240" cy="975240"/>
+            <a:ext cx="4331880" cy="975240"/>
           </a:xfrm>
           <a:prstGeom prst="rect">
             <a:avLst/>
@@ -12831,7 +12839,7 @@
         <p:spPr>
           <a:xfrm>
             <a:off x="887040" y="754560"/>
-            <a:ext cx="14285880" cy="1371240"/>
+            <a:ext cx="14285520" cy="1371240"/>
           </a:xfrm>
           <a:prstGeom prst="rect">
             <a:avLst/>
@@ -12899,7 +12907,7 @@
         <p:spPr>
           <a:xfrm>
             <a:off x="11658600" y="2435400"/>
-            <a:ext cx="5942880" cy="7393680"/>
+            <a:ext cx="5942520" cy="7393320"/>
           </a:xfrm>
           <a:prstGeom prst="rect">
             <a:avLst/>
@@ -12922,7 +12930,7 @@
         <p:spPr>
           <a:xfrm>
             <a:off x="4114800" y="3797640"/>
-            <a:ext cx="6628680" cy="4948200"/>
+            <a:ext cx="6628320" cy="4947840"/>
           </a:xfrm>
           <a:prstGeom prst="rect">
             <a:avLst/>
@@ -12945,7 +12953,7 @@
         <p:spPr>
           <a:xfrm>
             <a:off x="13944600" y="4283640"/>
-            <a:ext cx="3885480" cy="3885480"/>
+            <a:ext cx="3885120" cy="3885120"/>
           </a:xfrm>
           <a:prstGeom prst="rect">
             <a:avLst/>
@@ -12963,8 +12971,8 @@
         </p:nvSpPr>
         <p:spPr>
           <a:xfrm>
-            <a:off x="6629760" y="5124960"/>
-            <a:ext cx="4572000" cy="2286000"/>
+            <a:off x="5943960" y="5486400"/>
+            <a:ext cx="4571640" cy="2285640"/>
           </a:xfrm>
           <a:prstGeom prst="wedgeRoundRectCallout">
             <a:avLst>
@@ -12993,7 +13001,11 @@
             <a:noAutofit/>
           </a:bodyPr>
           <a:p>
-            <a:pPr algn="ctr"/>
+            <a:pPr algn="ctr">
+              <a:lnSpc>
+                <a:spcPct val="100000"/>
+              </a:lnSpc>
+            </a:pPr>
             <a:r>
               <a:rPr b="0" lang="en-US" sz="1800" spc="-1" strike="noStrike">
                 <a:solidFill>
@@ -13058,7 +13070,7 @@
         <p:spPr>
           <a:xfrm>
             <a:off x="887040" y="731520"/>
-            <a:ext cx="14285880" cy="1371600"/>
+            <a:ext cx="14285520" cy="1371240"/>
           </a:xfrm>
           <a:prstGeom prst="rect">
             <a:avLst/>
@@ -13122,7 +13134,7 @@
         <p:spPr>
           <a:xfrm>
             <a:off x="14401800" y="2712240"/>
-            <a:ext cx="1371240" cy="487800"/>
+            <a:ext cx="1370880" cy="487440"/>
           </a:xfrm>
           <a:prstGeom prst="rect">
             <a:avLst/>
@@ -13173,7 +13185,7 @@
         <p:spPr>
           <a:xfrm>
             <a:off x="457200" y="3429000"/>
-            <a:ext cx="17442720" cy="6171840"/>
+            <a:ext cx="17442360" cy="6171480"/>
           </a:xfrm>
           <a:prstGeom prst="rect">
             <a:avLst/>
@@ -13196,7 +13208,7 @@
         <p:spPr>
           <a:xfrm>
             <a:off x="13258800" y="447120"/>
-            <a:ext cx="4800240" cy="4485600"/>
+            <a:ext cx="4799880" cy="4485240"/>
           </a:xfrm>
           <a:prstGeom prst="rect">
             <a:avLst/>
@@ -13215,7 +13227,7 @@
         <p:spPr>
           <a:xfrm>
             <a:off x="685800" y="2940840"/>
-            <a:ext cx="9143640" cy="487800"/>
+            <a:ext cx="9143280" cy="487440"/>
           </a:xfrm>
           <a:prstGeom prst="rect">
             <a:avLst/>
@@ -13309,7 +13321,7 @@
         <p:spPr>
           <a:xfrm>
             <a:off x="887040" y="731520"/>
-            <a:ext cx="14285880" cy="1371600"/>
+            <a:ext cx="14285520" cy="1371240"/>
           </a:xfrm>
           <a:prstGeom prst="rect">
             <a:avLst/>
@@ -13373,7 +13385,7 @@
         <p:spPr>
           <a:xfrm>
             <a:off x="14401800" y="2712240"/>
-            <a:ext cx="1371240" cy="487800"/>
+            <a:ext cx="1370880" cy="487440"/>
           </a:xfrm>
           <a:prstGeom prst="rect">
             <a:avLst/>
@@ -13421,7 +13433,7 @@
         <p:spPr>
           <a:xfrm>
             <a:off x="6041520" y="2514600"/>
-            <a:ext cx="10417320" cy="7302240"/>
+            <a:ext cx="10416960" cy="7301880"/>
           </a:xfrm>
           <a:prstGeom prst="rect">
             <a:avLst/>
@@ -13440,7 +13452,7 @@
         <p:spPr>
           <a:xfrm>
             <a:off x="997920" y="3657600"/>
-            <a:ext cx="4030920" cy="487440"/>
+            <a:ext cx="4030560" cy="487440"/>
           </a:xfrm>
           <a:prstGeom prst="rect">
             <a:avLst/>
@@ -13497,7 +13509,7 @@
         <p:spPr>
           <a:xfrm>
             <a:off x="997920" y="4339080"/>
-            <a:ext cx="3868920" cy="1279440"/>
+            <a:ext cx="3868560" cy="1279440"/>
           </a:xfrm>
           <a:prstGeom prst="rect">
             <a:avLst/>
@@ -13554,7 +13566,7 @@
         <p:spPr>
           <a:xfrm>
             <a:off x="997920" y="6172200"/>
-            <a:ext cx="4030920" cy="487440"/>
+            <a:ext cx="4030560" cy="487440"/>
           </a:xfrm>
           <a:prstGeom prst="rect">
             <a:avLst/>
@@ -13611,7 +13623,7 @@
         <p:spPr>
           <a:xfrm>
             <a:off x="997920" y="6853680"/>
-            <a:ext cx="3868920" cy="1279440"/>
+            <a:ext cx="3868560" cy="1279440"/>
           </a:xfrm>
           <a:prstGeom prst="rect">
             <a:avLst/>
@@ -13668,7 +13680,7 @@
         <p:spPr>
           <a:xfrm>
             <a:off x="6629760" y="5124960"/>
-            <a:ext cx="4572000" cy="2286000"/>
+            <a:ext cx="4571640" cy="2285640"/>
           </a:xfrm>
           <a:prstGeom prst="wedgeRoundRectCallout">
             <a:avLst>
@@ -13697,7 +13709,11 @@
             <a:noAutofit/>
           </a:bodyPr>
           <a:p>
-            <a:pPr algn="ctr"/>
+            <a:pPr algn="ctr">
+              <a:lnSpc>
+                <a:spcPct val="100000"/>
+              </a:lnSpc>
+            </a:pPr>
             <a:r>
               <a:rPr b="0" lang="en-US" sz="1800" spc="-1" strike="noStrike">
                 <a:solidFill>
@@ -13762,7 +13778,7 @@
         <p:spPr>
           <a:xfrm>
             <a:off x="887040" y="731520"/>
-            <a:ext cx="14285880" cy="1371240"/>
+            <a:ext cx="14285520" cy="1371240"/>
           </a:xfrm>
           <a:prstGeom prst="rect">
             <a:avLst/>
@@ -13830,7 +13846,7 @@
         <p:spPr>
           <a:xfrm>
             <a:off x="5257800" y="2330280"/>
-            <a:ext cx="12581640" cy="7499520"/>
+            <a:ext cx="12581280" cy="7499160"/>
           </a:xfrm>
           <a:prstGeom prst="rect">
             <a:avLst/>
@@ -13849,7 +13865,7 @@
         <p:spPr>
           <a:xfrm>
             <a:off x="914400" y="2611080"/>
-            <a:ext cx="4030920" cy="487440"/>
+            <a:ext cx="4030560" cy="487440"/>
           </a:xfrm>
           <a:prstGeom prst="rect">
             <a:avLst/>
@@ -13906,7 +13922,7 @@
         <p:spPr>
           <a:xfrm>
             <a:off x="914400" y="3292560"/>
-            <a:ext cx="3868920" cy="1279440"/>
+            <a:ext cx="3868560" cy="1279440"/>
           </a:xfrm>
           <a:prstGeom prst="rect">
             <a:avLst/>
@@ -14045,7 +14061,7 @@
         <p:spPr>
           <a:xfrm>
             <a:off x="914400" y="5125680"/>
-            <a:ext cx="4030920" cy="487440"/>
+            <a:ext cx="4030560" cy="487440"/>
           </a:xfrm>
           <a:prstGeom prst="rect">
             <a:avLst/>
@@ -14102,7 +14118,7 @@
         <p:spPr>
           <a:xfrm>
             <a:off x="914400" y="5807160"/>
-            <a:ext cx="3868920" cy="1279440"/>
+            <a:ext cx="3868560" cy="1279440"/>
           </a:xfrm>
           <a:prstGeom prst="rect">
             <a:avLst/>
@@ -14139,7 +14155,17 @@
                 <a:latin typeface="Open Sauce"/>
                 <a:ea typeface="Open Sauce"/>
               </a:rPr>
-              <a:t>First launch: 2019</a:t>
+              <a:t>First launch: </a:t>
+            </a:r>
+            <a:r>
+              <a:rPr b="1" lang="en-US" sz="2400" spc="-1" strike="noStrike">
+                <a:solidFill>
+                  <a:srgbClr val="ffffff"/>
+                </a:solidFill>
+                <a:latin typeface="Open Sauce"/>
+                <a:ea typeface="Open Sauce"/>
+              </a:rPr>
+              <a:t>2019</a:t>
             </a:r>
             <a:endParaRPr b="0" lang="en-US" sz="2400" spc="-1" strike="noStrike">
               <a:solidFill>
@@ -14165,7 +14191,17 @@
                 <a:latin typeface="Open Sauce"/>
                 <a:ea typeface="Open Sauce"/>
               </a:rPr>
-              <a:t>Total launches: 656</a:t>
+              <a:t>Total launches: </a:t>
+            </a:r>
+            <a:r>
+              <a:rPr b="1" lang="en-US" sz="2400" spc="-1" strike="noStrike">
+                <a:solidFill>
+                  <a:srgbClr val="ffffff"/>
+                </a:solidFill>
+                <a:latin typeface="Open Sauce"/>
+                <a:ea typeface="Open Sauce"/>
+              </a:rPr>
+              <a:t>656</a:t>
             </a:r>
             <a:endParaRPr b="0" lang="en-US" sz="2400" spc="-1" strike="noStrike">
               <a:solidFill>
@@ -14221,7 +14257,7 @@
         <p:spPr>
           <a:xfrm>
             <a:off x="914400" y="7640280"/>
-            <a:ext cx="4030920" cy="487440"/>
+            <a:ext cx="4030560" cy="487440"/>
           </a:xfrm>
           <a:prstGeom prst="rect">
             <a:avLst/>
@@ -14278,7 +14314,7 @@
         <p:spPr>
           <a:xfrm>
             <a:off x="914400" y="8321760"/>
-            <a:ext cx="4343400" cy="1280160"/>
+            <a:ext cx="4343040" cy="1279800"/>
           </a:xfrm>
           <a:prstGeom prst="rect">
             <a:avLst/>
